--- a/slides/modules/m11-gitops-at-scale.pptx
+++ b/slides/modules/m11-gitops-at-scale.pptx
@@ -13,6 +13,10 @@
     <p:sldId id="261" r:id="rId13"/>
     <p:sldId id="262" r:id="rId14"/>
     <p:sldId id="263" r:id="rId15"/>
+    <p:sldId id="264" r:id="rId16"/>
+    <p:sldId id="265" r:id="rId17"/>
+    <p:sldId id="266" r:id="rId18"/>
+    <p:sldId id="267" r:id="rId19"/>
   </p:sldIdLst>
   <p:sldSz cx="12191695" cy="6858000" type="screen4x3"/>
   <p:notesSz cx="6858000" cy="9144000"/>
@@ -534,6 +538,146 @@
 </p:notes>
 </file>
 
+<file path=ppt/notesSlides/notesSlide10.xml><?xml version="1.0" encoding="utf-8"?>
+<p:notes xmlns:a="http://schemas.openxmlformats.org/drawingml/2006/main" xmlns:p="http://schemas.openxmlformats.org/presentationml/2006/main" xmlns:r="http://schemas.openxmlformats.org/officeDocument/2006/relationships">
+  <p:cSld>
+    <p:spTree>
+      <p:nvGrpSpPr>
+        <p:cNvPr id="1" name=""/>
+        <p:cNvGrpSpPr/>
+        <p:nvPr/>
+      </p:nvGrpSpPr>
+      <p:grpSpPr>
+        <a:xfrm>
+          <a:off x="0" y="0"/>
+          <a:ext cx="0" cy="0"/>
+          <a:chOff x="0" y="0"/>
+          <a:chExt cx="0" cy="0"/>
+        </a:xfrm>
+      </p:grpSpPr>
+      <p:sp>
+        <p:nvSpPr>
+          <p:cNvPr id="2" name="Slide Image Placeholder 1"/>
+          <p:cNvSpPr>
+            <a:spLocks noGrp="1"/>
+          </p:cNvSpPr>
+          <p:nvPr>
+            <p:ph type="sldImg" idx="2"/>
+          </p:nvPr>
+        </p:nvSpPr>
+        <p:spPr/>
+      </p:sp>
+      <p:sp>
+        <p:nvSpPr>
+          <p:cNvPr id="3" name="Notes Placeholder 2"/>
+          <p:cNvSpPr>
+            <a:spLocks noGrp="1"/>
+          </p:cNvSpPr>
+          <p:nvPr>
+            <p:ph type="body" idx="3" sz="quarter"/>
+          </p:nvPr>
+        </p:nvSpPr>
+        <p:spPr/>
+        <p:txBody>
+          <a:bodyPr/>
+          <a:lstStyle/>
+          <a:p>
+            <a:r>
+              <a:t>Concept diagram: Canary analysis.</a:t>
+            </a:r>
+          </a:p>
+        </p:txBody>
+      </p:sp>
+      <p:sp>
+        <p:nvSpPr>
+          <p:cNvPr id="4" name="Slide Number Placeholder 3"/>
+          <p:cNvSpPr>
+            <a:spLocks noGrp="1"/>
+          </p:cNvSpPr>
+          <p:nvPr>
+            <p:ph type="sldNum" idx="5" sz="quarter"/>
+          </p:nvPr>
+        </p:nvSpPr>
+        <p:spPr/>
+      </p:sp>
+    </p:spTree>
+  </p:cSld>
+  <p:clrMapOvr>
+    <a:masterClrMapping/>
+  </p:clrMapOvr>
+</p:notes>
+</file>
+
+<file path=ppt/notesSlides/notesSlide11.xml><?xml version="1.0" encoding="utf-8"?>
+<p:notes xmlns:a="http://schemas.openxmlformats.org/drawingml/2006/main" xmlns:p="http://schemas.openxmlformats.org/presentationml/2006/main" xmlns:r="http://schemas.openxmlformats.org/officeDocument/2006/relationships">
+  <p:cSld>
+    <p:spTree>
+      <p:nvGrpSpPr>
+        <p:cNvPr id="1" name=""/>
+        <p:cNvGrpSpPr/>
+        <p:nvPr/>
+      </p:nvGrpSpPr>
+      <p:grpSpPr>
+        <a:xfrm>
+          <a:off x="0" y="0"/>
+          <a:ext cx="0" cy="0"/>
+          <a:chOff x="0" y="0"/>
+          <a:chExt cx="0" cy="0"/>
+        </a:xfrm>
+      </p:grpSpPr>
+      <p:sp>
+        <p:nvSpPr>
+          <p:cNvPr id="2" name="Slide Image Placeholder 1"/>
+          <p:cNvSpPr>
+            <a:spLocks noGrp="1"/>
+          </p:cNvSpPr>
+          <p:nvPr>
+            <p:ph type="sldImg" idx="2"/>
+          </p:nvPr>
+        </p:nvSpPr>
+        <p:spPr/>
+      </p:sp>
+      <p:sp>
+        <p:nvSpPr>
+          <p:cNvPr id="3" name="Notes Placeholder 2"/>
+          <p:cNvSpPr>
+            <a:spLocks noGrp="1"/>
+          </p:cNvSpPr>
+          <p:nvPr>
+            <p:ph type="body" idx="3" sz="quarter"/>
+          </p:nvPr>
+        </p:nvSpPr>
+        <p:spPr/>
+        <p:txBody>
+          <a:bodyPr/>
+          <a:lstStyle/>
+          <a:p>
+            <a:r>
+              <a:t>Concept diagram: What you built.</a:t>
+            </a:r>
+          </a:p>
+        </p:txBody>
+      </p:sp>
+      <p:sp>
+        <p:nvSpPr>
+          <p:cNvPr id="4" name="Slide Number Placeholder 3"/>
+          <p:cNvSpPr>
+            <a:spLocks noGrp="1"/>
+          </p:cNvSpPr>
+          <p:nvPr>
+            <p:ph type="sldNum" idx="5" sz="quarter"/>
+          </p:nvPr>
+        </p:nvSpPr>
+        <p:spPr/>
+      </p:sp>
+    </p:spTree>
+  </p:cSld>
+  <p:clrMapOvr>
+    <a:masterClrMapping/>
+  </p:clrMapOvr>
+</p:notes>
+</file>
+
 <file path=ppt/notesSlides/notesSlide2.xml><?xml version="1.0" encoding="utf-8"?>
 <p:notes xmlns:a="http://schemas.openxmlformats.org/drawingml/2006/main" xmlns:p="http://schemas.openxmlformats.org/presentationml/2006/main" xmlns:r="http://schemas.openxmlformats.org/officeDocument/2006/relationships">
   <p:cSld>
@@ -930,6 +1074,146 @@
           <a:p>
             <a:r>
               <a:t>Land the transfer and stay honest. In your org: how many deployment definitions are quietly drifting because each environment is a hand-maintained copy rather than generated from one source? When a bad release last reached prod, how did you find out, and how much of recovery was a human noticing? Is your "run the migration in the right place" rule structural or a runbook step someone can skip? Then the credibility close on restraint: don't canary a change whose failure is slow or downstream — a short readiness analysis will pass a subtle data bug; gate those on tests and manual promotion. Don't reach for pod-ratio when you need exact or header-based traffic — that needs a traffic router. Don't auto-promote before your analysis has earned trust. And blue-green's clean cutover costs a full second copy — pick the strategy your capacity affords.</a:t>
+            </a:r>
+          </a:p>
+        </p:txBody>
+      </p:sp>
+      <p:sp>
+        <p:nvSpPr>
+          <p:cNvPr id="4" name="Slide Number Placeholder 3"/>
+          <p:cNvSpPr>
+            <a:spLocks noGrp="1"/>
+          </p:cNvSpPr>
+          <p:nvPr>
+            <p:ph type="sldNum" idx="5" sz="quarter"/>
+          </p:nvPr>
+        </p:nvSpPr>
+        <p:spPr/>
+      </p:sp>
+    </p:spTree>
+  </p:cSld>
+  <p:clrMapOvr>
+    <a:masterClrMapping/>
+  </p:clrMapOvr>
+</p:notes>
+</file>
+
+<file path=ppt/notesSlides/notesSlide8.xml><?xml version="1.0" encoding="utf-8"?>
+<p:notes xmlns:a="http://schemas.openxmlformats.org/drawingml/2006/main" xmlns:p="http://schemas.openxmlformats.org/presentationml/2006/main" xmlns:r="http://schemas.openxmlformats.org/officeDocument/2006/relationships">
+  <p:cSld>
+    <p:spTree>
+      <p:nvGrpSpPr>
+        <p:cNvPr id="1" name=""/>
+        <p:cNvGrpSpPr/>
+        <p:nvPr/>
+      </p:nvGrpSpPr>
+      <p:grpSpPr>
+        <a:xfrm>
+          <a:off x="0" y="0"/>
+          <a:ext cx="0" cy="0"/>
+          <a:chOff x="0" y="0"/>
+          <a:chExt cx="0" cy="0"/>
+        </a:xfrm>
+      </p:grpSpPr>
+      <p:sp>
+        <p:nvSpPr>
+          <p:cNvPr id="2" name="Slide Image Placeholder 1"/>
+          <p:cNvSpPr>
+            <a:spLocks noGrp="1"/>
+          </p:cNvSpPr>
+          <p:nvPr>
+            <p:ph type="sldImg" idx="2"/>
+          </p:nvPr>
+        </p:nvSpPr>
+        <p:spPr/>
+      </p:sp>
+      <p:sp>
+        <p:nvSpPr>
+          <p:cNvPr id="3" name="Notes Placeholder 2"/>
+          <p:cNvSpPr>
+            <a:spLocks noGrp="1"/>
+          </p:cNvSpPr>
+          <p:nvPr>
+            <p:ph type="body" idx="3" sz="quarter"/>
+          </p:nvPr>
+        </p:nvSpPr>
+        <p:spPr/>
+        <p:txBody>
+          <a:bodyPr/>
+          <a:lstStyle/>
+          <a:p>
+            <a:r>
+              <a:t>Concept diagram: Appset.</a:t>
+            </a:r>
+          </a:p>
+        </p:txBody>
+      </p:sp>
+      <p:sp>
+        <p:nvSpPr>
+          <p:cNvPr id="4" name="Slide Number Placeholder 3"/>
+          <p:cNvSpPr>
+            <a:spLocks noGrp="1"/>
+          </p:cNvSpPr>
+          <p:nvPr>
+            <p:ph type="sldNum" idx="5" sz="quarter"/>
+          </p:nvPr>
+        </p:nvSpPr>
+        <p:spPr/>
+      </p:sp>
+    </p:spTree>
+  </p:cSld>
+  <p:clrMapOvr>
+    <a:masterClrMapping/>
+  </p:clrMapOvr>
+</p:notes>
+</file>
+
+<file path=ppt/notesSlides/notesSlide9.xml><?xml version="1.0" encoding="utf-8"?>
+<p:notes xmlns:a="http://schemas.openxmlformats.org/drawingml/2006/main" xmlns:p="http://schemas.openxmlformats.org/presentationml/2006/main" xmlns:r="http://schemas.openxmlformats.org/officeDocument/2006/relationships">
+  <p:cSld>
+    <p:spTree>
+      <p:nvGrpSpPr>
+        <p:cNvPr id="1" name=""/>
+        <p:cNvGrpSpPr/>
+        <p:nvPr/>
+      </p:nvGrpSpPr>
+      <p:grpSpPr>
+        <a:xfrm>
+          <a:off x="0" y="0"/>
+          <a:ext cx="0" cy="0"/>
+          <a:chOff x="0" y="0"/>
+          <a:chExt cx="0" cy="0"/>
+        </a:xfrm>
+      </p:grpSpPr>
+      <p:sp>
+        <p:nvSpPr>
+          <p:cNvPr id="2" name="Slide Image Placeholder 1"/>
+          <p:cNvSpPr>
+            <a:spLocks noGrp="1"/>
+          </p:cNvSpPr>
+          <p:nvPr>
+            <p:ph type="sldImg" idx="2"/>
+          </p:nvPr>
+        </p:nvSpPr>
+        <p:spPr/>
+      </p:sp>
+      <p:sp>
+        <p:nvSpPr>
+          <p:cNvPr id="3" name="Notes Placeholder 2"/>
+          <p:cNvSpPr>
+            <a:spLocks noGrp="1"/>
+          </p:cNvSpPr>
+          <p:nvPr>
+            <p:ph type="body" idx="3" sz="quarter"/>
+          </p:nvPr>
+        </p:nvSpPr>
+        <p:spPr/>
+        <p:txBody>
+          <a:bodyPr/>
+          <a:lstStyle/>
+          <a:p>
+            <a:r>
+              <a:t>Concept diagram: Sync waves.</a:t>
             </a:r>
           </a:p>
         </p:txBody>
@@ -4138,6 +4422,1104 @@
 </p:sld>
 </file>
 
+<file path=ppt/slides/slide10.xml><?xml version="1.0" encoding="utf-8"?>
+<p:sld xmlns:a="http://schemas.openxmlformats.org/drawingml/2006/main" xmlns:p="http://schemas.openxmlformats.org/presentationml/2006/main" xmlns:r="http://schemas.openxmlformats.org/officeDocument/2006/relationships">
+  <p:cSld>
+    <p:spTree>
+      <p:nvGrpSpPr>
+        <p:cNvPr id="1" name=""/>
+        <p:cNvGrpSpPr/>
+        <p:nvPr/>
+      </p:nvGrpSpPr>
+      <p:grpSpPr/>
+      <p:pic>
+        <p:nvPicPr>
+          <p:cNvPr id="2" name="Picture 1" descr="redhat_logo.jpg"/>
+          <p:cNvPicPr>
+            <a:picLocks noChangeAspect="1"/>
+          </p:cNvPicPr>
+          <p:nvPr/>
+        </p:nvPicPr>
+        <p:blipFill>
+          <a:blip r:embed="rId2"/>
+          <a:stretch>
+            <a:fillRect/>
+          </a:stretch>
+        </p:blipFill>
+        <p:spPr>
+          <a:xfrm>
+            <a:off x="10326319" y="475488"/>
+            <a:ext cx="1024128" cy="242248"/>
+          </a:xfrm>
+          <a:prstGeom prst="rect">
+            <a:avLst/>
+          </a:prstGeom>
+        </p:spPr>
+      </p:pic>
+      <p:sp>
+        <p:nvSpPr>
+          <p:cNvPr id="3" name="TextBox 2"/>
+          <p:cNvSpPr txBox="1"/>
+          <p:nvPr/>
+        </p:nvSpPr>
+        <p:spPr>
+          <a:xfrm>
+            <a:off x="841248" y="548640"/>
+            <a:ext cx="8595360" cy="274320"/>
+          </a:xfrm>
+          <a:prstGeom prst="rect">
+            <a:avLst/>
+          </a:prstGeom>
+          <a:noFill/>
+        </p:spPr>
+        <p:txBody>
+          <a:bodyPr wrap="square" anchor="t" lIns="0" rIns="0" tIns="0" bIns="0">
+            <a:spAutoFit/>
+          </a:bodyPr>
+          <a:lstStyle/>
+          <a:p>
+            <a:pPr algn="l">
+              <a:lnSpc>
+                <a:spcPct val="106000"/>
+              </a:lnSpc>
+              <a:spcBef>
+                <a:spcPts val="0"/>
+              </a:spcBef>
+              <a:spcAft>
+                <a:spcPts val="0"/>
+              </a:spcAft>
+            </a:pPr>
+            <a:r>
+              <a:rPr sz="1250" b="1" spc="220">
+                <a:solidFill>
+                  <a:srgbClr val="EE0000"/>
+                </a:solidFill>
+                <a:latin typeface="Red Hat Display"/>
+              </a:rPr>
+              <a:t>M11 · GITOPS AT SCALE &amp; PROGRESSIVE DELIVERY</a:t>
+            </a:r>
+          </a:p>
+        </p:txBody>
+      </p:sp>
+      <p:sp>
+        <p:nvSpPr>
+          <p:cNvPr id="4" name="TextBox 3"/>
+          <p:cNvSpPr txBox="1"/>
+          <p:nvPr/>
+        </p:nvSpPr>
+        <p:spPr>
+          <a:xfrm>
+            <a:off x="841248" y="877824"/>
+            <a:ext cx="10515600" cy="548640"/>
+          </a:xfrm>
+          <a:prstGeom prst="rect">
+            <a:avLst/>
+          </a:prstGeom>
+          <a:noFill/>
+        </p:spPr>
+        <p:txBody>
+          <a:bodyPr wrap="none" anchor="t" lIns="0" rIns="0" tIns="0" bIns="0">
+            <a:spAutoFit/>
+          </a:bodyPr>
+          <a:lstStyle/>
+          <a:p>
+            <a:pPr algn="l">
+              <a:lnSpc>
+                <a:spcPct val="100000"/>
+              </a:lnSpc>
+              <a:spcBef>
+                <a:spcPts val="0"/>
+              </a:spcBef>
+              <a:spcAft>
+                <a:spcPts val="0"/>
+              </a:spcAft>
+            </a:pPr>
+            <a:r>
+              <a:rPr sz="2500" b="1">
+                <a:solidFill>
+                  <a:srgbClr val="1A1A1A"/>
+                </a:solidFill>
+                <a:latin typeface="Red Hat Display"/>
+              </a:rPr>
+              <a:t>Sync waves</a:t>
+            </a:r>
+          </a:p>
+        </p:txBody>
+      </p:sp>
+      <p:cxnSp>
+        <p:nvCxnSpPr>
+          <p:cNvPr id="5" name="Connector 4"/>
+          <p:cNvCxnSpPr/>
+          <p:nvPr/>
+        </p:nvCxnSpPr>
+        <p:spPr>
+          <a:xfrm>
+            <a:off x="841248" y="1554480"/>
+            <a:ext cx="1371600" cy="0"/>
+          </a:xfrm>
+          <a:prstGeom prst="bentConnector3">
+            <a:avLst/>
+          </a:prstGeom>
+          <a:ln w="31750">
+            <a:solidFill>
+              <a:srgbClr val="EE0000"/>
+            </a:solidFill>
+          </a:ln>
+          <a:effectLst/>
+        </p:spPr>
+        <p:style>
+          <a:lnRef idx="2">
+            <a:schemeClr val="accent1"/>
+          </a:lnRef>
+          <a:fillRef idx="0">
+            <a:schemeClr val="accent1"/>
+          </a:fillRef>
+          <a:effectRef idx="1">
+            <a:schemeClr val="accent1"/>
+          </a:effectRef>
+          <a:fontRef idx="minor">
+            <a:schemeClr val="tx1"/>
+          </a:fontRef>
+        </p:style>
+      </p:cxnSp>
+      <p:sp>
+        <p:nvSpPr>
+          <p:cNvPr id="6" name="Rounded Rectangle 5"/>
+          <p:cNvSpPr/>
+          <p:nvPr/>
+        </p:nvSpPr>
+        <p:spPr>
+          <a:xfrm>
+            <a:off x="841248" y="2331720"/>
+            <a:ext cx="10509199" cy="3794760"/>
+          </a:xfrm>
+          <a:prstGeom prst="roundRect">
+            <a:avLst>
+              <a:gd name="adj" fmla="val 4000"/>
+            </a:avLst>
+          </a:prstGeom>
+          <a:solidFill>
+            <a:srgbClr val="FFFFFF"/>
+          </a:solidFill>
+          <a:ln w="15240">
+            <a:solidFill>
+              <a:srgbClr val="DDE1E6"/>
+            </a:solidFill>
+          </a:ln>
+          <a:effectLst/>
+        </p:spPr>
+        <p:style>
+          <a:lnRef idx="1">
+            <a:schemeClr val="accent1"/>
+          </a:lnRef>
+          <a:fillRef idx="3">
+            <a:schemeClr val="accent1"/>
+          </a:fillRef>
+          <a:effectRef idx="2">
+            <a:schemeClr val="accent1"/>
+          </a:effectRef>
+          <a:fontRef idx="minor">
+            <a:schemeClr val="lt1"/>
+          </a:fontRef>
+        </p:style>
+        <p:txBody>
+          <a:bodyPr rtlCol="0" anchor="ctr"/>
+          <a:lstStyle/>
+          <a:p>
+            <a:pPr algn="ctr"/>
+          </a:p>
+        </p:txBody>
+      </p:sp>
+      <p:pic>
+        <p:nvPicPr>
+          <p:cNvPr id="7" name="Picture 6" descr="02-sync-waves.png"/>
+          <p:cNvPicPr>
+            <a:picLocks noChangeAspect="1"/>
+          </p:cNvPicPr>
+          <p:nvPr/>
+        </p:nvPicPr>
+        <p:blipFill>
+          <a:blip r:embed="rId3"/>
+          <a:stretch>
+            <a:fillRect/>
+          </a:stretch>
+        </p:blipFill>
+        <p:spPr>
+          <a:xfrm>
+            <a:off x="1042416" y="3625846"/>
+            <a:ext cx="10106863" cy="1206506"/>
+          </a:xfrm>
+          <a:prstGeom prst="rect">
+            <a:avLst/>
+          </a:prstGeom>
+        </p:spPr>
+      </p:pic>
+      <p:cxnSp>
+        <p:nvCxnSpPr>
+          <p:cNvPr id="8" name="Connector 7"/>
+          <p:cNvCxnSpPr/>
+          <p:nvPr/>
+        </p:nvCxnSpPr>
+        <p:spPr>
+          <a:xfrm>
+            <a:off x="841248" y="6437376"/>
+            <a:ext cx="10509199" cy="0"/>
+          </a:xfrm>
+          <a:prstGeom prst="bentConnector3">
+            <a:avLst/>
+          </a:prstGeom>
+          <a:ln w="12700">
+            <a:solidFill>
+              <a:srgbClr val="DDE1E6"/>
+            </a:solidFill>
+          </a:ln>
+          <a:effectLst/>
+        </p:spPr>
+        <p:style>
+          <a:lnRef idx="2">
+            <a:schemeClr val="accent1"/>
+          </a:lnRef>
+          <a:fillRef idx="0">
+            <a:schemeClr val="accent1"/>
+          </a:fillRef>
+          <a:effectRef idx="1">
+            <a:schemeClr val="accent1"/>
+          </a:effectRef>
+          <a:fontRef idx="minor">
+            <a:schemeClr val="tx1"/>
+          </a:fontRef>
+        </p:style>
+      </p:cxnSp>
+      <p:sp>
+        <p:nvSpPr>
+          <p:cNvPr id="9" name="TextBox 8"/>
+          <p:cNvSpPr txBox="1"/>
+          <p:nvPr/>
+        </p:nvSpPr>
+        <p:spPr>
+          <a:xfrm>
+            <a:off x="841248" y="6473952"/>
+            <a:ext cx="7315200" cy="274320"/>
+          </a:xfrm>
+          <a:prstGeom prst="rect">
+            <a:avLst/>
+          </a:prstGeom>
+          <a:noFill/>
+        </p:spPr>
+        <p:txBody>
+          <a:bodyPr wrap="square" anchor="t" lIns="0" rIns="0" tIns="0" bIns="0">
+            <a:spAutoFit/>
+          </a:bodyPr>
+          <a:lstStyle/>
+          <a:p>
+            <a:pPr algn="l">
+              <a:lnSpc>
+                <a:spcPct val="106000"/>
+              </a:lnSpc>
+              <a:spcBef>
+                <a:spcPts val="0"/>
+              </a:spcBef>
+              <a:spcAft>
+                <a:spcPts val="0"/>
+              </a:spcAft>
+            </a:pPr>
+            <a:r>
+              <a:rPr sz="950" b="0">
+                <a:solidFill>
+                  <a:srgbClr val="8A9099"/>
+                </a:solidFill>
+                <a:latin typeface="Red Hat Text"/>
+              </a:rPr>
+              <a:t>CONFIDENTIAL</a:t>
+            </a:r>
+          </a:p>
+        </p:txBody>
+      </p:sp>
+      <p:sp>
+        <p:nvSpPr>
+          <p:cNvPr id="10" name="TextBox 9"/>
+          <p:cNvSpPr txBox="1"/>
+          <p:nvPr/>
+        </p:nvSpPr>
+        <p:spPr>
+          <a:xfrm>
+            <a:off x="10801807" y="6473952"/>
+            <a:ext cx="548640" cy="274320"/>
+          </a:xfrm>
+          <a:prstGeom prst="rect">
+            <a:avLst/>
+          </a:prstGeom>
+          <a:noFill/>
+        </p:spPr>
+        <p:txBody>
+          <a:bodyPr wrap="square" anchor="t" lIns="0" rIns="0" tIns="0" bIns="0">
+            <a:spAutoFit/>
+          </a:bodyPr>
+          <a:lstStyle/>
+          <a:p>
+            <a:pPr algn="r">
+              <a:lnSpc>
+                <a:spcPct val="106000"/>
+              </a:lnSpc>
+              <a:spcBef>
+                <a:spcPts val="0"/>
+              </a:spcBef>
+              <a:spcAft>
+                <a:spcPts val="0"/>
+              </a:spcAft>
+            </a:pPr>
+            <a:r>
+              <a:rPr sz="950" b="0">
+                <a:solidFill>
+                  <a:srgbClr val="8A9099"/>
+                </a:solidFill>
+                <a:latin typeface="Red Hat Text"/>
+              </a:rPr>
+              <a:t>9</a:t>
+            </a:r>
+          </a:p>
+        </p:txBody>
+      </p:sp>
+    </p:spTree>
+  </p:cSld>
+  <p:clrMapOvr>
+    <a:masterClrMapping/>
+  </p:clrMapOvr>
+</p:sld>
+</file>
+
+<file path=ppt/slides/slide11.xml><?xml version="1.0" encoding="utf-8"?>
+<p:sld xmlns:a="http://schemas.openxmlformats.org/drawingml/2006/main" xmlns:p="http://schemas.openxmlformats.org/presentationml/2006/main" xmlns:r="http://schemas.openxmlformats.org/officeDocument/2006/relationships">
+  <p:cSld>
+    <p:spTree>
+      <p:nvGrpSpPr>
+        <p:cNvPr id="1" name=""/>
+        <p:cNvGrpSpPr/>
+        <p:nvPr/>
+      </p:nvGrpSpPr>
+      <p:grpSpPr/>
+      <p:pic>
+        <p:nvPicPr>
+          <p:cNvPr id="2" name="Picture 1" descr="redhat_logo.jpg"/>
+          <p:cNvPicPr>
+            <a:picLocks noChangeAspect="1"/>
+          </p:cNvPicPr>
+          <p:nvPr/>
+        </p:nvPicPr>
+        <p:blipFill>
+          <a:blip r:embed="rId2"/>
+          <a:stretch>
+            <a:fillRect/>
+          </a:stretch>
+        </p:blipFill>
+        <p:spPr>
+          <a:xfrm>
+            <a:off x="10326319" y="475488"/>
+            <a:ext cx="1024128" cy="242248"/>
+          </a:xfrm>
+          <a:prstGeom prst="rect">
+            <a:avLst/>
+          </a:prstGeom>
+        </p:spPr>
+      </p:pic>
+      <p:sp>
+        <p:nvSpPr>
+          <p:cNvPr id="3" name="TextBox 2"/>
+          <p:cNvSpPr txBox="1"/>
+          <p:nvPr/>
+        </p:nvSpPr>
+        <p:spPr>
+          <a:xfrm>
+            <a:off x="841248" y="548640"/>
+            <a:ext cx="8595360" cy="274320"/>
+          </a:xfrm>
+          <a:prstGeom prst="rect">
+            <a:avLst/>
+          </a:prstGeom>
+          <a:noFill/>
+        </p:spPr>
+        <p:txBody>
+          <a:bodyPr wrap="square" anchor="t" lIns="0" rIns="0" tIns="0" bIns="0">
+            <a:spAutoFit/>
+          </a:bodyPr>
+          <a:lstStyle/>
+          <a:p>
+            <a:pPr algn="l">
+              <a:lnSpc>
+                <a:spcPct val="106000"/>
+              </a:lnSpc>
+              <a:spcBef>
+                <a:spcPts val="0"/>
+              </a:spcBef>
+              <a:spcAft>
+                <a:spcPts val="0"/>
+              </a:spcAft>
+            </a:pPr>
+            <a:r>
+              <a:rPr sz="1250" b="1" spc="220">
+                <a:solidFill>
+                  <a:srgbClr val="EE0000"/>
+                </a:solidFill>
+                <a:latin typeface="Red Hat Display"/>
+              </a:rPr>
+              <a:t>M11 · GITOPS AT SCALE &amp; PROGRESSIVE DELIVERY</a:t>
+            </a:r>
+          </a:p>
+        </p:txBody>
+      </p:sp>
+      <p:sp>
+        <p:nvSpPr>
+          <p:cNvPr id="4" name="TextBox 3"/>
+          <p:cNvSpPr txBox="1"/>
+          <p:nvPr/>
+        </p:nvSpPr>
+        <p:spPr>
+          <a:xfrm>
+            <a:off x="841248" y="877824"/>
+            <a:ext cx="10515600" cy="548640"/>
+          </a:xfrm>
+          <a:prstGeom prst="rect">
+            <a:avLst/>
+          </a:prstGeom>
+          <a:noFill/>
+        </p:spPr>
+        <p:txBody>
+          <a:bodyPr wrap="none" anchor="t" lIns="0" rIns="0" tIns="0" bIns="0">
+            <a:spAutoFit/>
+          </a:bodyPr>
+          <a:lstStyle/>
+          <a:p>
+            <a:pPr algn="l">
+              <a:lnSpc>
+                <a:spcPct val="100000"/>
+              </a:lnSpc>
+              <a:spcBef>
+                <a:spcPts val="0"/>
+              </a:spcBef>
+              <a:spcAft>
+                <a:spcPts val="0"/>
+              </a:spcAft>
+            </a:pPr>
+            <a:r>
+              <a:rPr sz="2500" b="1">
+                <a:solidFill>
+                  <a:srgbClr val="1A1A1A"/>
+                </a:solidFill>
+                <a:latin typeface="Red Hat Display"/>
+              </a:rPr>
+              <a:t>Canary analysis</a:t>
+            </a:r>
+          </a:p>
+        </p:txBody>
+      </p:sp>
+      <p:cxnSp>
+        <p:nvCxnSpPr>
+          <p:cNvPr id="5" name="Connector 4"/>
+          <p:cNvCxnSpPr/>
+          <p:nvPr/>
+        </p:nvCxnSpPr>
+        <p:spPr>
+          <a:xfrm>
+            <a:off x="841248" y="1554480"/>
+            <a:ext cx="1371600" cy="0"/>
+          </a:xfrm>
+          <a:prstGeom prst="bentConnector3">
+            <a:avLst/>
+          </a:prstGeom>
+          <a:ln w="31750">
+            <a:solidFill>
+              <a:srgbClr val="EE0000"/>
+            </a:solidFill>
+          </a:ln>
+          <a:effectLst/>
+        </p:spPr>
+        <p:style>
+          <a:lnRef idx="2">
+            <a:schemeClr val="accent1"/>
+          </a:lnRef>
+          <a:fillRef idx="0">
+            <a:schemeClr val="accent1"/>
+          </a:fillRef>
+          <a:effectRef idx="1">
+            <a:schemeClr val="accent1"/>
+          </a:effectRef>
+          <a:fontRef idx="minor">
+            <a:schemeClr val="tx1"/>
+          </a:fontRef>
+        </p:style>
+      </p:cxnSp>
+      <p:sp>
+        <p:nvSpPr>
+          <p:cNvPr id="6" name="Rounded Rectangle 5"/>
+          <p:cNvSpPr/>
+          <p:nvPr/>
+        </p:nvSpPr>
+        <p:spPr>
+          <a:xfrm>
+            <a:off x="841248" y="2331720"/>
+            <a:ext cx="10509199" cy="3794760"/>
+          </a:xfrm>
+          <a:prstGeom prst="roundRect">
+            <a:avLst>
+              <a:gd name="adj" fmla="val 4000"/>
+            </a:avLst>
+          </a:prstGeom>
+          <a:solidFill>
+            <a:srgbClr val="FFFFFF"/>
+          </a:solidFill>
+          <a:ln w="15240">
+            <a:solidFill>
+              <a:srgbClr val="DDE1E6"/>
+            </a:solidFill>
+          </a:ln>
+          <a:effectLst/>
+        </p:spPr>
+        <p:style>
+          <a:lnRef idx="1">
+            <a:schemeClr val="accent1"/>
+          </a:lnRef>
+          <a:fillRef idx="3">
+            <a:schemeClr val="accent1"/>
+          </a:fillRef>
+          <a:effectRef idx="2">
+            <a:schemeClr val="accent1"/>
+          </a:effectRef>
+          <a:fontRef idx="minor">
+            <a:schemeClr val="lt1"/>
+          </a:fontRef>
+        </p:style>
+        <p:txBody>
+          <a:bodyPr rtlCol="0" anchor="ctr"/>
+          <a:lstStyle/>
+          <a:p>
+            <a:pPr algn="ctr"/>
+          </a:p>
+        </p:txBody>
+      </p:sp>
+      <p:pic>
+        <p:nvPicPr>
+          <p:cNvPr id="7" name="Picture 6" descr="03-canary-analysis.png"/>
+          <p:cNvPicPr>
+            <a:picLocks noChangeAspect="1"/>
+          </p:cNvPicPr>
+          <p:nvPr/>
+        </p:nvPicPr>
+        <p:blipFill>
+          <a:blip r:embed="rId3"/>
+          <a:stretch>
+            <a:fillRect/>
+          </a:stretch>
+        </p:blipFill>
+        <p:spPr>
+          <a:xfrm>
+            <a:off x="1042416" y="3404758"/>
+            <a:ext cx="10106863" cy="1648682"/>
+          </a:xfrm>
+          <a:prstGeom prst="rect">
+            <a:avLst/>
+          </a:prstGeom>
+        </p:spPr>
+      </p:pic>
+      <p:cxnSp>
+        <p:nvCxnSpPr>
+          <p:cNvPr id="8" name="Connector 7"/>
+          <p:cNvCxnSpPr/>
+          <p:nvPr/>
+        </p:nvCxnSpPr>
+        <p:spPr>
+          <a:xfrm>
+            <a:off x="841248" y="6437376"/>
+            <a:ext cx="10509199" cy="0"/>
+          </a:xfrm>
+          <a:prstGeom prst="bentConnector3">
+            <a:avLst/>
+          </a:prstGeom>
+          <a:ln w="12700">
+            <a:solidFill>
+              <a:srgbClr val="DDE1E6"/>
+            </a:solidFill>
+          </a:ln>
+          <a:effectLst/>
+        </p:spPr>
+        <p:style>
+          <a:lnRef idx="2">
+            <a:schemeClr val="accent1"/>
+          </a:lnRef>
+          <a:fillRef idx="0">
+            <a:schemeClr val="accent1"/>
+          </a:fillRef>
+          <a:effectRef idx="1">
+            <a:schemeClr val="accent1"/>
+          </a:effectRef>
+          <a:fontRef idx="minor">
+            <a:schemeClr val="tx1"/>
+          </a:fontRef>
+        </p:style>
+      </p:cxnSp>
+      <p:sp>
+        <p:nvSpPr>
+          <p:cNvPr id="9" name="TextBox 8"/>
+          <p:cNvSpPr txBox="1"/>
+          <p:nvPr/>
+        </p:nvSpPr>
+        <p:spPr>
+          <a:xfrm>
+            <a:off x="841248" y="6473952"/>
+            <a:ext cx="7315200" cy="274320"/>
+          </a:xfrm>
+          <a:prstGeom prst="rect">
+            <a:avLst/>
+          </a:prstGeom>
+          <a:noFill/>
+        </p:spPr>
+        <p:txBody>
+          <a:bodyPr wrap="square" anchor="t" lIns="0" rIns="0" tIns="0" bIns="0">
+            <a:spAutoFit/>
+          </a:bodyPr>
+          <a:lstStyle/>
+          <a:p>
+            <a:pPr algn="l">
+              <a:lnSpc>
+                <a:spcPct val="106000"/>
+              </a:lnSpc>
+              <a:spcBef>
+                <a:spcPts val="0"/>
+              </a:spcBef>
+              <a:spcAft>
+                <a:spcPts val="0"/>
+              </a:spcAft>
+            </a:pPr>
+            <a:r>
+              <a:rPr sz="950" b="0">
+                <a:solidFill>
+                  <a:srgbClr val="8A9099"/>
+                </a:solidFill>
+                <a:latin typeface="Red Hat Text"/>
+              </a:rPr>
+              <a:t>CONFIDENTIAL</a:t>
+            </a:r>
+          </a:p>
+        </p:txBody>
+      </p:sp>
+      <p:sp>
+        <p:nvSpPr>
+          <p:cNvPr id="10" name="TextBox 9"/>
+          <p:cNvSpPr txBox="1"/>
+          <p:nvPr/>
+        </p:nvSpPr>
+        <p:spPr>
+          <a:xfrm>
+            <a:off x="10801807" y="6473952"/>
+            <a:ext cx="548640" cy="274320"/>
+          </a:xfrm>
+          <a:prstGeom prst="rect">
+            <a:avLst/>
+          </a:prstGeom>
+          <a:noFill/>
+        </p:spPr>
+        <p:txBody>
+          <a:bodyPr wrap="square" anchor="t" lIns="0" rIns="0" tIns="0" bIns="0">
+            <a:spAutoFit/>
+          </a:bodyPr>
+          <a:lstStyle/>
+          <a:p>
+            <a:pPr algn="r">
+              <a:lnSpc>
+                <a:spcPct val="106000"/>
+              </a:lnSpc>
+              <a:spcBef>
+                <a:spcPts val="0"/>
+              </a:spcBef>
+              <a:spcAft>
+                <a:spcPts val="0"/>
+              </a:spcAft>
+            </a:pPr>
+            <a:r>
+              <a:rPr sz="950" b="0">
+                <a:solidFill>
+                  <a:srgbClr val="8A9099"/>
+                </a:solidFill>
+                <a:latin typeface="Red Hat Text"/>
+              </a:rPr>
+              <a:t>10</a:t>
+            </a:r>
+          </a:p>
+        </p:txBody>
+      </p:sp>
+    </p:spTree>
+  </p:cSld>
+  <p:clrMapOvr>
+    <a:masterClrMapping/>
+  </p:clrMapOvr>
+</p:sld>
+</file>
+
+<file path=ppt/slides/slide12.xml><?xml version="1.0" encoding="utf-8"?>
+<p:sld xmlns:a="http://schemas.openxmlformats.org/drawingml/2006/main" xmlns:p="http://schemas.openxmlformats.org/presentationml/2006/main" xmlns:r="http://schemas.openxmlformats.org/officeDocument/2006/relationships">
+  <p:cSld>
+    <p:spTree>
+      <p:nvGrpSpPr>
+        <p:cNvPr id="1" name=""/>
+        <p:cNvGrpSpPr/>
+        <p:nvPr/>
+      </p:nvGrpSpPr>
+      <p:grpSpPr/>
+      <p:pic>
+        <p:nvPicPr>
+          <p:cNvPr id="2" name="Picture 1" descr="redhat_logo.jpg"/>
+          <p:cNvPicPr>
+            <a:picLocks noChangeAspect="1"/>
+          </p:cNvPicPr>
+          <p:nvPr/>
+        </p:nvPicPr>
+        <p:blipFill>
+          <a:blip r:embed="rId2"/>
+          <a:stretch>
+            <a:fillRect/>
+          </a:stretch>
+        </p:blipFill>
+        <p:spPr>
+          <a:xfrm>
+            <a:off x="10326319" y="475488"/>
+            <a:ext cx="1024128" cy="242248"/>
+          </a:xfrm>
+          <a:prstGeom prst="rect">
+            <a:avLst/>
+          </a:prstGeom>
+        </p:spPr>
+      </p:pic>
+      <p:sp>
+        <p:nvSpPr>
+          <p:cNvPr id="3" name="TextBox 2"/>
+          <p:cNvSpPr txBox="1"/>
+          <p:nvPr/>
+        </p:nvSpPr>
+        <p:spPr>
+          <a:xfrm>
+            <a:off x="841248" y="548640"/>
+            <a:ext cx="8595360" cy="274320"/>
+          </a:xfrm>
+          <a:prstGeom prst="rect">
+            <a:avLst/>
+          </a:prstGeom>
+          <a:noFill/>
+        </p:spPr>
+        <p:txBody>
+          <a:bodyPr wrap="square" anchor="t" lIns="0" rIns="0" tIns="0" bIns="0">
+            <a:spAutoFit/>
+          </a:bodyPr>
+          <a:lstStyle/>
+          <a:p>
+            <a:pPr algn="l">
+              <a:lnSpc>
+                <a:spcPct val="106000"/>
+              </a:lnSpc>
+              <a:spcBef>
+                <a:spcPts val="0"/>
+              </a:spcBef>
+              <a:spcAft>
+                <a:spcPts val="0"/>
+              </a:spcAft>
+            </a:pPr>
+            <a:r>
+              <a:rPr sz="1250" b="1" spc="220">
+                <a:solidFill>
+                  <a:srgbClr val="EE0000"/>
+                </a:solidFill>
+                <a:latin typeface="Red Hat Display"/>
+              </a:rPr>
+              <a:t>M11 · GITOPS AT SCALE &amp; PROGRESSIVE DELIVERY</a:t>
+            </a:r>
+          </a:p>
+        </p:txBody>
+      </p:sp>
+      <p:sp>
+        <p:nvSpPr>
+          <p:cNvPr id="4" name="TextBox 3"/>
+          <p:cNvSpPr txBox="1"/>
+          <p:nvPr/>
+        </p:nvSpPr>
+        <p:spPr>
+          <a:xfrm>
+            <a:off x="841248" y="877824"/>
+            <a:ext cx="10515600" cy="548640"/>
+          </a:xfrm>
+          <a:prstGeom prst="rect">
+            <a:avLst/>
+          </a:prstGeom>
+          <a:noFill/>
+        </p:spPr>
+        <p:txBody>
+          <a:bodyPr wrap="none" anchor="t" lIns="0" rIns="0" tIns="0" bIns="0">
+            <a:spAutoFit/>
+          </a:bodyPr>
+          <a:lstStyle/>
+          <a:p>
+            <a:pPr algn="l">
+              <a:lnSpc>
+                <a:spcPct val="100000"/>
+              </a:lnSpc>
+              <a:spcBef>
+                <a:spcPts val="0"/>
+              </a:spcBef>
+              <a:spcAft>
+                <a:spcPts val="0"/>
+              </a:spcAft>
+            </a:pPr>
+            <a:r>
+              <a:rPr sz="2500" b="1">
+                <a:solidFill>
+                  <a:srgbClr val="1A1A1A"/>
+                </a:solidFill>
+                <a:latin typeface="Red Hat Display"/>
+              </a:rPr>
+              <a:t>What you built</a:t>
+            </a:r>
+          </a:p>
+        </p:txBody>
+      </p:sp>
+      <p:cxnSp>
+        <p:nvCxnSpPr>
+          <p:cNvPr id="5" name="Connector 4"/>
+          <p:cNvCxnSpPr/>
+          <p:nvPr/>
+        </p:nvCxnSpPr>
+        <p:spPr>
+          <a:xfrm>
+            <a:off x="841248" y="1554480"/>
+            <a:ext cx="1371600" cy="0"/>
+          </a:xfrm>
+          <a:prstGeom prst="bentConnector3">
+            <a:avLst/>
+          </a:prstGeom>
+          <a:ln w="31750">
+            <a:solidFill>
+              <a:srgbClr val="EE0000"/>
+            </a:solidFill>
+          </a:ln>
+          <a:effectLst/>
+        </p:spPr>
+        <p:style>
+          <a:lnRef idx="2">
+            <a:schemeClr val="accent1"/>
+          </a:lnRef>
+          <a:fillRef idx="0">
+            <a:schemeClr val="accent1"/>
+          </a:fillRef>
+          <a:effectRef idx="1">
+            <a:schemeClr val="accent1"/>
+          </a:effectRef>
+          <a:fontRef idx="minor">
+            <a:schemeClr val="tx1"/>
+          </a:fontRef>
+        </p:style>
+      </p:cxnSp>
+      <p:sp>
+        <p:nvSpPr>
+          <p:cNvPr id="6" name="Rounded Rectangle 5"/>
+          <p:cNvSpPr/>
+          <p:nvPr/>
+        </p:nvSpPr>
+        <p:spPr>
+          <a:xfrm>
+            <a:off x="841248" y="2331720"/>
+            <a:ext cx="10509199" cy="3794760"/>
+          </a:xfrm>
+          <a:prstGeom prst="roundRect">
+            <a:avLst>
+              <a:gd name="adj" fmla="val 4000"/>
+            </a:avLst>
+          </a:prstGeom>
+          <a:solidFill>
+            <a:srgbClr val="FFFFFF"/>
+          </a:solidFill>
+          <a:ln w="15240">
+            <a:solidFill>
+              <a:srgbClr val="DDE1E6"/>
+            </a:solidFill>
+          </a:ln>
+          <a:effectLst/>
+        </p:spPr>
+        <p:style>
+          <a:lnRef idx="1">
+            <a:schemeClr val="accent1"/>
+          </a:lnRef>
+          <a:fillRef idx="3">
+            <a:schemeClr val="accent1"/>
+          </a:fillRef>
+          <a:effectRef idx="2">
+            <a:schemeClr val="accent1"/>
+          </a:effectRef>
+          <a:fontRef idx="minor">
+            <a:schemeClr val="lt1"/>
+          </a:fontRef>
+        </p:style>
+        <p:txBody>
+          <a:bodyPr rtlCol="0" anchor="ctr"/>
+          <a:lstStyle/>
+          <a:p>
+            <a:pPr algn="ctr"/>
+          </a:p>
+        </p:txBody>
+      </p:sp>
+      <p:pic>
+        <p:nvPicPr>
+          <p:cNvPr id="7" name="Picture 6" descr="05-what-you-built.png"/>
+          <p:cNvPicPr>
+            <a:picLocks noChangeAspect="1"/>
+          </p:cNvPicPr>
+          <p:nvPr/>
+        </p:nvPicPr>
+        <p:blipFill>
+          <a:blip r:embed="rId3"/>
+          <a:stretch>
+            <a:fillRect/>
+          </a:stretch>
+        </p:blipFill>
+        <p:spPr>
+          <a:xfrm>
+            <a:off x="1079324" y="2532888"/>
+            <a:ext cx="10033046" cy="3392424"/>
+          </a:xfrm>
+          <a:prstGeom prst="rect">
+            <a:avLst/>
+          </a:prstGeom>
+        </p:spPr>
+      </p:pic>
+      <p:cxnSp>
+        <p:nvCxnSpPr>
+          <p:cNvPr id="8" name="Connector 7"/>
+          <p:cNvCxnSpPr/>
+          <p:nvPr/>
+        </p:nvCxnSpPr>
+        <p:spPr>
+          <a:xfrm>
+            <a:off x="841248" y="6437376"/>
+            <a:ext cx="10509199" cy="0"/>
+          </a:xfrm>
+          <a:prstGeom prst="bentConnector3">
+            <a:avLst/>
+          </a:prstGeom>
+          <a:ln w="12700">
+            <a:solidFill>
+              <a:srgbClr val="DDE1E6"/>
+            </a:solidFill>
+          </a:ln>
+          <a:effectLst/>
+        </p:spPr>
+        <p:style>
+          <a:lnRef idx="2">
+            <a:schemeClr val="accent1"/>
+          </a:lnRef>
+          <a:fillRef idx="0">
+            <a:schemeClr val="accent1"/>
+          </a:fillRef>
+          <a:effectRef idx="1">
+            <a:schemeClr val="accent1"/>
+          </a:effectRef>
+          <a:fontRef idx="minor">
+            <a:schemeClr val="tx1"/>
+          </a:fontRef>
+        </p:style>
+      </p:cxnSp>
+      <p:sp>
+        <p:nvSpPr>
+          <p:cNvPr id="9" name="TextBox 8"/>
+          <p:cNvSpPr txBox="1"/>
+          <p:nvPr/>
+        </p:nvSpPr>
+        <p:spPr>
+          <a:xfrm>
+            <a:off x="841248" y="6473952"/>
+            <a:ext cx="7315200" cy="274320"/>
+          </a:xfrm>
+          <a:prstGeom prst="rect">
+            <a:avLst/>
+          </a:prstGeom>
+          <a:noFill/>
+        </p:spPr>
+        <p:txBody>
+          <a:bodyPr wrap="square" anchor="t" lIns="0" rIns="0" tIns="0" bIns="0">
+            <a:spAutoFit/>
+          </a:bodyPr>
+          <a:lstStyle/>
+          <a:p>
+            <a:pPr algn="l">
+              <a:lnSpc>
+                <a:spcPct val="106000"/>
+              </a:lnSpc>
+              <a:spcBef>
+                <a:spcPts val="0"/>
+              </a:spcBef>
+              <a:spcAft>
+                <a:spcPts val="0"/>
+              </a:spcAft>
+            </a:pPr>
+            <a:r>
+              <a:rPr sz="950" b="0">
+                <a:solidFill>
+                  <a:srgbClr val="8A9099"/>
+                </a:solidFill>
+                <a:latin typeface="Red Hat Text"/>
+              </a:rPr>
+              <a:t>CONFIDENTIAL</a:t>
+            </a:r>
+          </a:p>
+        </p:txBody>
+      </p:sp>
+      <p:sp>
+        <p:nvSpPr>
+          <p:cNvPr id="10" name="TextBox 9"/>
+          <p:cNvSpPr txBox="1"/>
+          <p:nvPr/>
+        </p:nvSpPr>
+        <p:spPr>
+          <a:xfrm>
+            <a:off x="10801807" y="6473952"/>
+            <a:ext cx="548640" cy="274320"/>
+          </a:xfrm>
+          <a:prstGeom prst="rect">
+            <a:avLst/>
+          </a:prstGeom>
+          <a:noFill/>
+        </p:spPr>
+        <p:txBody>
+          <a:bodyPr wrap="square" anchor="t" lIns="0" rIns="0" tIns="0" bIns="0">
+            <a:spAutoFit/>
+          </a:bodyPr>
+          <a:lstStyle/>
+          <a:p>
+            <a:pPr algn="r">
+              <a:lnSpc>
+                <a:spcPct val="106000"/>
+              </a:lnSpc>
+              <a:spcBef>
+                <a:spcPts val="0"/>
+              </a:spcBef>
+              <a:spcAft>
+                <a:spcPts val="0"/>
+              </a:spcAft>
+            </a:pPr>
+            <a:r>
+              <a:rPr sz="950" b="0">
+                <a:solidFill>
+                  <a:srgbClr val="8A9099"/>
+                </a:solidFill>
+                <a:latin typeface="Red Hat Text"/>
+              </a:rPr>
+              <a:t>11</a:t>
+            </a:r>
+          </a:p>
+        </p:txBody>
+      </p:sp>
+    </p:spTree>
+  </p:cSld>
+  <p:clrMapOvr>
+    <a:masterClrMapping/>
+  </p:clrMapOvr>
+</p:sld>
+</file>
+
 <file path=ppt/slides/slide2.xml><?xml version="1.0" encoding="utf-8"?>
 <p:sld xmlns:a="http://schemas.openxmlformats.org/drawingml/2006/main" xmlns:p="http://schemas.openxmlformats.org/presentationml/2006/main" xmlns:r="http://schemas.openxmlformats.org/officeDocument/2006/relationships">
   <p:cSld>
@@ -4352,11 +5734,11 @@
         <p:spPr>
           <a:xfrm>
             <a:off x="841248" y="2670048"/>
-            <a:ext cx="5715000" cy="530352"/>
+            <a:ext cx="5138928" cy="786384"/>
           </a:xfrm>
           <a:prstGeom prst="roundRect">
             <a:avLst>
-              <a:gd name="adj" fmla="val 6000"/>
+              <a:gd name="adj" fmla="val 7000"/>
             </a:avLst>
           </a:prstGeom>
           <a:solidFill>
@@ -4391,9 +5773,55 @@
           </a:p>
         </p:txBody>
       </p:sp>
+      <p:sp>
+        <p:nvSpPr>
+          <p:cNvPr id="8" name="Rounded Rectangle 7"/>
+          <p:cNvSpPr/>
+          <p:nvPr/>
+        </p:nvSpPr>
+        <p:spPr>
+          <a:xfrm>
+            <a:off x="987552" y="2807208"/>
+            <a:ext cx="512064" cy="512064"/>
+          </a:xfrm>
+          <a:prstGeom prst="roundRect">
+            <a:avLst>
+              <a:gd name="adj" fmla="val 26000"/>
+            </a:avLst>
+          </a:prstGeom>
+          <a:solidFill>
+            <a:srgbClr val="EE0000"/>
+          </a:solidFill>
+          <a:ln>
+            <a:noFill/>
+          </a:ln>
+          <a:effectLst/>
+        </p:spPr>
+        <p:style>
+          <a:lnRef idx="1">
+            <a:schemeClr val="accent1"/>
+          </a:lnRef>
+          <a:fillRef idx="3">
+            <a:schemeClr val="accent1"/>
+          </a:fillRef>
+          <a:effectRef idx="2">
+            <a:schemeClr val="accent1"/>
+          </a:effectRef>
+          <a:fontRef idx="minor">
+            <a:schemeClr val="lt1"/>
+          </a:fontRef>
+        </p:style>
+        <p:txBody>
+          <a:bodyPr rtlCol="0" anchor="ctr"/>
+          <a:lstStyle/>
+          <a:p>
+            <a:pPr algn="ctr"/>
+          </a:p>
+        </p:txBody>
+      </p:sp>
       <p:pic>
         <p:nvPicPr>
-          <p:cNvPr id="8" name="Picture 7" descr="check_steel.png"/>
+          <p:cNvPr id="9" name="Picture 8" descr="check_white.png"/>
           <p:cNvPicPr>
             <a:picLocks noChangeAspect="1"/>
           </p:cNvPicPr>
@@ -4407,8 +5835,8 @@
         </p:blipFill>
         <p:spPr>
           <a:xfrm>
-            <a:off x="987552" y="2816352"/>
-            <a:ext cx="237744" cy="237744"/>
+            <a:off x="1110447" y="2930103"/>
+            <a:ext cx="266273" cy="266273"/>
           </a:xfrm>
           <a:prstGeom prst="rect">
             <a:avLst/>
@@ -4417,14 +5845,14 @@
       </p:pic>
       <p:sp>
         <p:nvSpPr>
-          <p:cNvPr id="9" name="TextBox 8"/>
+          <p:cNvPr id="10" name="TextBox 9"/>
           <p:cNvSpPr txBox="1"/>
           <p:nvPr/>
         </p:nvSpPr>
         <p:spPr>
           <a:xfrm>
-            <a:off x="1353312" y="2670048"/>
-            <a:ext cx="5029200" cy="530352"/>
+            <a:off x="1627632" y="2670048"/>
+            <a:ext cx="4206240" cy="786384"/>
           </a:xfrm>
           <a:prstGeom prst="rect">
             <a:avLst/>
@@ -4449,7 +5877,7 @@
               </a:spcAft>
             </a:pPr>
             <a:r>
-              <a:rPr sz="1200" b="0">
+              <a:rPr sz="1150" b="0">
                 <a:solidFill>
                   <a:srgbClr val="1A1A1A"/>
                 </a:solidFill>
@@ -4462,18 +5890,18 @@
       </p:sp>
       <p:sp>
         <p:nvSpPr>
-          <p:cNvPr id="10" name="Rounded Rectangle 9"/>
+          <p:cNvPr id="11" name="Rounded Rectangle 10"/>
           <p:cNvSpPr/>
           <p:nvPr/>
         </p:nvSpPr>
         <p:spPr>
           <a:xfrm>
-            <a:off x="841248" y="3273552"/>
-            <a:ext cx="5715000" cy="530352"/>
+            <a:off x="6254496" y="2670048"/>
+            <a:ext cx="5138928" cy="786384"/>
           </a:xfrm>
           <a:prstGeom prst="roundRect">
             <a:avLst>
-              <a:gd name="adj" fmla="val 6000"/>
+              <a:gd name="adj" fmla="val 7000"/>
             </a:avLst>
           </a:prstGeom>
           <a:solidFill>
@@ -4508,9 +5936,55 @@
           </a:p>
         </p:txBody>
       </p:sp>
+      <p:sp>
+        <p:nvSpPr>
+          <p:cNvPr id="12" name="Rounded Rectangle 11"/>
+          <p:cNvSpPr/>
+          <p:nvPr/>
+        </p:nvSpPr>
+        <p:spPr>
+          <a:xfrm>
+            <a:off x="6400800" y="2807208"/>
+            <a:ext cx="512064" cy="512064"/>
+          </a:xfrm>
+          <a:prstGeom prst="roundRect">
+            <a:avLst>
+              <a:gd name="adj" fmla="val 26000"/>
+            </a:avLst>
+          </a:prstGeom>
+          <a:solidFill>
+            <a:srgbClr val="EE0000"/>
+          </a:solidFill>
+          <a:ln>
+            <a:noFill/>
+          </a:ln>
+          <a:effectLst/>
+        </p:spPr>
+        <p:style>
+          <a:lnRef idx="1">
+            <a:schemeClr val="accent1"/>
+          </a:lnRef>
+          <a:fillRef idx="3">
+            <a:schemeClr val="accent1"/>
+          </a:fillRef>
+          <a:effectRef idx="2">
+            <a:schemeClr val="accent1"/>
+          </a:effectRef>
+          <a:fontRef idx="minor">
+            <a:schemeClr val="lt1"/>
+          </a:fontRef>
+        </p:style>
+        <p:txBody>
+          <a:bodyPr rtlCol="0" anchor="ctr"/>
+          <a:lstStyle/>
+          <a:p>
+            <a:pPr algn="ctr"/>
+          </a:p>
+        </p:txBody>
+      </p:sp>
       <p:pic>
         <p:nvPicPr>
-          <p:cNvPr id="11" name="Picture 10" descr="check_steel.png"/>
+          <p:cNvPr id="13" name="Picture 12" descr="check_white.png"/>
           <p:cNvPicPr>
             <a:picLocks noChangeAspect="1"/>
           </p:cNvPicPr>
@@ -4524,8 +5998,8 @@
         </p:blipFill>
         <p:spPr>
           <a:xfrm>
-            <a:off x="987552" y="3419856"/>
-            <a:ext cx="237744" cy="237744"/>
+            <a:off x="6523695" y="2930103"/>
+            <a:ext cx="266273" cy="266273"/>
           </a:xfrm>
           <a:prstGeom prst="rect">
             <a:avLst/>
@@ -4534,14 +6008,14 @@
       </p:pic>
       <p:sp>
         <p:nvSpPr>
-          <p:cNvPr id="12" name="TextBox 11"/>
+          <p:cNvPr id="14" name="TextBox 13"/>
           <p:cNvSpPr txBox="1"/>
           <p:nvPr/>
         </p:nvSpPr>
         <p:spPr>
           <a:xfrm>
-            <a:off x="1353312" y="3273552"/>
-            <a:ext cx="5029200" cy="530352"/>
+            <a:off x="7040880" y="2670048"/>
+            <a:ext cx="4206240" cy="786384"/>
           </a:xfrm>
           <a:prstGeom prst="rect">
             <a:avLst/>
@@ -4566,7 +6040,7 @@
               </a:spcAft>
             </a:pPr>
             <a:r>
-              <a:rPr sz="1200" b="0">
+              <a:rPr sz="1150" b="0">
                 <a:solidFill>
                   <a:srgbClr val="1A1A1A"/>
                 </a:solidFill>
@@ -4579,18 +6053,18 @@
       </p:sp>
       <p:sp>
         <p:nvSpPr>
-          <p:cNvPr id="13" name="Rounded Rectangle 12"/>
+          <p:cNvPr id="15" name="Rounded Rectangle 14"/>
           <p:cNvSpPr/>
           <p:nvPr/>
         </p:nvSpPr>
         <p:spPr>
           <a:xfrm>
-            <a:off x="841248" y="3877056"/>
-            <a:ext cx="5715000" cy="530352"/>
+            <a:off x="841248" y="3602736"/>
+            <a:ext cx="5138928" cy="786384"/>
           </a:xfrm>
           <a:prstGeom prst="roundRect">
             <a:avLst>
-              <a:gd name="adj" fmla="val 6000"/>
+              <a:gd name="adj" fmla="val 7000"/>
             </a:avLst>
           </a:prstGeom>
           <a:solidFill>
@@ -4625,9 +6099,55 @@
           </a:p>
         </p:txBody>
       </p:sp>
+      <p:sp>
+        <p:nvSpPr>
+          <p:cNvPr id="16" name="Rounded Rectangle 15"/>
+          <p:cNvSpPr/>
+          <p:nvPr/>
+        </p:nvSpPr>
+        <p:spPr>
+          <a:xfrm>
+            <a:off x="987552" y="3739896"/>
+            <a:ext cx="512064" cy="512064"/>
+          </a:xfrm>
+          <a:prstGeom prst="roundRect">
+            <a:avLst>
+              <a:gd name="adj" fmla="val 26000"/>
+            </a:avLst>
+          </a:prstGeom>
+          <a:solidFill>
+            <a:srgbClr val="EE0000"/>
+          </a:solidFill>
+          <a:ln>
+            <a:noFill/>
+          </a:ln>
+          <a:effectLst/>
+        </p:spPr>
+        <p:style>
+          <a:lnRef idx="1">
+            <a:schemeClr val="accent1"/>
+          </a:lnRef>
+          <a:fillRef idx="3">
+            <a:schemeClr val="accent1"/>
+          </a:fillRef>
+          <a:effectRef idx="2">
+            <a:schemeClr val="accent1"/>
+          </a:effectRef>
+          <a:fontRef idx="minor">
+            <a:schemeClr val="lt1"/>
+          </a:fontRef>
+        </p:style>
+        <p:txBody>
+          <a:bodyPr rtlCol="0" anchor="ctr"/>
+          <a:lstStyle/>
+          <a:p>
+            <a:pPr algn="ctr"/>
+          </a:p>
+        </p:txBody>
+      </p:sp>
       <p:pic>
         <p:nvPicPr>
-          <p:cNvPr id="14" name="Picture 13" descr="check_steel.png"/>
+          <p:cNvPr id="17" name="Picture 16" descr="check_white.png"/>
           <p:cNvPicPr>
             <a:picLocks noChangeAspect="1"/>
           </p:cNvPicPr>
@@ -4641,8 +6161,8 @@
         </p:blipFill>
         <p:spPr>
           <a:xfrm>
-            <a:off x="987552" y="4023360"/>
-            <a:ext cx="237744" cy="237744"/>
+            <a:off x="1110447" y="3862791"/>
+            <a:ext cx="266273" cy="266273"/>
           </a:xfrm>
           <a:prstGeom prst="rect">
             <a:avLst/>
@@ -4651,14 +6171,14 @@
       </p:pic>
       <p:sp>
         <p:nvSpPr>
-          <p:cNvPr id="15" name="TextBox 14"/>
+          <p:cNvPr id="18" name="TextBox 17"/>
           <p:cNvSpPr txBox="1"/>
           <p:nvPr/>
         </p:nvSpPr>
         <p:spPr>
           <a:xfrm>
-            <a:off x="1353312" y="3877056"/>
-            <a:ext cx="5029200" cy="530352"/>
+            <a:off x="1627632" y="3602736"/>
+            <a:ext cx="4206240" cy="786384"/>
           </a:xfrm>
           <a:prstGeom prst="rect">
             <a:avLst/>
@@ -4683,7 +6203,7 @@
               </a:spcAft>
             </a:pPr>
             <a:r>
-              <a:rPr sz="1200" b="0">
+              <a:rPr sz="1150" b="0">
                 <a:solidFill>
                   <a:srgbClr val="1A1A1A"/>
                 </a:solidFill>
@@ -4696,18 +6216,18 @@
       </p:sp>
       <p:sp>
         <p:nvSpPr>
-          <p:cNvPr id="16" name="Rounded Rectangle 15"/>
+          <p:cNvPr id="19" name="Rounded Rectangle 18"/>
           <p:cNvSpPr/>
           <p:nvPr/>
         </p:nvSpPr>
         <p:spPr>
           <a:xfrm>
-            <a:off x="841248" y="4480560"/>
-            <a:ext cx="5715000" cy="530352"/>
+            <a:off x="6254496" y="3602736"/>
+            <a:ext cx="5138928" cy="786384"/>
           </a:xfrm>
           <a:prstGeom prst="roundRect">
             <a:avLst>
-              <a:gd name="adj" fmla="val 6000"/>
+              <a:gd name="adj" fmla="val 7000"/>
             </a:avLst>
           </a:prstGeom>
           <a:solidFill>
@@ -4742,9 +6262,55 @@
           </a:p>
         </p:txBody>
       </p:sp>
+      <p:sp>
+        <p:nvSpPr>
+          <p:cNvPr id="20" name="Rounded Rectangle 19"/>
+          <p:cNvSpPr/>
+          <p:nvPr/>
+        </p:nvSpPr>
+        <p:spPr>
+          <a:xfrm>
+            <a:off x="6400800" y="3739896"/>
+            <a:ext cx="512064" cy="512064"/>
+          </a:xfrm>
+          <a:prstGeom prst="roundRect">
+            <a:avLst>
+              <a:gd name="adj" fmla="val 26000"/>
+            </a:avLst>
+          </a:prstGeom>
+          <a:solidFill>
+            <a:srgbClr val="EE0000"/>
+          </a:solidFill>
+          <a:ln>
+            <a:noFill/>
+          </a:ln>
+          <a:effectLst/>
+        </p:spPr>
+        <p:style>
+          <a:lnRef idx="1">
+            <a:schemeClr val="accent1"/>
+          </a:lnRef>
+          <a:fillRef idx="3">
+            <a:schemeClr val="accent1"/>
+          </a:fillRef>
+          <a:effectRef idx="2">
+            <a:schemeClr val="accent1"/>
+          </a:effectRef>
+          <a:fontRef idx="minor">
+            <a:schemeClr val="lt1"/>
+          </a:fontRef>
+        </p:style>
+        <p:txBody>
+          <a:bodyPr rtlCol="0" anchor="ctr"/>
+          <a:lstStyle/>
+          <a:p>
+            <a:pPr algn="ctr"/>
+          </a:p>
+        </p:txBody>
+      </p:sp>
       <p:pic>
         <p:nvPicPr>
-          <p:cNvPr id="17" name="Picture 16" descr="check_steel.png"/>
+          <p:cNvPr id="21" name="Picture 20" descr="check_white.png"/>
           <p:cNvPicPr>
             <a:picLocks noChangeAspect="1"/>
           </p:cNvPicPr>
@@ -4758,8 +6324,8 @@
         </p:blipFill>
         <p:spPr>
           <a:xfrm>
-            <a:off x="987552" y="4626864"/>
-            <a:ext cx="237744" cy="237744"/>
+            <a:off x="6523695" y="3862791"/>
+            <a:ext cx="266273" cy="266273"/>
           </a:xfrm>
           <a:prstGeom prst="rect">
             <a:avLst/>
@@ -4768,14 +6334,14 @@
       </p:pic>
       <p:sp>
         <p:nvSpPr>
-          <p:cNvPr id="18" name="TextBox 17"/>
+          <p:cNvPr id="22" name="TextBox 21"/>
           <p:cNvSpPr txBox="1"/>
           <p:nvPr/>
         </p:nvSpPr>
         <p:spPr>
           <a:xfrm>
-            <a:off x="1353312" y="4480560"/>
-            <a:ext cx="5029200" cy="530352"/>
+            <a:off x="7040880" y="3602736"/>
+            <a:ext cx="4206240" cy="786384"/>
           </a:xfrm>
           <a:prstGeom prst="rect">
             <a:avLst/>
@@ -4800,7 +6366,7 @@
               </a:spcAft>
             </a:pPr>
             <a:r>
-              <a:rPr sz="1200" b="0">
+              <a:rPr sz="1150" b="0">
                 <a:solidFill>
                   <a:srgbClr val="1A1A1A"/>
                 </a:solidFill>
@@ -4813,18 +6379,18 @@
       </p:sp>
       <p:sp>
         <p:nvSpPr>
-          <p:cNvPr id="19" name="Rounded Rectangle 18"/>
+          <p:cNvPr id="23" name="Rounded Rectangle 22"/>
           <p:cNvSpPr/>
           <p:nvPr/>
         </p:nvSpPr>
         <p:spPr>
           <a:xfrm>
-            <a:off x="841248" y="5084064"/>
-            <a:ext cx="5715000" cy="530352"/>
+            <a:off x="841248" y="4535424"/>
+            <a:ext cx="5138928" cy="786384"/>
           </a:xfrm>
           <a:prstGeom prst="roundRect">
             <a:avLst>
-              <a:gd name="adj" fmla="val 6000"/>
+              <a:gd name="adj" fmla="val 7000"/>
             </a:avLst>
           </a:prstGeom>
           <a:solidFill>
@@ -4859,9 +6425,55 @@
           </a:p>
         </p:txBody>
       </p:sp>
+      <p:sp>
+        <p:nvSpPr>
+          <p:cNvPr id="24" name="Rounded Rectangle 23"/>
+          <p:cNvSpPr/>
+          <p:nvPr/>
+        </p:nvSpPr>
+        <p:spPr>
+          <a:xfrm>
+            <a:off x="987552" y="4672584"/>
+            <a:ext cx="512064" cy="512064"/>
+          </a:xfrm>
+          <a:prstGeom prst="roundRect">
+            <a:avLst>
+              <a:gd name="adj" fmla="val 26000"/>
+            </a:avLst>
+          </a:prstGeom>
+          <a:solidFill>
+            <a:srgbClr val="EE0000"/>
+          </a:solidFill>
+          <a:ln>
+            <a:noFill/>
+          </a:ln>
+          <a:effectLst/>
+        </p:spPr>
+        <p:style>
+          <a:lnRef idx="1">
+            <a:schemeClr val="accent1"/>
+          </a:lnRef>
+          <a:fillRef idx="3">
+            <a:schemeClr val="accent1"/>
+          </a:fillRef>
+          <a:effectRef idx="2">
+            <a:schemeClr val="accent1"/>
+          </a:effectRef>
+          <a:fontRef idx="minor">
+            <a:schemeClr val="lt1"/>
+          </a:fontRef>
+        </p:style>
+        <p:txBody>
+          <a:bodyPr rtlCol="0" anchor="ctr"/>
+          <a:lstStyle/>
+          <a:p>
+            <a:pPr algn="ctr"/>
+          </a:p>
+        </p:txBody>
+      </p:sp>
       <p:pic>
         <p:nvPicPr>
-          <p:cNvPr id="20" name="Picture 19" descr="check_steel.png"/>
+          <p:cNvPr id="25" name="Picture 24" descr="check_white.png"/>
           <p:cNvPicPr>
             <a:picLocks noChangeAspect="1"/>
           </p:cNvPicPr>
@@ -4875,8 +6487,8 @@
         </p:blipFill>
         <p:spPr>
           <a:xfrm>
-            <a:off x="987552" y="5230368"/>
-            <a:ext cx="237744" cy="237744"/>
+            <a:off x="1110447" y="4795479"/>
+            <a:ext cx="266273" cy="266273"/>
           </a:xfrm>
           <a:prstGeom prst="rect">
             <a:avLst/>
@@ -4885,14 +6497,14 @@
       </p:pic>
       <p:sp>
         <p:nvSpPr>
-          <p:cNvPr id="21" name="TextBox 20"/>
+          <p:cNvPr id="26" name="TextBox 25"/>
           <p:cNvSpPr txBox="1"/>
           <p:nvPr/>
         </p:nvSpPr>
         <p:spPr>
           <a:xfrm>
-            <a:off x="1353312" y="5084064"/>
-            <a:ext cx="5029200" cy="530352"/>
+            <a:off x="1627632" y="4535424"/>
+            <a:ext cx="4206240" cy="786384"/>
           </a:xfrm>
           <a:prstGeom prst="rect">
             <a:avLst/>
@@ -4917,221 +6529,13 @@
               </a:spcAft>
             </a:pPr>
             <a:r>
-              <a:rPr sz="1200" b="0">
+              <a:rPr sz="1150" b="0">
                 <a:solidFill>
                   <a:srgbClr val="1A1A1A"/>
                 </a:solidFill>
                 <a:latin typeface="Red Hat Text"/>
               </a:rPr>
               <a:t>Scale and safety both break here</a:t>
-            </a:r>
-          </a:p>
-        </p:txBody>
-      </p:sp>
-      <p:sp>
-        <p:nvSpPr>
-          <p:cNvPr id="22" name="Rounded Rectangle 21"/>
-          <p:cNvSpPr/>
-          <p:nvPr/>
-        </p:nvSpPr>
-        <p:spPr>
-          <a:xfrm>
-            <a:off x="6812280" y="2670048"/>
-            <a:ext cx="4538167" cy="2944368"/>
-          </a:xfrm>
-          <a:prstGeom prst="roundRect">
-            <a:avLst>
-              <a:gd name="adj" fmla="val 4000"/>
-            </a:avLst>
-          </a:prstGeom>
-          <a:solidFill>
-            <a:srgbClr val="FFFFFF"/>
-          </a:solidFill>
-          <a:ln w="15240">
-            <a:solidFill>
-              <a:srgbClr val="DDE1E6"/>
-            </a:solidFill>
-          </a:ln>
-          <a:effectLst/>
-        </p:spPr>
-        <p:style>
-          <a:lnRef idx="1">
-            <a:schemeClr val="accent1"/>
-          </a:lnRef>
-          <a:fillRef idx="3">
-            <a:schemeClr val="accent1"/>
-          </a:fillRef>
-          <a:effectRef idx="2">
-            <a:schemeClr val="accent1"/>
-          </a:effectRef>
-          <a:fontRef idx="minor">
-            <a:schemeClr val="lt1"/>
-          </a:fontRef>
-        </p:style>
-        <p:txBody>
-          <a:bodyPr rtlCol="0" anchor="ctr"/>
-          <a:lstStyle/>
-          <a:p>
-            <a:pPr algn="ctr"/>
-          </a:p>
-        </p:txBody>
-      </p:sp>
-      <p:sp>
-        <p:nvSpPr>
-          <p:cNvPr id="23" name="Rounded Rectangle 22"/>
-          <p:cNvSpPr/>
-          <p:nvPr/>
-        </p:nvSpPr>
-        <p:spPr>
-          <a:xfrm>
-            <a:off x="7013448" y="2871216"/>
-            <a:ext cx="1298448" cy="310896"/>
-          </a:xfrm>
-          <a:prstGeom prst="roundRect">
-            <a:avLst>
-              <a:gd name="adj" fmla="val 50000"/>
-            </a:avLst>
-          </a:prstGeom>
-          <a:solidFill>
-            <a:srgbClr val="FCECEC"/>
-          </a:solidFill>
-          <a:ln>
-            <a:noFill/>
-          </a:ln>
-          <a:effectLst/>
-        </p:spPr>
-        <p:style>
-          <a:lnRef idx="1">
-            <a:schemeClr val="accent1"/>
-          </a:lnRef>
-          <a:fillRef idx="3">
-            <a:schemeClr val="accent1"/>
-          </a:fillRef>
-          <a:effectRef idx="2">
-            <a:schemeClr val="accent1"/>
-          </a:effectRef>
-          <a:fontRef idx="minor">
-            <a:schemeClr val="lt1"/>
-          </a:fontRef>
-        </p:style>
-        <p:txBody>
-          <a:bodyPr rtlCol="0" anchor="ctr"/>
-          <a:lstStyle/>
-          <a:p>
-            <a:pPr algn="ctr"/>
-          </a:p>
-        </p:txBody>
-      </p:sp>
-      <p:sp>
-        <p:nvSpPr>
-          <p:cNvPr id="24" name="TextBox 23"/>
-          <p:cNvSpPr txBox="1"/>
-          <p:nvPr/>
-        </p:nvSpPr>
-        <p:spPr>
-          <a:xfrm>
-            <a:off x="7013448" y="2871216"/>
-            <a:ext cx="1298448" cy="310896"/>
-          </a:xfrm>
-          <a:prstGeom prst="rect">
-            <a:avLst/>
-          </a:prstGeom>
-          <a:noFill/>
-        </p:spPr>
-        <p:txBody>
-          <a:bodyPr wrap="none" anchor="ctr" lIns="0" rIns="0" tIns="0" bIns="0">
-            <a:spAutoFit/>
-          </a:bodyPr>
-          <a:lstStyle/>
-          <a:p>
-            <a:pPr algn="ctr">
-              <a:lnSpc>
-                <a:spcPct val="106000"/>
-              </a:lnSpc>
-              <a:spcBef>
-                <a:spcPts val="0"/>
-              </a:spcBef>
-              <a:spcAft>
-                <a:spcPts val="0"/>
-              </a:spcAft>
-            </a:pPr>
-            <a:r>
-              <a:rPr sz="850" b="1">
-                <a:solidFill>
-                  <a:srgbClr val="B80000"/>
-                </a:solidFill>
-                <a:latin typeface="Red Hat Display"/>
-              </a:rPr>
-              <a:t>MEDIA PASS</a:t>
-            </a:r>
-          </a:p>
-        </p:txBody>
-      </p:sp>
-      <p:pic>
-        <p:nvPicPr>
-          <p:cNvPr id="25" name="Picture 24" descr="eye_slate.png"/>
-          <p:cNvPicPr>
-            <a:picLocks noChangeAspect="1"/>
-          </p:cNvPicPr>
-          <p:nvPr/>
-        </p:nvPicPr>
-        <p:blipFill>
-          <a:blip r:embed="rId4"/>
-          <a:stretch>
-            <a:fillRect/>
-          </a:stretch>
-        </p:blipFill>
-        <p:spPr>
-          <a:xfrm>
-            <a:off x="8843619" y="3383280"/>
-            <a:ext cx="475488" cy="475488"/>
-          </a:xfrm>
-          <a:prstGeom prst="rect">
-            <a:avLst/>
-          </a:prstGeom>
-        </p:spPr>
-      </p:pic>
-      <p:sp>
-        <p:nvSpPr>
-          <p:cNvPr id="26" name="TextBox 25"/>
-          <p:cNvSpPr txBox="1"/>
-          <p:nvPr/>
-        </p:nvSpPr>
-        <p:spPr>
-          <a:xfrm>
-            <a:off x="7050024" y="3995928"/>
-            <a:ext cx="4062679" cy="1481328"/>
-          </a:xfrm>
-          <a:prstGeom prst="rect">
-            <a:avLst/>
-          </a:prstGeom>
-          <a:noFill/>
-        </p:spPr>
-        <p:txBody>
-          <a:bodyPr wrap="square" anchor="t" lIns="0" rIns="0" tIns="0" bIns="0">
-            <a:spAutoFit/>
-          </a:bodyPr>
-          <a:lstStyle/>
-          <a:p>
-            <a:pPr algn="l">
-              <a:lnSpc>
-                <a:spcPct val="120000"/>
-              </a:lnSpc>
-              <a:spcBef>
-                <a:spcPts val="0"/>
-              </a:spcBef>
-              <a:spcAft>
-                <a:spcPts val="0"/>
-              </a:spcAft>
-            </a:pPr>
-            <a:r>
-              <a:rPr sz="950" b="0">
-                <a:solidFill>
-                  <a:srgbClr val="8A9099"/>
-                </a:solidFill>
-                <a:latin typeface="Red Hat Text"/>
-              </a:rPr>
-              <a:t>Left: a wall of near-identical "Application" cards (36) tinted red/drift. Right: one "ApplicationSet" object. A "ship 100% at once?" grenade over a prod box.</a:t>
             </a:r>
           </a:p>
         </p:txBody>
@@ -5439,11 +6843,11 @@
         <p:spPr>
           <a:xfrm>
             <a:off x="841248" y="2395728"/>
-            <a:ext cx="5715000" cy="530352"/>
+            <a:ext cx="5138928" cy="786384"/>
           </a:xfrm>
           <a:prstGeom prst="roundRect">
             <a:avLst>
-              <a:gd name="adj" fmla="val 6000"/>
+              <a:gd name="adj" fmla="val 7000"/>
             </a:avLst>
           </a:prstGeom>
           <a:solidFill>
@@ -5478,9 +6882,55 @@
           </a:p>
         </p:txBody>
       </p:sp>
+      <p:sp>
+        <p:nvSpPr>
+          <p:cNvPr id="7" name="Rounded Rectangle 6"/>
+          <p:cNvSpPr/>
+          <p:nvPr/>
+        </p:nvSpPr>
+        <p:spPr>
+          <a:xfrm>
+            <a:off x="987552" y="2532888"/>
+            <a:ext cx="512064" cy="512064"/>
+          </a:xfrm>
+          <a:prstGeom prst="roundRect">
+            <a:avLst>
+              <a:gd name="adj" fmla="val 26000"/>
+            </a:avLst>
+          </a:prstGeom>
+          <a:solidFill>
+            <a:srgbClr val="EE0000"/>
+          </a:solidFill>
+          <a:ln>
+            <a:noFill/>
+          </a:ln>
+          <a:effectLst/>
+        </p:spPr>
+        <p:style>
+          <a:lnRef idx="1">
+            <a:schemeClr val="accent1"/>
+          </a:lnRef>
+          <a:fillRef idx="3">
+            <a:schemeClr val="accent1"/>
+          </a:fillRef>
+          <a:effectRef idx="2">
+            <a:schemeClr val="accent1"/>
+          </a:effectRef>
+          <a:fontRef idx="minor">
+            <a:schemeClr val="lt1"/>
+          </a:fontRef>
+        </p:style>
+        <p:txBody>
+          <a:bodyPr rtlCol="0" anchor="ctr"/>
+          <a:lstStyle/>
+          <a:p>
+            <a:pPr algn="ctr"/>
+          </a:p>
+        </p:txBody>
+      </p:sp>
       <p:pic>
         <p:nvPicPr>
-          <p:cNvPr id="7" name="Picture 6" descr="check_steel.png"/>
+          <p:cNvPr id="8" name="Picture 7" descr="check_white.png"/>
           <p:cNvPicPr>
             <a:picLocks noChangeAspect="1"/>
           </p:cNvPicPr>
@@ -5494,8 +6944,8 @@
         </p:blipFill>
         <p:spPr>
           <a:xfrm>
-            <a:off x="987552" y="2542032"/>
-            <a:ext cx="237744" cy="237744"/>
+            <a:off x="1110447" y="2655783"/>
+            <a:ext cx="266273" cy="266273"/>
           </a:xfrm>
           <a:prstGeom prst="rect">
             <a:avLst/>
@@ -5504,14 +6954,14 @@
       </p:pic>
       <p:sp>
         <p:nvSpPr>
-          <p:cNvPr id="8" name="TextBox 7"/>
+          <p:cNvPr id="9" name="TextBox 8"/>
           <p:cNvSpPr txBox="1"/>
           <p:nvPr/>
         </p:nvSpPr>
         <p:spPr>
           <a:xfrm>
-            <a:off x="1353312" y="2395728"/>
-            <a:ext cx="5029200" cy="530352"/>
+            <a:off x="1627632" y="2395728"/>
+            <a:ext cx="4206240" cy="786384"/>
           </a:xfrm>
           <a:prstGeom prst="rect">
             <a:avLst/>
@@ -5536,7 +6986,7 @@
               </a:spcAft>
             </a:pPr>
             <a:r>
-              <a:rPr sz="1200" b="0">
+              <a:rPr sz="1150" b="0">
                 <a:solidFill>
                   <a:srgbClr val="1A1A1A"/>
                 </a:solidFill>
@@ -5549,18 +6999,18 @@
       </p:sp>
       <p:sp>
         <p:nvSpPr>
-          <p:cNvPr id="9" name="Rounded Rectangle 8"/>
+          <p:cNvPr id="10" name="Rounded Rectangle 9"/>
           <p:cNvSpPr/>
           <p:nvPr/>
         </p:nvSpPr>
         <p:spPr>
           <a:xfrm>
-            <a:off x="841248" y="2999232"/>
-            <a:ext cx="5715000" cy="530352"/>
+            <a:off x="6254496" y="2395728"/>
+            <a:ext cx="5138928" cy="786384"/>
           </a:xfrm>
           <a:prstGeom prst="roundRect">
             <a:avLst>
-              <a:gd name="adj" fmla="val 6000"/>
+              <a:gd name="adj" fmla="val 7000"/>
             </a:avLst>
           </a:prstGeom>
           <a:solidFill>
@@ -5595,9 +7045,55 @@
           </a:p>
         </p:txBody>
       </p:sp>
+      <p:sp>
+        <p:nvSpPr>
+          <p:cNvPr id="11" name="Rounded Rectangle 10"/>
+          <p:cNvSpPr/>
+          <p:nvPr/>
+        </p:nvSpPr>
+        <p:spPr>
+          <a:xfrm>
+            <a:off x="6400800" y="2532888"/>
+            <a:ext cx="512064" cy="512064"/>
+          </a:xfrm>
+          <a:prstGeom prst="roundRect">
+            <a:avLst>
+              <a:gd name="adj" fmla="val 26000"/>
+            </a:avLst>
+          </a:prstGeom>
+          <a:solidFill>
+            <a:srgbClr val="EE0000"/>
+          </a:solidFill>
+          <a:ln>
+            <a:noFill/>
+          </a:ln>
+          <a:effectLst/>
+        </p:spPr>
+        <p:style>
+          <a:lnRef idx="1">
+            <a:schemeClr val="accent1"/>
+          </a:lnRef>
+          <a:fillRef idx="3">
+            <a:schemeClr val="accent1"/>
+          </a:fillRef>
+          <a:effectRef idx="2">
+            <a:schemeClr val="accent1"/>
+          </a:effectRef>
+          <a:fontRef idx="minor">
+            <a:schemeClr val="lt1"/>
+          </a:fontRef>
+        </p:style>
+        <p:txBody>
+          <a:bodyPr rtlCol="0" anchor="ctr"/>
+          <a:lstStyle/>
+          <a:p>
+            <a:pPr algn="ctr"/>
+          </a:p>
+        </p:txBody>
+      </p:sp>
       <p:pic>
         <p:nvPicPr>
-          <p:cNvPr id="10" name="Picture 9" descr="check_steel.png"/>
+          <p:cNvPr id="12" name="Picture 11" descr="check_white.png"/>
           <p:cNvPicPr>
             <a:picLocks noChangeAspect="1"/>
           </p:cNvPicPr>
@@ -5611,8 +7107,8 @@
         </p:blipFill>
         <p:spPr>
           <a:xfrm>
-            <a:off x="987552" y="3145536"/>
-            <a:ext cx="237744" cy="237744"/>
+            <a:off x="6523695" y="2655783"/>
+            <a:ext cx="266273" cy="266273"/>
           </a:xfrm>
           <a:prstGeom prst="rect">
             <a:avLst/>
@@ -5621,14 +7117,14 @@
       </p:pic>
       <p:sp>
         <p:nvSpPr>
-          <p:cNvPr id="11" name="TextBox 10"/>
+          <p:cNvPr id="13" name="TextBox 12"/>
           <p:cNvSpPr txBox="1"/>
           <p:nvPr/>
         </p:nvSpPr>
         <p:spPr>
           <a:xfrm>
-            <a:off x="1353312" y="2999232"/>
-            <a:ext cx="5029200" cy="530352"/>
+            <a:off x="7040880" y="2395728"/>
+            <a:ext cx="4206240" cy="786384"/>
           </a:xfrm>
           <a:prstGeom prst="rect">
             <a:avLst/>
@@ -5653,7 +7149,7 @@
               </a:spcAft>
             </a:pPr>
             <a:r>
-              <a:rPr sz="1200" b="0">
+              <a:rPr sz="1150" b="0">
                 <a:solidFill>
                   <a:srgbClr val="1A1A1A"/>
                 </a:solidFill>
@@ -5666,18 +7162,18 @@
       </p:sp>
       <p:sp>
         <p:nvSpPr>
-          <p:cNvPr id="12" name="Rounded Rectangle 11"/>
+          <p:cNvPr id="14" name="Rounded Rectangle 13"/>
           <p:cNvSpPr/>
           <p:nvPr/>
         </p:nvSpPr>
         <p:spPr>
           <a:xfrm>
-            <a:off x="841248" y="3602736"/>
-            <a:ext cx="5715000" cy="530352"/>
+            <a:off x="841248" y="3328416"/>
+            <a:ext cx="5138928" cy="786384"/>
           </a:xfrm>
           <a:prstGeom prst="roundRect">
             <a:avLst>
-              <a:gd name="adj" fmla="val 6000"/>
+              <a:gd name="adj" fmla="val 7000"/>
             </a:avLst>
           </a:prstGeom>
           <a:solidFill>
@@ -5712,9 +7208,55 @@
           </a:p>
         </p:txBody>
       </p:sp>
+      <p:sp>
+        <p:nvSpPr>
+          <p:cNvPr id="15" name="Rounded Rectangle 14"/>
+          <p:cNvSpPr/>
+          <p:nvPr/>
+        </p:nvSpPr>
+        <p:spPr>
+          <a:xfrm>
+            <a:off x="987552" y="3465576"/>
+            <a:ext cx="512064" cy="512064"/>
+          </a:xfrm>
+          <a:prstGeom prst="roundRect">
+            <a:avLst>
+              <a:gd name="adj" fmla="val 26000"/>
+            </a:avLst>
+          </a:prstGeom>
+          <a:solidFill>
+            <a:srgbClr val="EE0000"/>
+          </a:solidFill>
+          <a:ln>
+            <a:noFill/>
+          </a:ln>
+          <a:effectLst/>
+        </p:spPr>
+        <p:style>
+          <a:lnRef idx="1">
+            <a:schemeClr val="accent1"/>
+          </a:lnRef>
+          <a:fillRef idx="3">
+            <a:schemeClr val="accent1"/>
+          </a:fillRef>
+          <a:effectRef idx="2">
+            <a:schemeClr val="accent1"/>
+          </a:effectRef>
+          <a:fontRef idx="minor">
+            <a:schemeClr val="lt1"/>
+          </a:fontRef>
+        </p:style>
+        <p:txBody>
+          <a:bodyPr rtlCol="0" anchor="ctr"/>
+          <a:lstStyle/>
+          <a:p>
+            <a:pPr algn="ctr"/>
+          </a:p>
+        </p:txBody>
+      </p:sp>
       <p:pic>
         <p:nvPicPr>
-          <p:cNvPr id="13" name="Picture 12" descr="check_steel.png"/>
+          <p:cNvPr id="16" name="Picture 15" descr="check_white.png"/>
           <p:cNvPicPr>
             <a:picLocks noChangeAspect="1"/>
           </p:cNvPicPr>
@@ -5728,8 +7270,8 @@
         </p:blipFill>
         <p:spPr>
           <a:xfrm>
-            <a:off x="987552" y="3749040"/>
-            <a:ext cx="237744" cy="237744"/>
+            <a:off x="1110447" y="3588471"/>
+            <a:ext cx="266273" cy="266273"/>
           </a:xfrm>
           <a:prstGeom prst="rect">
             <a:avLst/>
@@ -5738,14 +7280,14 @@
       </p:pic>
       <p:sp>
         <p:nvSpPr>
-          <p:cNvPr id="14" name="TextBox 13"/>
+          <p:cNvPr id="17" name="TextBox 16"/>
           <p:cNvSpPr txBox="1"/>
           <p:nvPr/>
         </p:nvSpPr>
         <p:spPr>
           <a:xfrm>
-            <a:off x="1353312" y="3602736"/>
-            <a:ext cx="5029200" cy="530352"/>
+            <a:off x="1627632" y="3328416"/>
+            <a:ext cx="4206240" cy="786384"/>
           </a:xfrm>
           <a:prstGeom prst="rect">
             <a:avLst/>
@@ -5770,7 +7312,7 @@
               </a:spcAft>
             </a:pPr>
             <a:r>
-              <a:rPr sz="1200" b="0">
+              <a:rPr sz="1150" b="0">
                 <a:solidFill>
                   <a:srgbClr val="1A1A1A"/>
                 </a:solidFill>
@@ -5783,18 +7325,18 @@
       </p:sp>
       <p:sp>
         <p:nvSpPr>
-          <p:cNvPr id="15" name="Rounded Rectangle 14"/>
+          <p:cNvPr id="18" name="Rounded Rectangle 17"/>
           <p:cNvSpPr/>
           <p:nvPr/>
         </p:nvSpPr>
         <p:spPr>
           <a:xfrm>
-            <a:off x="841248" y="4206240"/>
-            <a:ext cx="5715000" cy="530352"/>
+            <a:off x="6254496" y="3328416"/>
+            <a:ext cx="5138928" cy="786384"/>
           </a:xfrm>
           <a:prstGeom prst="roundRect">
             <a:avLst>
-              <a:gd name="adj" fmla="val 6000"/>
+              <a:gd name="adj" fmla="val 7000"/>
             </a:avLst>
           </a:prstGeom>
           <a:solidFill>
@@ -5829,9 +7371,55 @@
           </a:p>
         </p:txBody>
       </p:sp>
+      <p:sp>
+        <p:nvSpPr>
+          <p:cNvPr id="19" name="Rounded Rectangle 18"/>
+          <p:cNvSpPr/>
+          <p:nvPr/>
+        </p:nvSpPr>
+        <p:spPr>
+          <a:xfrm>
+            <a:off x="6400800" y="3465576"/>
+            <a:ext cx="512064" cy="512064"/>
+          </a:xfrm>
+          <a:prstGeom prst="roundRect">
+            <a:avLst>
+              <a:gd name="adj" fmla="val 26000"/>
+            </a:avLst>
+          </a:prstGeom>
+          <a:solidFill>
+            <a:srgbClr val="EE0000"/>
+          </a:solidFill>
+          <a:ln>
+            <a:noFill/>
+          </a:ln>
+          <a:effectLst/>
+        </p:spPr>
+        <p:style>
+          <a:lnRef idx="1">
+            <a:schemeClr val="accent1"/>
+          </a:lnRef>
+          <a:fillRef idx="3">
+            <a:schemeClr val="accent1"/>
+          </a:fillRef>
+          <a:effectRef idx="2">
+            <a:schemeClr val="accent1"/>
+          </a:effectRef>
+          <a:fontRef idx="minor">
+            <a:schemeClr val="lt1"/>
+          </a:fontRef>
+        </p:style>
+        <p:txBody>
+          <a:bodyPr rtlCol="0" anchor="ctr"/>
+          <a:lstStyle/>
+          <a:p>
+            <a:pPr algn="ctr"/>
+          </a:p>
+        </p:txBody>
+      </p:sp>
       <p:pic>
         <p:nvPicPr>
-          <p:cNvPr id="16" name="Picture 15" descr="check_steel.png"/>
+          <p:cNvPr id="20" name="Picture 19" descr="check_white.png"/>
           <p:cNvPicPr>
             <a:picLocks noChangeAspect="1"/>
           </p:cNvPicPr>
@@ -5845,8 +7433,8 @@
         </p:blipFill>
         <p:spPr>
           <a:xfrm>
-            <a:off x="987552" y="4352544"/>
-            <a:ext cx="237744" cy="237744"/>
+            <a:off x="6523695" y="3588471"/>
+            <a:ext cx="266273" cy="266273"/>
           </a:xfrm>
           <a:prstGeom prst="rect">
             <a:avLst/>
@@ -5855,14 +7443,14 @@
       </p:pic>
       <p:sp>
         <p:nvSpPr>
-          <p:cNvPr id="17" name="TextBox 16"/>
+          <p:cNvPr id="21" name="TextBox 20"/>
           <p:cNvSpPr txBox="1"/>
           <p:nvPr/>
         </p:nvSpPr>
         <p:spPr>
           <a:xfrm>
-            <a:off x="1353312" y="4206240"/>
-            <a:ext cx="5029200" cy="530352"/>
+            <a:off x="7040880" y="3328416"/>
+            <a:ext cx="4206240" cy="786384"/>
           </a:xfrm>
           <a:prstGeom prst="rect">
             <a:avLst/>
@@ -5887,7 +7475,7 @@
               </a:spcAft>
             </a:pPr>
             <a:r>
-              <a:rPr sz="1200" b="0">
+              <a:rPr sz="1150" b="0">
                 <a:solidFill>
                   <a:srgbClr val="1A1A1A"/>
                 </a:solidFill>
@@ -5900,18 +7488,18 @@
       </p:sp>
       <p:sp>
         <p:nvSpPr>
-          <p:cNvPr id="18" name="Rounded Rectangle 17"/>
+          <p:cNvPr id="22" name="Rounded Rectangle 21"/>
           <p:cNvSpPr/>
           <p:nvPr/>
         </p:nvSpPr>
         <p:spPr>
           <a:xfrm>
-            <a:off x="841248" y="4809744"/>
-            <a:ext cx="5715000" cy="530352"/>
+            <a:off x="841248" y="4261104"/>
+            <a:ext cx="5138928" cy="786384"/>
           </a:xfrm>
           <a:prstGeom prst="roundRect">
             <a:avLst>
-              <a:gd name="adj" fmla="val 6000"/>
+              <a:gd name="adj" fmla="val 7000"/>
             </a:avLst>
           </a:prstGeom>
           <a:solidFill>
@@ -5946,9 +7534,55 @@
           </a:p>
         </p:txBody>
       </p:sp>
+      <p:sp>
+        <p:nvSpPr>
+          <p:cNvPr id="23" name="Rounded Rectangle 22"/>
+          <p:cNvSpPr/>
+          <p:nvPr/>
+        </p:nvSpPr>
+        <p:spPr>
+          <a:xfrm>
+            <a:off x="987552" y="4398264"/>
+            <a:ext cx="512064" cy="512064"/>
+          </a:xfrm>
+          <a:prstGeom prst="roundRect">
+            <a:avLst>
+              <a:gd name="adj" fmla="val 26000"/>
+            </a:avLst>
+          </a:prstGeom>
+          <a:solidFill>
+            <a:srgbClr val="EE0000"/>
+          </a:solidFill>
+          <a:ln>
+            <a:noFill/>
+          </a:ln>
+          <a:effectLst/>
+        </p:spPr>
+        <p:style>
+          <a:lnRef idx="1">
+            <a:schemeClr val="accent1"/>
+          </a:lnRef>
+          <a:fillRef idx="3">
+            <a:schemeClr val="accent1"/>
+          </a:fillRef>
+          <a:effectRef idx="2">
+            <a:schemeClr val="accent1"/>
+          </a:effectRef>
+          <a:fontRef idx="minor">
+            <a:schemeClr val="lt1"/>
+          </a:fontRef>
+        </p:style>
+        <p:txBody>
+          <a:bodyPr rtlCol="0" anchor="ctr"/>
+          <a:lstStyle/>
+          <a:p>
+            <a:pPr algn="ctr"/>
+          </a:p>
+        </p:txBody>
+      </p:sp>
       <p:pic>
         <p:nvPicPr>
-          <p:cNvPr id="19" name="Picture 18" descr="check_steel.png"/>
+          <p:cNvPr id="24" name="Picture 23" descr="check_white.png"/>
           <p:cNvPicPr>
             <a:picLocks noChangeAspect="1"/>
           </p:cNvPicPr>
@@ -5962,8 +7596,8 @@
         </p:blipFill>
         <p:spPr>
           <a:xfrm>
-            <a:off x="987552" y="4956048"/>
-            <a:ext cx="237744" cy="237744"/>
+            <a:off x="1110447" y="4521159"/>
+            <a:ext cx="266273" cy="266273"/>
           </a:xfrm>
           <a:prstGeom prst="rect">
             <a:avLst/>
@@ -5972,14 +7606,14 @@
       </p:pic>
       <p:sp>
         <p:nvSpPr>
-          <p:cNvPr id="20" name="TextBox 19"/>
+          <p:cNvPr id="25" name="TextBox 24"/>
           <p:cNvSpPr txBox="1"/>
           <p:nvPr/>
         </p:nvSpPr>
         <p:spPr>
           <a:xfrm>
-            <a:off x="1353312" y="4809744"/>
-            <a:ext cx="5029200" cy="530352"/>
+            <a:off x="1627632" y="4261104"/>
+            <a:ext cx="4206240" cy="786384"/>
           </a:xfrm>
           <a:prstGeom prst="rect">
             <a:avLst/>
@@ -6004,221 +7638,13 @@
               </a:spcAft>
             </a:pPr>
             <a:r>
-              <a:rPr sz="1200" b="0">
+              <a:rPr sz="1150" b="0">
                 <a:solidFill>
                   <a:srgbClr val="1A1A1A"/>
                 </a:solidFill>
                 <a:latin typeface="Red Hat Text"/>
               </a:rPr>
               <a:t>Take a position: folders, not branches</a:t>
-            </a:r>
-          </a:p>
-        </p:txBody>
-      </p:sp>
-      <p:sp>
-        <p:nvSpPr>
-          <p:cNvPr id="21" name="Rounded Rectangle 20"/>
-          <p:cNvSpPr/>
-          <p:nvPr/>
-        </p:nvSpPr>
-        <p:spPr>
-          <a:xfrm>
-            <a:off x="6812280" y="2395728"/>
-            <a:ext cx="4538167" cy="2944368"/>
-          </a:xfrm>
-          <a:prstGeom prst="roundRect">
-            <a:avLst>
-              <a:gd name="adj" fmla="val 4000"/>
-            </a:avLst>
-          </a:prstGeom>
-          <a:solidFill>
-            <a:srgbClr val="FFFFFF"/>
-          </a:solidFill>
-          <a:ln w="15240">
-            <a:solidFill>
-              <a:srgbClr val="DDE1E6"/>
-            </a:solidFill>
-          </a:ln>
-          <a:effectLst/>
-        </p:spPr>
-        <p:style>
-          <a:lnRef idx="1">
-            <a:schemeClr val="accent1"/>
-          </a:lnRef>
-          <a:fillRef idx="3">
-            <a:schemeClr val="accent1"/>
-          </a:fillRef>
-          <a:effectRef idx="2">
-            <a:schemeClr val="accent1"/>
-          </a:effectRef>
-          <a:fontRef idx="minor">
-            <a:schemeClr val="lt1"/>
-          </a:fontRef>
-        </p:style>
-        <p:txBody>
-          <a:bodyPr rtlCol="0" anchor="ctr"/>
-          <a:lstStyle/>
-          <a:p>
-            <a:pPr algn="ctr"/>
-          </a:p>
-        </p:txBody>
-      </p:sp>
-      <p:sp>
-        <p:nvSpPr>
-          <p:cNvPr id="22" name="Rounded Rectangle 21"/>
-          <p:cNvSpPr/>
-          <p:nvPr/>
-        </p:nvSpPr>
-        <p:spPr>
-          <a:xfrm>
-            <a:off x="7013448" y="2596896"/>
-            <a:ext cx="1298448" cy="310896"/>
-          </a:xfrm>
-          <a:prstGeom prst="roundRect">
-            <a:avLst>
-              <a:gd name="adj" fmla="val 50000"/>
-            </a:avLst>
-          </a:prstGeom>
-          <a:solidFill>
-            <a:srgbClr val="FCECEC"/>
-          </a:solidFill>
-          <a:ln>
-            <a:noFill/>
-          </a:ln>
-          <a:effectLst/>
-        </p:spPr>
-        <p:style>
-          <a:lnRef idx="1">
-            <a:schemeClr val="accent1"/>
-          </a:lnRef>
-          <a:fillRef idx="3">
-            <a:schemeClr val="accent1"/>
-          </a:fillRef>
-          <a:effectRef idx="2">
-            <a:schemeClr val="accent1"/>
-          </a:effectRef>
-          <a:fontRef idx="minor">
-            <a:schemeClr val="lt1"/>
-          </a:fontRef>
-        </p:style>
-        <p:txBody>
-          <a:bodyPr rtlCol="0" anchor="ctr"/>
-          <a:lstStyle/>
-          <a:p>
-            <a:pPr algn="ctr"/>
-          </a:p>
-        </p:txBody>
-      </p:sp>
-      <p:sp>
-        <p:nvSpPr>
-          <p:cNvPr id="23" name="TextBox 22"/>
-          <p:cNvSpPr txBox="1"/>
-          <p:nvPr/>
-        </p:nvSpPr>
-        <p:spPr>
-          <a:xfrm>
-            <a:off x="7013448" y="2596896"/>
-            <a:ext cx="1298448" cy="310896"/>
-          </a:xfrm>
-          <a:prstGeom prst="rect">
-            <a:avLst/>
-          </a:prstGeom>
-          <a:noFill/>
-        </p:spPr>
-        <p:txBody>
-          <a:bodyPr wrap="none" anchor="ctr" lIns="0" rIns="0" tIns="0" bIns="0">
-            <a:spAutoFit/>
-          </a:bodyPr>
-          <a:lstStyle/>
-          <a:p>
-            <a:pPr algn="ctr">
-              <a:lnSpc>
-                <a:spcPct val="106000"/>
-              </a:lnSpc>
-              <a:spcBef>
-                <a:spcPts val="0"/>
-              </a:spcBef>
-              <a:spcAft>
-                <a:spcPts val="0"/>
-              </a:spcAft>
-            </a:pPr>
-            <a:r>
-              <a:rPr sz="850" b="1">
-                <a:solidFill>
-                  <a:srgbClr val="B80000"/>
-                </a:solidFill>
-                <a:latin typeface="Red Hat Display"/>
-              </a:rPr>
-              <a:t>MEDIA PASS</a:t>
-            </a:r>
-          </a:p>
-        </p:txBody>
-      </p:sp>
-      <p:pic>
-        <p:nvPicPr>
-          <p:cNvPr id="24" name="Picture 23" descr="eye_slate.png"/>
-          <p:cNvPicPr>
-            <a:picLocks noChangeAspect="1"/>
-          </p:cNvPicPr>
-          <p:nvPr/>
-        </p:nvPicPr>
-        <p:blipFill>
-          <a:blip r:embed="rId4"/>
-          <a:stretch>
-            <a:fillRect/>
-          </a:stretch>
-        </p:blipFill>
-        <p:spPr>
-          <a:xfrm>
-            <a:off x="8843619" y="3108960"/>
-            <a:ext cx="475488" cy="475488"/>
-          </a:xfrm>
-          <a:prstGeom prst="rect">
-            <a:avLst/>
-          </a:prstGeom>
-        </p:spPr>
-      </p:pic>
-      <p:sp>
-        <p:nvSpPr>
-          <p:cNvPr id="25" name="TextBox 24"/>
-          <p:cNvSpPr txBox="1"/>
-          <p:nvPr/>
-        </p:nvSpPr>
-        <p:spPr>
-          <a:xfrm>
-            <a:off x="7050024" y="3721608"/>
-            <a:ext cx="4062679" cy="1481328"/>
-          </a:xfrm>
-          <a:prstGeom prst="rect">
-            <a:avLst/>
-          </a:prstGeom>
-          <a:noFill/>
-        </p:spPr>
-        <p:txBody>
-          <a:bodyPr wrap="square" anchor="t" lIns="0" rIns="0" tIns="0" bIns="0">
-            <a:spAutoFit/>
-          </a:bodyPr>
-          <a:lstStyle/>
-          <a:p>
-            <a:pPr algn="l">
-              <a:lnSpc>
-                <a:spcPct val="120000"/>
-              </a:lnSpc>
-              <a:spcBef>
-                <a:spcPts val="0"/>
-              </a:spcBef>
-              <a:spcAft>
-                <a:spcPts val="0"/>
-              </a:spcAft>
-            </a:pPr>
-            <a:r>
-              <a:rPr sz="950" b="0">
-                <a:solidFill>
-                  <a:srgbClr val="8A9099"/>
-                </a:solidFill>
-                <a:latin typeface="Red Hat Text"/>
-              </a:rPr>
-              <a:t>Concept diagram gitops-at-scale-01-appset — generator (dev/stage/prod) → one template → three generated Applications, prod tinted as a Rollout.</a:t>
             </a:r>
           </a:p>
         </p:txBody>
@@ -6526,11 +7952,11 @@
         <p:spPr>
           <a:xfrm>
             <a:off x="841248" y="2395728"/>
-            <a:ext cx="5715000" cy="530352"/>
+            <a:ext cx="5138928" cy="786384"/>
           </a:xfrm>
           <a:prstGeom prst="roundRect">
             <a:avLst>
-              <a:gd name="adj" fmla="val 6000"/>
+              <a:gd name="adj" fmla="val 7000"/>
             </a:avLst>
           </a:prstGeom>
           <a:solidFill>
@@ -6565,9 +7991,55 @@
           </a:p>
         </p:txBody>
       </p:sp>
+      <p:sp>
+        <p:nvSpPr>
+          <p:cNvPr id="7" name="Rounded Rectangle 6"/>
+          <p:cNvSpPr/>
+          <p:nvPr/>
+        </p:nvSpPr>
+        <p:spPr>
+          <a:xfrm>
+            <a:off x="987552" y="2532888"/>
+            <a:ext cx="512064" cy="512064"/>
+          </a:xfrm>
+          <a:prstGeom prst="roundRect">
+            <a:avLst>
+              <a:gd name="adj" fmla="val 26000"/>
+            </a:avLst>
+          </a:prstGeom>
+          <a:solidFill>
+            <a:srgbClr val="EE0000"/>
+          </a:solidFill>
+          <a:ln>
+            <a:noFill/>
+          </a:ln>
+          <a:effectLst/>
+        </p:spPr>
+        <p:style>
+          <a:lnRef idx="1">
+            <a:schemeClr val="accent1"/>
+          </a:lnRef>
+          <a:fillRef idx="3">
+            <a:schemeClr val="accent1"/>
+          </a:fillRef>
+          <a:effectRef idx="2">
+            <a:schemeClr val="accent1"/>
+          </a:effectRef>
+          <a:fontRef idx="minor">
+            <a:schemeClr val="lt1"/>
+          </a:fontRef>
+        </p:style>
+        <p:txBody>
+          <a:bodyPr rtlCol="0" anchor="ctr"/>
+          <a:lstStyle/>
+          <a:p>
+            <a:pPr algn="ctr"/>
+          </a:p>
+        </p:txBody>
+      </p:sp>
       <p:pic>
         <p:nvPicPr>
-          <p:cNvPr id="7" name="Picture 6" descr="check_steel.png"/>
+          <p:cNvPr id="8" name="Picture 7" descr="check_white.png"/>
           <p:cNvPicPr>
             <a:picLocks noChangeAspect="1"/>
           </p:cNvPicPr>
@@ -6581,8 +8053,8 @@
         </p:blipFill>
         <p:spPr>
           <a:xfrm>
-            <a:off x="987552" y="2542032"/>
-            <a:ext cx="237744" cy="237744"/>
+            <a:off x="1110447" y="2655783"/>
+            <a:ext cx="266273" cy="266273"/>
           </a:xfrm>
           <a:prstGeom prst="rect">
             <a:avLst/>
@@ -6591,14 +8063,14 @@
       </p:pic>
       <p:sp>
         <p:nvSpPr>
-          <p:cNvPr id="8" name="TextBox 7"/>
+          <p:cNvPr id="9" name="TextBox 8"/>
           <p:cNvSpPr txBox="1"/>
           <p:nvPr/>
         </p:nvSpPr>
         <p:spPr>
           <a:xfrm>
-            <a:off x="1353312" y="2395728"/>
-            <a:ext cx="5029200" cy="530352"/>
+            <a:off x="1627632" y="2395728"/>
+            <a:ext cx="4206240" cy="786384"/>
           </a:xfrm>
           <a:prstGeom prst="rect">
             <a:avLst/>
@@ -6623,7 +8095,7 @@
               </a:spcAft>
             </a:pPr>
             <a:r>
-              <a:rPr sz="1200" b="0">
+              <a:rPr sz="1150" b="0">
                 <a:solidFill>
                   <a:srgbClr val="1A1A1A"/>
                 </a:solidFill>
@@ -6636,18 +8108,18 @@
       </p:sp>
       <p:sp>
         <p:nvSpPr>
-          <p:cNvPr id="9" name="Rounded Rectangle 8"/>
+          <p:cNvPr id="10" name="Rounded Rectangle 9"/>
           <p:cNvSpPr/>
           <p:nvPr/>
         </p:nvSpPr>
         <p:spPr>
           <a:xfrm>
-            <a:off x="841248" y="2999232"/>
-            <a:ext cx="5715000" cy="530352"/>
+            <a:off x="6254496" y="2395728"/>
+            <a:ext cx="5138928" cy="786384"/>
           </a:xfrm>
           <a:prstGeom prst="roundRect">
             <a:avLst>
-              <a:gd name="adj" fmla="val 6000"/>
+              <a:gd name="adj" fmla="val 7000"/>
             </a:avLst>
           </a:prstGeom>
           <a:solidFill>
@@ -6682,9 +8154,55 @@
           </a:p>
         </p:txBody>
       </p:sp>
+      <p:sp>
+        <p:nvSpPr>
+          <p:cNvPr id="11" name="Rounded Rectangle 10"/>
+          <p:cNvSpPr/>
+          <p:nvPr/>
+        </p:nvSpPr>
+        <p:spPr>
+          <a:xfrm>
+            <a:off x="6400800" y="2532888"/>
+            <a:ext cx="512064" cy="512064"/>
+          </a:xfrm>
+          <a:prstGeom prst="roundRect">
+            <a:avLst>
+              <a:gd name="adj" fmla="val 26000"/>
+            </a:avLst>
+          </a:prstGeom>
+          <a:solidFill>
+            <a:srgbClr val="EE0000"/>
+          </a:solidFill>
+          <a:ln>
+            <a:noFill/>
+          </a:ln>
+          <a:effectLst/>
+        </p:spPr>
+        <p:style>
+          <a:lnRef idx="1">
+            <a:schemeClr val="accent1"/>
+          </a:lnRef>
+          <a:fillRef idx="3">
+            <a:schemeClr val="accent1"/>
+          </a:fillRef>
+          <a:effectRef idx="2">
+            <a:schemeClr val="accent1"/>
+          </a:effectRef>
+          <a:fontRef idx="minor">
+            <a:schemeClr val="lt1"/>
+          </a:fontRef>
+        </p:style>
+        <p:txBody>
+          <a:bodyPr rtlCol="0" anchor="ctr"/>
+          <a:lstStyle/>
+          <a:p>
+            <a:pPr algn="ctr"/>
+          </a:p>
+        </p:txBody>
+      </p:sp>
       <p:pic>
         <p:nvPicPr>
-          <p:cNvPr id="10" name="Picture 9" descr="check_steel.png"/>
+          <p:cNvPr id="12" name="Picture 11" descr="check_white.png"/>
           <p:cNvPicPr>
             <a:picLocks noChangeAspect="1"/>
           </p:cNvPicPr>
@@ -6698,8 +8216,8 @@
         </p:blipFill>
         <p:spPr>
           <a:xfrm>
-            <a:off x="987552" y="3145536"/>
-            <a:ext cx="237744" cy="237744"/>
+            <a:off x="6523695" y="2655783"/>
+            <a:ext cx="266273" cy="266273"/>
           </a:xfrm>
           <a:prstGeom prst="rect">
             <a:avLst/>
@@ -6708,14 +8226,14 @@
       </p:pic>
       <p:sp>
         <p:nvSpPr>
-          <p:cNvPr id="11" name="TextBox 10"/>
+          <p:cNvPr id="13" name="TextBox 12"/>
           <p:cNvSpPr txBox="1"/>
           <p:nvPr/>
         </p:nvSpPr>
         <p:spPr>
           <a:xfrm>
-            <a:off x="1353312" y="2999232"/>
-            <a:ext cx="5029200" cy="530352"/>
+            <a:off x="7040880" y="2395728"/>
+            <a:ext cx="4206240" cy="786384"/>
           </a:xfrm>
           <a:prstGeom prst="rect">
             <a:avLst/>
@@ -6740,7 +8258,7 @@
               </a:spcAft>
             </a:pPr>
             <a:r>
-              <a:rPr sz="1200" b="0">
+              <a:rPr sz="1150" b="0">
                 <a:solidFill>
                   <a:srgbClr val="1A1A1A"/>
                 </a:solidFill>
@@ -6753,18 +8271,18 @@
       </p:sp>
       <p:sp>
         <p:nvSpPr>
-          <p:cNvPr id="12" name="Rounded Rectangle 11"/>
+          <p:cNvPr id="14" name="Rounded Rectangle 13"/>
           <p:cNvSpPr/>
           <p:nvPr/>
         </p:nvSpPr>
         <p:spPr>
           <a:xfrm>
-            <a:off x="841248" y="3602736"/>
-            <a:ext cx="5715000" cy="530352"/>
+            <a:off x="841248" y="3328416"/>
+            <a:ext cx="5138928" cy="786384"/>
           </a:xfrm>
           <a:prstGeom prst="roundRect">
             <a:avLst>
-              <a:gd name="adj" fmla="val 6000"/>
+              <a:gd name="adj" fmla="val 7000"/>
             </a:avLst>
           </a:prstGeom>
           <a:solidFill>
@@ -6799,9 +8317,55 @@
           </a:p>
         </p:txBody>
       </p:sp>
+      <p:sp>
+        <p:nvSpPr>
+          <p:cNvPr id="15" name="Rounded Rectangle 14"/>
+          <p:cNvSpPr/>
+          <p:nvPr/>
+        </p:nvSpPr>
+        <p:spPr>
+          <a:xfrm>
+            <a:off x="987552" y="3465576"/>
+            <a:ext cx="512064" cy="512064"/>
+          </a:xfrm>
+          <a:prstGeom prst="roundRect">
+            <a:avLst>
+              <a:gd name="adj" fmla="val 26000"/>
+            </a:avLst>
+          </a:prstGeom>
+          <a:solidFill>
+            <a:srgbClr val="EE0000"/>
+          </a:solidFill>
+          <a:ln>
+            <a:noFill/>
+          </a:ln>
+          <a:effectLst/>
+        </p:spPr>
+        <p:style>
+          <a:lnRef idx="1">
+            <a:schemeClr val="accent1"/>
+          </a:lnRef>
+          <a:fillRef idx="3">
+            <a:schemeClr val="accent1"/>
+          </a:fillRef>
+          <a:effectRef idx="2">
+            <a:schemeClr val="accent1"/>
+          </a:effectRef>
+          <a:fontRef idx="minor">
+            <a:schemeClr val="lt1"/>
+          </a:fontRef>
+        </p:style>
+        <p:txBody>
+          <a:bodyPr rtlCol="0" anchor="ctr"/>
+          <a:lstStyle/>
+          <a:p>
+            <a:pPr algn="ctr"/>
+          </a:p>
+        </p:txBody>
+      </p:sp>
       <p:pic>
         <p:nvPicPr>
-          <p:cNvPr id="13" name="Picture 12" descr="check_steel.png"/>
+          <p:cNvPr id="16" name="Picture 15" descr="check_white.png"/>
           <p:cNvPicPr>
             <a:picLocks noChangeAspect="1"/>
           </p:cNvPicPr>
@@ -6815,8 +8379,8 @@
         </p:blipFill>
         <p:spPr>
           <a:xfrm>
-            <a:off x="987552" y="3749040"/>
-            <a:ext cx="237744" cy="237744"/>
+            <a:off x="1110447" y="3588471"/>
+            <a:ext cx="266273" cy="266273"/>
           </a:xfrm>
           <a:prstGeom prst="rect">
             <a:avLst/>
@@ -6825,14 +8389,14 @@
       </p:pic>
       <p:sp>
         <p:nvSpPr>
-          <p:cNvPr id="14" name="TextBox 13"/>
+          <p:cNvPr id="17" name="TextBox 16"/>
           <p:cNvSpPr txBox="1"/>
           <p:nvPr/>
         </p:nvSpPr>
         <p:spPr>
           <a:xfrm>
-            <a:off x="1353312" y="3602736"/>
-            <a:ext cx="5029200" cy="530352"/>
+            <a:off x="1627632" y="3328416"/>
+            <a:ext cx="4206240" cy="786384"/>
           </a:xfrm>
           <a:prstGeom prst="rect">
             <a:avLst/>
@@ -6857,7 +8421,7 @@
               </a:spcAft>
             </a:pPr>
             <a:r>
-              <a:rPr sz="1200" b="0">
+              <a:rPr sz="1150" b="0">
                 <a:solidFill>
                   <a:srgbClr val="1A1A1A"/>
                 </a:solidFill>
@@ -6870,18 +8434,18 @@
       </p:sp>
       <p:sp>
         <p:nvSpPr>
-          <p:cNvPr id="15" name="Rounded Rectangle 14"/>
+          <p:cNvPr id="18" name="Rounded Rectangle 17"/>
           <p:cNvSpPr/>
           <p:nvPr/>
         </p:nvSpPr>
         <p:spPr>
           <a:xfrm>
-            <a:off x="841248" y="4206240"/>
-            <a:ext cx="5715000" cy="530352"/>
+            <a:off x="6254496" y="3328416"/>
+            <a:ext cx="5138928" cy="786384"/>
           </a:xfrm>
           <a:prstGeom prst="roundRect">
             <a:avLst>
-              <a:gd name="adj" fmla="val 6000"/>
+              <a:gd name="adj" fmla="val 7000"/>
             </a:avLst>
           </a:prstGeom>
           <a:solidFill>
@@ -6916,9 +8480,55 @@
           </a:p>
         </p:txBody>
       </p:sp>
+      <p:sp>
+        <p:nvSpPr>
+          <p:cNvPr id="19" name="Rounded Rectangle 18"/>
+          <p:cNvSpPr/>
+          <p:nvPr/>
+        </p:nvSpPr>
+        <p:spPr>
+          <a:xfrm>
+            <a:off x="6400800" y="3465576"/>
+            <a:ext cx="512064" cy="512064"/>
+          </a:xfrm>
+          <a:prstGeom prst="roundRect">
+            <a:avLst>
+              <a:gd name="adj" fmla="val 26000"/>
+            </a:avLst>
+          </a:prstGeom>
+          <a:solidFill>
+            <a:srgbClr val="EE0000"/>
+          </a:solidFill>
+          <a:ln>
+            <a:noFill/>
+          </a:ln>
+          <a:effectLst/>
+        </p:spPr>
+        <p:style>
+          <a:lnRef idx="1">
+            <a:schemeClr val="accent1"/>
+          </a:lnRef>
+          <a:fillRef idx="3">
+            <a:schemeClr val="accent1"/>
+          </a:fillRef>
+          <a:effectRef idx="2">
+            <a:schemeClr val="accent1"/>
+          </a:effectRef>
+          <a:fontRef idx="minor">
+            <a:schemeClr val="lt1"/>
+          </a:fontRef>
+        </p:style>
+        <p:txBody>
+          <a:bodyPr rtlCol="0" anchor="ctr"/>
+          <a:lstStyle/>
+          <a:p>
+            <a:pPr algn="ctr"/>
+          </a:p>
+        </p:txBody>
+      </p:sp>
       <p:pic>
         <p:nvPicPr>
-          <p:cNvPr id="16" name="Picture 15" descr="check_steel.png"/>
+          <p:cNvPr id="20" name="Picture 19" descr="check_white.png"/>
           <p:cNvPicPr>
             <a:picLocks noChangeAspect="1"/>
           </p:cNvPicPr>
@@ -6932,8 +8542,8 @@
         </p:blipFill>
         <p:spPr>
           <a:xfrm>
-            <a:off x="987552" y="4352544"/>
-            <a:ext cx="237744" cy="237744"/>
+            <a:off x="6523695" y="3588471"/>
+            <a:ext cx="266273" cy="266273"/>
           </a:xfrm>
           <a:prstGeom prst="rect">
             <a:avLst/>
@@ -6942,14 +8552,14 @@
       </p:pic>
       <p:sp>
         <p:nvSpPr>
-          <p:cNvPr id="17" name="TextBox 16"/>
+          <p:cNvPr id="21" name="TextBox 20"/>
           <p:cNvSpPr txBox="1"/>
           <p:nvPr/>
         </p:nvSpPr>
         <p:spPr>
           <a:xfrm>
-            <a:off x="1353312" y="4206240"/>
-            <a:ext cx="5029200" cy="530352"/>
+            <a:off x="7040880" y="3328416"/>
+            <a:ext cx="4206240" cy="786384"/>
           </a:xfrm>
           <a:prstGeom prst="rect">
             <a:avLst/>
@@ -6974,7 +8584,7 @@
               </a:spcAft>
             </a:pPr>
             <a:r>
-              <a:rPr sz="1200" b="0">
+              <a:rPr sz="1150" b="0">
                 <a:solidFill>
                   <a:srgbClr val="1A1A1A"/>
                 </a:solidFill>
@@ -6987,18 +8597,18 @@
       </p:sp>
       <p:sp>
         <p:nvSpPr>
-          <p:cNvPr id="18" name="Rounded Rectangle 17"/>
+          <p:cNvPr id="22" name="Rounded Rectangle 21"/>
           <p:cNvSpPr/>
           <p:nvPr/>
         </p:nvSpPr>
         <p:spPr>
           <a:xfrm>
-            <a:off x="841248" y="4809744"/>
-            <a:ext cx="5715000" cy="530352"/>
+            <a:off x="841248" y="4261104"/>
+            <a:ext cx="5138928" cy="786384"/>
           </a:xfrm>
           <a:prstGeom prst="roundRect">
             <a:avLst>
-              <a:gd name="adj" fmla="val 6000"/>
+              <a:gd name="adj" fmla="val 7000"/>
             </a:avLst>
           </a:prstGeom>
           <a:solidFill>
@@ -7033,9 +8643,55 @@
           </a:p>
         </p:txBody>
       </p:sp>
+      <p:sp>
+        <p:nvSpPr>
+          <p:cNvPr id="23" name="Rounded Rectangle 22"/>
+          <p:cNvSpPr/>
+          <p:nvPr/>
+        </p:nvSpPr>
+        <p:spPr>
+          <a:xfrm>
+            <a:off x="987552" y="4398264"/>
+            <a:ext cx="512064" cy="512064"/>
+          </a:xfrm>
+          <a:prstGeom prst="roundRect">
+            <a:avLst>
+              <a:gd name="adj" fmla="val 26000"/>
+            </a:avLst>
+          </a:prstGeom>
+          <a:solidFill>
+            <a:srgbClr val="EE0000"/>
+          </a:solidFill>
+          <a:ln>
+            <a:noFill/>
+          </a:ln>
+          <a:effectLst/>
+        </p:spPr>
+        <p:style>
+          <a:lnRef idx="1">
+            <a:schemeClr val="accent1"/>
+          </a:lnRef>
+          <a:fillRef idx="3">
+            <a:schemeClr val="accent1"/>
+          </a:fillRef>
+          <a:effectRef idx="2">
+            <a:schemeClr val="accent1"/>
+          </a:effectRef>
+          <a:fontRef idx="minor">
+            <a:schemeClr val="lt1"/>
+          </a:fontRef>
+        </p:style>
+        <p:txBody>
+          <a:bodyPr rtlCol="0" anchor="ctr"/>
+          <a:lstStyle/>
+          <a:p>
+            <a:pPr algn="ctr"/>
+          </a:p>
+        </p:txBody>
+      </p:sp>
       <p:pic>
         <p:nvPicPr>
-          <p:cNvPr id="19" name="Picture 18" descr="check_steel.png"/>
+          <p:cNvPr id="24" name="Picture 23" descr="check_white.png"/>
           <p:cNvPicPr>
             <a:picLocks noChangeAspect="1"/>
           </p:cNvPicPr>
@@ -7049,8 +8705,8 @@
         </p:blipFill>
         <p:spPr>
           <a:xfrm>
-            <a:off x="987552" y="4956048"/>
-            <a:ext cx="237744" cy="237744"/>
+            <a:off x="1110447" y="4521159"/>
+            <a:ext cx="266273" cy="266273"/>
           </a:xfrm>
           <a:prstGeom prst="rect">
             <a:avLst/>
@@ -7059,14 +8715,14 @@
       </p:pic>
       <p:sp>
         <p:nvSpPr>
-          <p:cNvPr id="20" name="TextBox 19"/>
+          <p:cNvPr id="25" name="TextBox 24"/>
           <p:cNvSpPr txBox="1"/>
           <p:nvPr/>
         </p:nvSpPr>
         <p:spPr>
           <a:xfrm>
-            <a:off x="1353312" y="4809744"/>
-            <a:ext cx="5029200" cy="530352"/>
+            <a:off x="1627632" y="4261104"/>
+            <a:ext cx="4206240" cy="786384"/>
           </a:xfrm>
           <a:prstGeom prst="rect">
             <a:avLst/>
@@ -7091,221 +8747,13 @@
               </a:spcAft>
             </a:pPr>
             <a:r>
-              <a:rPr sz="1200" b="0">
+              <a:rPr sz="1150" b="0">
                 <a:solidFill>
                   <a:srgbClr val="1A1A1A"/>
                 </a:solidFill>
                 <a:latin typeface="Red Hat Text"/>
               </a:rPr>
               <a:t>DB (0) → migration (1) → app (2)</a:t>
-            </a:r>
-          </a:p>
-        </p:txBody>
-      </p:sp>
-      <p:sp>
-        <p:nvSpPr>
-          <p:cNvPr id="21" name="Rounded Rectangle 20"/>
-          <p:cNvSpPr/>
-          <p:nvPr/>
-        </p:nvSpPr>
-        <p:spPr>
-          <a:xfrm>
-            <a:off x="6812280" y="2395728"/>
-            <a:ext cx="4538167" cy="2944368"/>
-          </a:xfrm>
-          <a:prstGeom prst="roundRect">
-            <a:avLst>
-              <a:gd name="adj" fmla="val 4000"/>
-            </a:avLst>
-          </a:prstGeom>
-          <a:solidFill>
-            <a:srgbClr val="FFFFFF"/>
-          </a:solidFill>
-          <a:ln w="15240">
-            <a:solidFill>
-              <a:srgbClr val="DDE1E6"/>
-            </a:solidFill>
-          </a:ln>
-          <a:effectLst/>
-        </p:spPr>
-        <p:style>
-          <a:lnRef idx="1">
-            <a:schemeClr val="accent1"/>
-          </a:lnRef>
-          <a:fillRef idx="3">
-            <a:schemeClr val="accent1"/>
-          </a:fillRef>
-          <a:effectRef idx="2">
-            <a:schemeClr val="accent1"/>
-          </a:effectRef>
-          <a:fontRef idx="minor">
-            <a:schemeClr val="lt1"/>
-          </a:fontRef>
-        </p:style>
-        <p:txBody>
-          <a:bodyPr rtlCol="0" anchor="ctr"/>
-          <a:lstStyle/>
-          <a:p>
-            <a:pPr algn="ctr"/>
-          </a:p>
-        </p:txBody>
-      </p:sp>
-      <p:sp>
-        <p:nvSpPr>
-          <p:cNvPr id="22" name="Rounded Rectangle 21"/>
-          <p:cNvSpPr/>
-          <p:nvPr/>
-        </p:nvSpPr>
-        <p:spPr>
-          <a:xfrm>
-            <a:off x="7013448" y="2596896"/>
-            <a:ext cx="1298448" cy="310896"/>
-          </a:xfrm>
-          <a:prstGeom prst="roundRect">
-            <a:avLst>
-              <a:gd name="adj" fmla="val 50000"/>
-            </a:avLst>
-          </a:prstGeom>
-          <a:solidFill>
-            <a:srgbClr val="FCECEC"/>
-          </a:solidFill>
-          <a:ln>
-            <a:noFill/>
-          </a:ln>
-          <a:effectLst/>
-        </p:spPr>
-        <p:style>
-          <a:lnRef idx="1">
-            <a:schemeClr val="accent1"/>
-          </a:lnRef>
-          <a:fillRef idx="3">
-            <a:schemeClr val="accent1"/>
-          </a:fillRef>
-          <a:effectRef idx="2">
-            <a:schemeClr val="accent1"/>
-          </a:effectRef>
-          <a:fontRef idx="minor">
-            <a:schemeClr val="lt1"/>
-          </a:fontRef>
-        </p:style>
-        <p:txBody>
-          <a:bodyPr rtlCol="0" anchor="ctr"/>
-          <a:lstStyle/>
-          <a:p>
-            <a:pPr algn="ctr"/>
-          </a:p>
-        </p:txBody>
-      </p:sp>
-      <p:sp>
-        <p:nvSpPr>
-          <p:cNvPr id="23" name="TextBox 22"/>
-          <p:cNvSpPr txBox="1"/>
-          <p:nvPr/>
-        </p:nvSpPr>
-        <p:spPr>
-          <a:xfrm>
-            <a:off x="7013448" y="2596896"/>
-            <a:ext cx="1298448" cy="310896"/>
-          </a:xfrm>
-          <a:prstGeom prst="rect">
-            <a:avLst/>
-          </a:prstGeom>
-          <a:noFill/>
-        </p:spPr>
-        <p:txBody>
-          <a:bodyPr wrap="none" anchor="ctr" lIns="0" rIns="0" tIns="0" bIns="0">
-            <a:spAutoFit/>
-          </a:bodyPr>
-          <a:lstStyle/>
-          <a:p>
-            <a:pPr algn="ctr">
-              <a:lnSpc>
-                <a:spcPct val="106000"/>
-              </a:lnSpc>
-              <a:spcBef>
-                <a:spcPts val="0"/>
-              </a:spcBef>
-              <a:spcAft>
-                <a:spcPts val="0"/>
-              </a:spcAft>
-            </a:pPr>
-            <a:r>
-              <a:rPr sz="850" b="1">
-                <a:solidFill>
-                  <a:srgbClr val="B80000"/>
-                </a:solidFill>
-                <a:latin typeface="Red Hat Display"/>
-              </a:rPr>
-              <a:t>MEDIA PASS</a:t>
-            </a:r>
-          </a:p>
-        </p:txBody>
-      </p:sp>
-      <p:pic>
-        <p:nvPicPr>
-          <p:cNvPr id="24" name="Picture 23" descr="eye_slate.png"/>
-          <p:cNvPicPr>
-            <a:picLocks noChangeAspect="1"/>
-          </p:cNvPicPr>
-          <p:nvPr/>
-        </p:nvPicPr>
-        <p:blipFill>
-          <a:blip r:embed="rId4"/>
-          <a:stretch>
-            <a:fillRect/>
-          </a:stretch>
-        </p:blipFill>
-        <p:spPr>
-          <a:xfrm>
-            <a:off x="8843619" y="3108960"/>
-            <a:ext cx="475488" cy="475488"/>
-          </a:xfrm>
-          <a:prstGeom prst="rect">
-            <a:avLst/>
-          </a:prstGeom>
-        </p:spPr>
-      </p:pic>
-      <p:sp>
-        <p:nvSpPr>
-          <p:cNvPr id="25" name="TextBox 24"/>
-          <p:cNvSpPr txBox="1"/>
-          <p:nvPr/>
-        </p:nvSpPr>
-        <p:spPr>
-          <a:xfrm>
-            <a:off x="7050024" y="3721608"/>
-            <a:ext cx="4062679" cy="1481328"/>
-          </a:xfrm>
-          <a:prstGeom prst="rect">
-            <a:avLst/>
-          </a:prstGeom>
-          <a:noFill/>
-        </p:spPr>
-        <p:txBody>
-          <a:bodyPr wrap="square" anchor="t" lIns="0" rIns="0" tIns="0" bIns="0">
-            <a:spAutoFit/>
-          </a:bodyPr>
-          <a:lstStyle/>
-          <a:p>
-            <a:pPr algn="l">
-              <a:lnSpc>
-                <a:spcPct val="120000"/>
-              </a:lnSpc>
-              <a:spcBef>
-                <a:spcPts val="0"/>
-              </a:spcBef>
-              <a:spcAft>
-                <a:spcPts val="0"/>
-              </a:spcAft>
-            </a:pPr>
-            <a:r>
-              <a:rPr sz="950" b="0">
-                <a:solidFill>
-                  <a:srgbClr val="8A9099"/>
-                </a:solidFill>
-                <a:latin typeface="Red Hat Text"/>
-              </a:rPr>
-              <a:t>Concept diagram gitops-at-scale-02-sync-waves — three waves left to right, the middle one (migration Job) styled as a hook.</a:t>
             </a:r>
           </a:p>
         </p:txBody>
@@ -7613,11 +9061,11 @@
         <p:spPr>
           <a:xfrm>
             <a:off x="841248" y="2395728"/>
-            <a:ext cx="5715000" cy="530352"/>
+            <a:ext cx="5138928" cy="786384"/>
           </a:xfrm>
           <a:prstGeom prst="roundRect">
             <a:avLst>
-              <a:gd name="adj" fmla="val 6000"/>
+              <a:gd name="adj" fmla="val 7000"/>
             </a:avLst>
           </a:prstGeom>
           <a:solidFill>
@@ -7652,9 +9100,55 @@
           </a:p>
         </p:txBody>
       </p:sp>
+      <p:sp>
+        <p:nvSpPr>
+          <p:cNvPr id="7" name="Rounded Rectangle 6"/>
+          <p:cNvSpPr/>
+          <p:nvPr/>
+        </p:nvSpPr>
+        <p:spPr>
+          <a:xfrm>
+            <a:off x="987552" y="2532888"/>
+            <a:ext cx="512064" cy="512064"/>
+          </a:xfrm>
+          <a:prstGeom prst="roundRect">
+            <a:avLst>
+              <a:gd name="adj" fmla="val 26000"/>
+            </a:avLst>
+          </a:prstGeom>
+          <a:solidFill>
+            <a:srgbClr val="EE0000"/>
+          </a:solidFill>
+          <a:ln>
+            <a:noFill/>
+          </a:ln>
+          <a:effectLst/>
+        </p:spPr>
+        <p:style>
+          <a:lnRef idx="1">
+            <a:schemeClr val="accent1"/>
+          </a:lnRef>
+          <a:fillRef idx="3">
+            <a:schemeClr val="accent1"/>
+          </a:fillRef>
+          <a:effectRef idx="2">
+            <a:schemeClr val="accent1"/>
+          </a:effectRef>
+          <a:fontRef idx="minor">
+            <a:schemeClr val="lt1"/>
+          </a:fontRef>
+        </p:style>
+        <p:txBody>
+          <a:bodyPr rtlCol="0" anchor="ctr"/>
+          <a:lstStyle/>
+          <a:p>
+            <a:pPr algn="ctr"/>
+          </a:p>
+        </p:txBody>
+      </p:sp>
       <p:pic>
         <p:nvPicPr>
-          <p:cNvPr id="7" name="Picture 6" descr="check_steel.png"/>
+          <p:cNvPr id="8" name="Picture 7" descr="check_white.png"/>
           <p:cNvPicPr>
             <a:picLocks noChangeAspect="1"/>
           </p:cNvPicPr>
@@ -7668,8 +9162,8 @@
         </p:blipFill>
         <p:spPr>
           <a:xfrm>
-            <a:off x="987552" y="2542032"/>
-            <a:ext cx="237744" cy="237744"/>
+            <a:off x="1110447" y="2655783"/>
+            <a:ext cx="266273" cy="266273"/>
           </a:xfrm>
           <a:prstGeom prst="rect">
             <a:avLst/>
@@ -7678,14 +9172,14 @@
       </p:pic>
       <p:sp>
         <p:nvSpPr>
-          <p:cNvPr id="8" name="TextBox 7"/>
+          <p:cNvPr id="9" name="TextBox 8"/>
           <p:cNvSpPr txBox="1"/>
           <p:nvPr/>
         </p:nvSpPr>
         <p:spPr>
           <a:xfrm>
-            <a:off x="1353312" y="2395728"/>
-            <a:ext cx="5029200" cy="530352"/>
+            <a:off x="1627632" y="2395728"/>
+            <a:ext cx="4206240" cy="786384"/>
           </a:xfrm>
           <a:prstGeom prst="rect">
             <a:avLst/>
@@ -7710,7 +9204,7 @@
               </a:spcAft>
             </a:pPr>
             <a:r>
-              <a:rPr sz="1200" b="0">
+              <a:rPr sz="1150" b="0">
                 <a:solidFill>
                   <a:srgbClr val="1A1A1A"/>
                 </a:solidFill>
@@ -7723,18 +9217,18 @@
       </p:sp>
       <p:sp>
         <p:nvSpPr>
-          <p:cNvPr id="9" name="Rounded Rectangle 8"/>
+          <p:cNvPr id="10" name="Rounded Rectangle 9"/>
           <p:cNvSpPr/>
           <p:nvPr/>
         </p:nvSpPr>
         <p:spPr>
           <a:xfrm>
-            <a:off x="841248" y="2999232"/>
-            <a:ext cx="5715000" cy="530352"/>
+            <a:off x="6254496" y="2395728"/>
+            <a:ext cx="5138928" cy="786384"/>
           </a:xfrm>
           <a:prstGeom prst="roundRect">
             <a:avLst>
-              <a:gd name="adj" fmla="val 6000"/>
+              <a:gd name="adj" fmla="val 7000"/>
             </a:avLst>
           </a:prstGeom>
           <a:solidFill>
@@ -7769,9 +9263,55 @@
           </a:p>
         </p:txBody>
       </p:sp>
+      <p:sp>
+        <p:nvSpPr>
+          <p:cNvPr id="11" name="Rounded Rectangle 10"/>
+          <p:cNvSpPr/>
+          <p:nvPr/>
+        </p:nvSpPr>
+        <p:spPr>
+          <a:xfrm>
+            <a:off x="6400800" y="2532888"/>
+            <a:ext cx="512064" cy="512064"/>
+          </a:xfrm>
+          <a:prstGeom prst="roundRect">
+            <a:avLst>
+              <a:gd name="adj" fmla="val 26000"/>
+            </a:avLst>
+          </a:prstGeom>
+          <a:solidFill>
+            <a:srgbClr val="EE0000"/>
+          </a:solidFill>
+          <a:ln>
+            <a:noFill/>
+          </a:ln>
+          <a:effectLst/>
+        </p:spPr>
+        <p:style>
+          <a:lnRef idx="1">
+            <a:schemeClr val="accent1"/>
+          </a:lnRef>
+          <a:fillRef idx="3">
+            <a:schemeClr val="accent1"/>
+          </a:fillRef>
+          <a:effectRef idx="2">
+            <a:schemeClr val="accent1"/>
+          </a:effectRef>
+          <a:fontRef idx="minor">
+            <a:schemeClr val="lt1"/>
+          </a:fontRef>
+        </p:style>
+        <p:txBody>
+          <a:bodyPr rtlCol="0" anchor="ctr"/>
+          <a:lstStyle/>
+          <a:p>
+            <a:pPr algn="ctr"/>
+          </a:p>
+        </p:txBody>
+      </p:sp>
       <p:pic>
         <p:nvPicPr>
-          <p:cNvPr id="10" name="Picture 9" descr="check_steel.png"/>
+          <p:cNvPr id="12" name="Picture 11" descr="check_white.png"/>
           <p:cNvPicPr>
             <a:picLocks noChangeAspect="1"/>
           </p:cNvPicPr>
@@ -7785,8 +9325,8 @@
         </p:blipFill>
         <p:spPr>
           <a:xfrm>
-            <a:off x="987552" y="3145536"/>
-            <a:ext cx="237744" cy="237744"/>
+            <a:off x="6523695" y="2655783"/>
+            <a:ext cx="266273" cy="266273"/>
           </a:xfrm>
           <a:prstGeom prst="rect">
             <a:avLst/>
@@ -7795,14 +9335,14 @@
       </p:pic>
       <p:sp>
         <p:nvSpPr>
-          <p:cNvPr id="11" name="TextBox 10"/>
+          <p:cNvPr id="13" name="TextBox 12"/>
           <p:cNvSpPr txBox="1"/>
           <p:nvPr/>
         </p:nvSpPr>
         <p:spPr>
           <a:xfrm>
-            <a:off x="1353312" y="2999232"/>
-            <a:ext cx="5029200" cy="530352"/>
+            <a:off x="7040880" y="2395728"/>
+            <a:ext cx="4206240" cy="786384"/>
           </a:xfrm>
           <a:prstGeom prst="rect">
             <a:avLst/>
@@ -7827,7 +9367,7 @@
               </a:spcAft>
             </a:pPr>
             <a:r>
-              <a:rPr sz="1200" b="0">
+              <a:rPr sz="1150" b="0">
                 <a:solidFill>
                   <a:srgbClr val="1A1A1A"/>
                 </a:solidFill>
@@ -7840,18 +9380,18 @@
       </p:sp>
       <p:sp>
         <p:nvSpPr>
-          <p:cNvPr id="12" name="Rounded Rectangle 11"/>
+          <p:cNvPr id="14" name="Rounded Rectangle 13"/>
           <p:cNvSpPr/>
           <p:nvPr/>
         </p:nvSpPr>
         <p:spPr>
           <a:xfrm>
-            <a:off x="841248" y="3602736"/>
-            <a:ext cx="5715000" cy="530352"/>
+            <a:off x="841248" y="3328416"/>
+            <a:ext cx="5138928" cy="786384"/>
           </a:xfrm>
           <a:prstGeom prst="roundRect">
             <a:avLst>
-              <a:gd name="adj" fmla="val 6000"/>
+              <a:gd name="adj" fmla="val 7000"/>
             </a:avLst>
           </a:prstGeom>
           <a:solidFill>
@@ -7886,9 +9426,55 @@
           </a:p>
         </p:txBody>
       </p:sp>
+      <p:sp>
+        <p:nvSpPr>
+          <p:cNvPr id="15" name="Rounded Rectangle 14"/>
+          <p:cNvSpPr/>
+          <p:nvPr/>
+        </p:nvSpPr>
+        <p:spPr>
+          <a:xfrm>
+            <a:off x="987552" y="3465576"/>
+            <a:ext cx="512064" cy="512064"/>
+          </a:xfrm>
+          <a:prstGeom prst="roundRect">
+            <a:avLst>
+              <a:gd name="adj" fmla="val 26000"/>
+            </a:avLst>
+          </a:prstGeom>
+          <a:solidFill>
+            <a:srgbClr val="EE0000"/>
+          </a:solidFill>
+          <a:ln>
+            <a:noFill/>
+          </a:ln>
+          <a:effectLst/>
+        </p:spPr>
+        <p:style>
+          <a:lnRef idx="1">
+            <a:schemeClr val="accent1"/>
+          </a:lnRef>
+          <a:fillRef idx="3">
+            <a:schemeClr val="accent1"/>
+          </a:fillRef>
+          <a:effectRef idx="2">
+            <a:schemeClr val="accent1"/>
+          </a:effectRef>
+          <a:fontRef idx="minor">
+            <a:schemeClr val="lt1"/>
+          </a:fontRef>
+        </p:style>
+        <p:txBody>
+          <a:bodyPr rtlCol="0" anchor="ctr"/>
+          <a:lstStyle/>
+          <a:p>
+            <a:pPr algn="ctr"/>
+          </a:p>
+        </p:txBody>
+      </p:sp>
       <p:pic>
         <p:nvPicPr>
-          <p:cNvPr id="13" name="Picture 12" descr="check_steel.png"/>
+          <p:cNvPr id="16" name="Picture 15" descr="check_white.png"/>
           <p:cNvPicPr>
             <a:picLocks noChangeAspect="1"/>
           </p:cNvPicPr>
@@ -7902,8 +9488,8 @@
         </p:blipFill>
         <p:spPr>
           <a:xfrm>
-            <a:off x="987552" y="3749040"/>
-            <a:ext cx="237744" cy="237744"/>
+            <a:off x="1110447" y="3588471"/>
+            <a:ext cx="266273" cy="266273"/>
           </a:xfrm>
           <a:prstGeom prst="rect">
             <a:avLst/>
@@ -7912,14 +9498,14 @@
       </p:pic>
       <p:sp>
         <p:nvSpPr>
-          <p:cNvPr id="14" name="TextBox 13"/>
+          <p:cNvPr id="17" name="TextBox 16"/>
           <p:cNvSpPr txBox="1"/>
           <p:nvPr/>
         </p:nvSpPr>
         <p:spPr>
           <a:xfrm>
-            <a:off x="1353312" y="3602736"/>
-            <a:ext cx="5029200" cy="530352"/>
+            <a:off x="1627632" y="3328416"/>
+            <a:ext cx="4206240" cy="786384"/>
           </a:xfrm>
           <a:prstGeom prst="rect">
             <a:avLst/>
@@ -7944,7 +9530,7 @@
               </a:spcAft>
             </a:pPr>
             <a:r>
-              <a:rPr sz="1200" b="0">
+              <a:rPr sz="1150" b="0">
                 <a:solidFill>
                   <a:srgbClr val="1A1A1A"/>
                 </a:solidFill>
@@ -7957,18 +9543,18 @@
       </p:sp>
       <p:sp>
         <p:nvSpPr>
-          <p:cNvPr id="15" name="Rounded Rectangle 14"/>
+          <p:cNvPr id="18" name="Rounded Rectangle 17"/>
           <p:cNvSpPr/>
           <p:nvPr/>
         </p:nvSpPr>
         <p:spPr>
           <a:xfrm>
-            <a:off x="841248" y="4206240"/>
-            <a:ext cx="5715000" cy="530352"/>
+            <a:off x="6254496" y="3328416"/>
+            <a:ext cx="5138928" cy="786384"/>
           </a:xfrm>
           <a:prstGeom prst="roundRect">
             <a:avLst>
-              <a:gd name="adj" fmla="val 6000"/>
+              <a:gd name="adj" fmla="val 7000"/>
             </a:avLst>
           </a:prstGeom>
           <a:solidFill>
@@ -8003,9 +9589,55 @@
           </a:p>
         </p:txBody>
       </p:sp>
+      <p:sp>
+        <p:nvSpPr>
+          <p:cNvPr id="19" name="Rounded Rectangle 18"/>
+          <p:cNvSpPr/>
+          <p:nvPr/>
+        </p:nvSpPr>
+        <p:spPr>
+          <a:xfrm>
+            <a:off x="6400800" y="3465576"/>
+            <a:ext cx="512064" cy="512064"/>
+          </a:xfrm>
+          <a:prstGeom prst="roundRect">
+            <a:avLst>
+              <a:gd name="adj" fmla="val 26000"/>
+            </a:avLst>
+          </a:prstGeom>
+          <a:solidFill>
+            <a:srgbClr val="EE0000"/>
+          </a:solidFill>
+          <a:ln>
+            <a:noFill/>
+          </a:ln>
+          <a:effectLst/>
+        </p:spPr>
+        <p:style>
+          <a:lnRef idx="1">
+            <a:schemeClr val="accent1"/>
+          </a:lnRef>
+          <a:fillRef idx="3">
+            <a:schemeClr val="accent1"/>
+          </a:fillRef>
+          <a:effectRef idx="2">
+            <a:schemeClr val="accent1"/>
+          </a:effectRef>
+          <a:fontRef idx="minor">
+            <a:schemeClr val="lt1"/>
+          </a:fontRef>
+        </p:style>
+        <p:txBody>
+          <a:bodyPr rtlCol="0" anchor="ctr"/>
+          <a:lstStyle/>
+          <a:p>
+            <a:pPr algn="ctr"/>
+          </a:p>
+        </p:txBody>
+      </p:sp>
       <p:pic>
         <p:nvPicPr>
-          <p:cNvPr id="16" name="Picture 15" descr="check_steel.png"/>
+          <p:cNvPr id="20" name="Picture 19" descr="check_white.png"/>
           <p:cNvPicPr>
             <a:picLocks noChangeAspect="1"/>
           </p:cNvPicPr>
@@ -8019,8 +9651,8 @@
         </p:blipFill>
         <p:spPr>
           <a:xfrm>
-            <a:off x="987552" y="4352544"/>
-            <a:ext cx="237744" cy="237744"/>
+            <a:off x="6523695" y="3588471"/>
+            <a:ext cx="266273" cy="266273"/>
           </a:xfrm>
           <a:prstGeom prst="rect">
             <a:avLst/>
@@ -8029,14 +9661,14 @@
       </p:pic>
       <p:sp>
         <p:nvSpPr>
-          <p:cNvPr id="17" name="TextBox 16"/>
+          <p:cNvPr id="21" name="TextBox 20"/>
           <p:cNvSpPr txBox="1"/>
           <p:nvPr/>
         </p:nvSpPr>
         <p:spPr>
           <a:xfrm>
-            <a:off x="1353312" y="4206240"/>
-            <a:ext cx="5029200" cy="530352"/>
+            <a:off x="7040880" y="3328416"/>
+            <a:ext cx="4206240" cy="786384"/>
           </a:xfrm>
           <a:prstGeom prst="rect">
             <a:avLst/>
@@ -8061,7 +9693,7 @@
               </a:spcAft>
             </a:pPr>
             <a:r>
-              <a:rPr sz="1200" b="0">
+              <a:rPr sz="1150" b="0">
                 <a:solidFill>
                   <a:srgbClr val="1A1A1A"/>
                 </a:solidFill>
@@ -8074,18 +9706,18 @@
       </p:sp>
       <p:sp>
         <p:nvSpPr>
-          <p:cNvPr id="18" name="Rounded Rectangle 17"/>
+          <p:cNvPr id="22" name="Rounded Rectangle 21"/>
           <p:cNvSpPr/>
           <p:nvPr/>
         </p:nvSpPr>
         <p:spPr>
           <a:xfrm>
-            <a:off x="841248" y="4809744"/>
-            <a:ext cx="5715000" cy="530352"/>
+            <a:off x="841248" y="4261104"/>
+            <a:ext cx="5138928" cy="786384"/>
           </a:xfrm>
           <a:prstGeom prst="roundRect">
             <a:avLst>
-              <a:gd name="adj" fmla="val 6000"/>
+              <a:gd name="adj" fmla="val 7000"/>
             </a:avLst>
           </a:prstGeom>
           <a:solidFill>
@@ -8120,9 +9752,55 @@
           </a:p>
         </p:txBody>
       </p:sp>
+      <p:sp>
+        <p:nvSpPr>
+          <p:cNvPr id="23" name="Rounded Rectangle 22"/>
+          <p:cNvSpPr/>
+          <p:nvPr/>
+        </p:nvSpPr>
+        <p:spPr>
+          <a:xfrm>
+            <a:off x="987552" y="4398264"/>
+            <a:ext cx="512064" cy="512064"/>
+          </a:xfrm>
+          <a:prstGeom prst="roundRect">
+            <a:avLst>
+              <a:gd name="adj" fmla="val 26000"/>
+            </a:avLst>
+          </a:prstGeom>
+          <a:solidFill>
+            <a:srgbClr val="EE0000"/>
+          </a:solidFill>
+          <a:ln>
+            <a:noFill/>
+          </a:ln>
+          <a:effectLst/>
+        </p:spPr>
+        <p:style>
+          <a:lnRef idx="1">
+            <a:schemeClr val="accent1"/>
+          </a:lnRef>
+          <a:fillRef idx="3">
+            <a:schemeClr val="accent1"/>
+          </a:fillRef>
+          <a:effectRef idx="2">
+            <a:schemeClr val="accent1"/>
+          </a:effectRef>
+          <a:fontRef idx="minor">
+            <a:schemeClr val="lt1"/>
+          </a:fontRef>
+        </p:style>
+        <p:txBody>
+          <a:bodyPr rtlCol="0" anchor="ctr"/>
+          <a:lstStyle/>
+          <a:p>
+            <a:pPr algn="ctr"/>
+          </a:p>
+        </p:txBody>
+      </p:sp>
       <p:pic>
         <p:nvPicPr>
-          <p:cNvPr id="19" name="Picture 18" descr="check_steel.png"/>
+          <p:cNvPr id="24" name="Picture 23" descr="check_white.png"/>
           <p:cNvPicPr>
             <a:picLocks noChangeAspect="1"/>
           </p:cNvPicPr>
@@ -8136,8 +9814,8 @@
         </p:blipFill>
         <p:spPr>
           <a:xfrm>
-            <a:off x="987552" y="4956048"/>
-            <a:ext cx="237744" cy="237744"/>
+            <a:off x="1110447" y="4521159"/>
+            <a:ext cx="266273" cy="266273"/>
           </a:xfrm>
           <a:prstGeom prst="rect">
             <a:avLst/>
@@ -8146,14 +9824,14 @@
       </p:pic>
       <p:sp>
         <p:nvSpPr>
-          <p:cNvPr id="20" name="TextBox 19"/>
+          <p:cNvPr id="25" name="TextBox 24"/>
           <p:cNvSpPr txBox="1"/>
           <p:nvPr/>
         </p:nvSpPr>
         <p:spPr>
           <a:xfrm>
-            <a:off x="1353312" y="4809744"/>
-            <a:ext cx="5029200" cy="530352"/>
+            <a:off x="1627632" y="4261104"/>
+            <a:ext cx="4206240" cy="786384"/>
           </a:xfrm>
           <a:prstGeom prst="rect">
             <a:avLst/>
@@ -8178,221 +9856,13 @@
               </a:spcAft>
             </a:pPr>
             <a:r>
-              <a:rPr sz="1200" b="0">
+              <a:rPr sz="1150" b="0">
                 <a:solidFill>
                   <a:srgbClr val="1A1A1A"/>
                 </a:solidFill>
                 <a:latin typeface="Red Hat Text"/>
               </a:rPr>
               <a:t>Pod-ratio here; request-% needs a traffic router</a:t>
-            </a:r>
-          </a:p>
-        </p:txBody>
-      </p:sp>
-      <p:sp>
-        <p:nvSpPr>
-          <p:cNvPr id="21" name="Rounded Rectangle 20"/>
-          <p:cNvSpPr/>
-          <p:nvPr/>
-        </p:nvSpPr>
-        <p:spPr>
-          <a:xfrm>
-            <a:off x="6812280" y="2395728"/>
-            <a:ext cx="4538167" cy="2944368"/>
-          </a:xfrm>
-          <a:prstGeom prst="roundRect">
-            <a:avLst>
-              <a:gd name="adj" fmla="val 4000"/>
-            </a:avLst>
-          </a:prstGeom>
-          <a:solidFill>
-            <a:srgbClr val="FFFFFF"/>
-          </a:solidFill>
-          <a:ln w="15240">
-            <a:solidFill>
-              <a:srgbClr val="DDE1E6"/>
-            </a:solidFill>
-          </a:ln>
-          <a:effectLst/>
-        </p:spPr>
-        <p:style>
-          <a:lnRef idx="1">
-            <a:schemeClr val="accent1"/>
-          </a:lnRef>
-          <a:fillRef idx="3">
-            <a:schemeClr val="accent1"/>
-          </a:fillRef>
-          <a:effectRef idx="2">
-            <a:schemeClr val="accent1"/>
-          </a:effectRef>
-          <a:fontRef idx="minor">
-            <a:schemeClr val="lt1"/>
-          </a:fontRef>
-        </p:style>
-        <p:txBody>
-          <a:bodyPr rtlCol="0" anchor="ctr"/>
-          <a:lstStyle/>
-          <a:p>
-            <a:pPr algn="ctr"/>
-          </a:p>
-        </p:txBody>
-      </p:sp>
-      <p:sp>
-        <p:nvSpPr>
-          <p:cNvPr id="22" name="Rounded Rectangle 21"/>
-          <p:cNvSpPr/>
-          <p:nvPr/>
-        </p:nvSpPr>
-        <p:spPr>
-          <a:xfrm>
-            <a:off x="7013448" y="2596896"/>
-            <a:ext cx="1298448" cy="310896"/>
-          </a:xfrm>
-          <a:prstGeom prst="roundRect">
-            <a:avLst>
-              <a:gd name="adj" fmla="val 50000"/>
-            </a:avLst>
-          </a:prstGeom>
-          <a:solidFill>
-            <a:srgbClr val="FCECEC"/>
-          </a:solidFill>
-          <a:ln>
-            <a:noFill/>
-          </a:ln>
-          <a:effectLst/>
-        </p:spPr>
-        <p:style>
-          <a:lnRef idx="1">
-            <a:schemeClr val="accent1"/>
-          </a:lnRef>
-          <a:fillRef idx="3">
-            <a:schemeClr val="accent1"/>
-          </a:fillRef>
-          <a:effectRef idx="2">
-            <a:schemeClr val="accent1"/>
-          </a:effectRef>
-          <a:fontRef idx="minor">
-            <a:schemeClr val="lt1"/>
-          </a:fontRef>
-        </p:style>
-        <p:txBody>
-          <a:bodyPr rtlCol="0" anchor="ctr"/>
-          <a:lstStyle/>
-          <a:p>
-            <a:pPr algn="ctr"/>
-          </a:p>
-        </p:txBody>
-      </p:sp>
-      <p:sp>
-        <p:nvSpPr>
-          <p:cNvPr id="23" name="TextBox 22"/>
-          <p:cNvSpPr txBox="1"/>
-          <p:nvPr/>
-        </p:nvSpPr>
-        <p:spPr>
-          <a:xfrm>
-            <a:off x="7013448" y="2596896"/>
-            <a:ext cx="1298448" cy="310896"/>
-          </a:xfrm>
-          <a:prstGeom prst="rect">
-            <a:avLst/>
-          </a:prstGeom>
-          <a:noFill/>
-        </p:spPr>
-        <p:txBody>
-          <a:bodyPr wrap="none" anchor="ctr" lIns="0" rIns="0" tIns="0" bIns="0">
-            <a:spAutoFit/>
-          </a:bodyPr>
-          <a:lstStyle/>
-          <a:p>
-            <a:pPr algn="ctr">
-              <a:lnSpc>
-                <a:spcPct val="106000"/>
-              </a:lnSpc>
-              <a:spcBef>
-                <a:spcPts val="0"/>
-              </a:spcBef>
-              <a:spcAft>
-                <a:spcPts val="0"/>
-              </a:spcAft>
-            </a:pPr>
-            <a:r>
-              <a:rPr sz="850" b="1">
-                <a:solidFill>
-                  <a:srgbClr val="B80000"/>
-                </a:solidFill>
-                <a:latin typeface="Red Hat Display"/>
-              </a:rPr>
-              <a:t>MEDIA PASS</a:t>
-            </a:r>
-          </a:p>
-        </p:txBody>
-      </p:sp>
-      <p:pic>
-        <p:nvPicPr>
-          <p:cNvPr id="24" name="Picture 23" descr="eye_slate.png"/>
-          <p:cNvPicPr>
-            <a:picLocks noChangeAspect="1"/>
-          </p:cNvPicPr>
-          <p:nvPr/>
-        </p:nvPicPr>
-        <p:blipFill>
-          <a:blip r:embed="rId4"/>
-          <a:stretch>
-            <a:fillRect/>
-          </a:stretch>
-        </p:blipFill>
-        <p:spPr>
-          <a:xfrm>
-            <a:off x="8843619" y="3108960"/>
-            <a:ext cx="475488" cy="475488"/>
-          </a:xfrm>
-          <a:prstGeom prst="rect">
-            <a:avLst/>
-          </a:prstGeom>
-        </p:spPr>
-      </p:pic>
-      <p:sp>
-        <p:nvSpPr>
-          <p:cNvPr id="25" name="TextBox 24"/>
-          <p:cNvSpPr txBox="1"/>
-          <p:nvPr/>
-        </p:nvSpPr>
-        <p:spPr>
-          <a:xfrm>
-            <a:off x="7050024" y="3721608"/>
-            <a:ext cx="4062679" cy="1481328"/>
-          </a:xfrm>
-          <a:prstGeom prst="rect">
-            <a:avLst/>
-          </a:prstGeom>
-          <a:noFill/>
-        </p:spPr>
-        <p:txBody>
-          <a:bodyPr wrap="square" anchor="t" lIns="0" rIns="0" tIns="0" bIns="0">
-            <a:spAutoFit/>
-          </a:bodyPr>
-          <a:lstStyle/>
-          <a:p>
-            <a:pPr algn="l">
-              <a:lnSpc>
-                <a:spcPct val="120000"/>
-              </a:lnSpc>
-              <a:spcBef>
-                <a:spcPts val="0"/>
-              </a:spcBef>
-              <a:spcAft>
-                <a:spcPts val="0"/>
-              </a:spcAft>
-            </a:pPr>
-            <a:r>
-              <a:rPr sz="950" b="0">
-                <a:solidFill>
-                  <a:srgbClr val="8A9099"/>
-                </a:solidFill>
-                <a:latin typeface="Red Hat Text"/>
-              </a:rPr>
-              <a:t>Concept diagram gitops-at-scale-03-canary-analysis — the canary flow with the analysis diamond forking to pass (100%) and fail (rollback).</a:t>
             </a:r>
           </a:p>
         </p:txBody>
@@ -8700,11 +10170,11 @@
         <p:spPr>
           <a:xfrm>
             <a:off x="841248" y="2395728"/>
-            <a:ext cx="5715000" cy="530352"/>
+            <a:ext cx="5138928" cy="786384"/>
           </a:xfrm>
           <a:prstGeom prst="roundRect">
             <a:avLst>
-              <a:gd name="adj" fmla="val 6000"/>
+              <a:gd name="adj" fmla="val 7000"/>
             </a:avLst>
           </a:prstGeom>
           <a:solidFill>
@@ -8739,9 +10209,55 @@
           </a:p>
         </p:txBody>
       </p:sp>
+      <p:sp>
+        <p:nvSpPr>
+          <p:cNvPr id="7" name="Rounded Rectangle 6"/>
+          <p:cNvSpPr/>
+          <p:nvPr/>
+        </p:nvSpPr>
+        <p:spPr>
+          <a:xfrm>
+            <a:off x="987552" y="2532888"/>
+            <a:ext cx="512064" cy="512064"/>
+          </a:xfrm>
+          <a:prstGeom prst="roundRect">
+            <a:avLst>
+              <a:gd name="adj" fmla="val 26000"/>
+            </a:avLst>
+          </a:prstGeom>
+          <a:solidFill>
+            <a:srgbClr val="EE0000"/>
+          </a:solidFill>
+          <a:ln>
+            <a:noFill/>
+          </a:ln>
+          <a:effectLst/>
+        </p:spPr>
+        <p:style>
+          <a:lnRef idx="1">
+            <a:schemeClr val="accent1"/>
+          </a:lnRef>
+          <a:fillRef idx="3">
+            <a:schemeClr val="accent1"/>
+          </a:fillRef>
+          <a:effectRef idx="2">
+            <a:schemeClr val="accent1"/>
+          </a:effectRef>
+          <a:fontRef idx="minor">
+            <a:schemeClr val="lt1"/>
+          </a:fontRef>
+        </p:style>
+        <p:txBody>
+          <a:bodyPr rtlCol="0" anchor="ctr"/>
+          <a:lstStyle/>
+          <a:p>
+            <a:pPr algn="ctr"/>
+          </a:p>
+        </p:txBody>
+      </p:sp>
       <p:pic>
         <p:nvPicPr>
-          <p:cNvPr id="7" name="Picture 6" descr="check_steel.png"/>
+          <p:cNvPr id="8" name="Picture 7" descr="check_white.png"/>
           <p:cNvPicPr>
             <a:picLocks noChangeAspect="1"/>
           </p:cNvPicPr>
@@ -8755,8 +10271,8 @@
         </p:blipFill>
         <p:spPr>
           <a:xfrm>
-            <a:off x="987552" y="2542032"/>
-            <a:ext cx="237744" cy="237744"/>
+            <a:off x="1110447" y="2655783"/>
+            <a:ext cx="266273" cy="266273"/>
           </a:xfrm>
           <a:prstGeom prst="rect">
             <a:avLst/>
@@ -8765,14 +10281,14 @@
       </p:pic>
       <p:sp>
         <p:nvSpPr>
-          <p:cNvPr id="8" name="TextBox 7"/>
+          <p:cNvPr id="9" name="TextBox 8"/>
           <p:cNvSpPr txBox="1"/>
           <p:nvPr/>
         </p:nvSpPr>
         <p:spPr>
           <a:xfrm>
-            <a:off x="1353312" y="2395728"/>
-            <a:ext cx="5029200" cy="530352"/>
+            <a:off x="1627632" y="2395728"/>
+            <a:ext cx="4206240" cy="786384"/>
           </a:xfrm>
           <a:prstGeom prst="rect">
             <a:avLst/>
@@ -8797,7 +10313,7 @@
               </a:spcAft>
             </a:pPr>
             <a:r>
-              <a:rPr sz="1200" b="0">
+              <a:rPr sz="1150" b="0">
                 <a:solidFill>
                   <a:srgbClr val="1A1A1A"/>
                 </a:solidFill>
@@ -8810,18 +10326,18 @@
       </p:sp>
       <p:sp>
         <p:nvSpPr>
-          <p:cNvPr id="9" name="Rounded Rectangle 8"/>
+          <p:cNvPr id="10" name="Rounded Rectangle 9"/>
           <p:cNvSpPr/>
           <p:nvPr/>
         </p:nvSpPr>
         <p:spPr>
           <a:xfrm>
-            <a:off x="841248" y="2999232"/>
-            <a:ext cx="5715000" cy="530352"/>
+            <a:off x="6254496" y="2395728"/>
+            <a:ext cx="5138928" cy="786384"/>
           </a:xfrm>
           <a:prstGeom prst="roundRect">
             <a:avLst>
-              <a:gd name="adj" fmla="val 6000"/>
+              <a:gd name="adj" fmla="val 7000"/>
             </a:avLst>
           </a:prstGeom>
           <a:solidFill>
@@ -8856,9 +10372,55 @@
           </a:p>
         </p:txBody>
       </p:sp>
+      <p:sp>
+        <p:nvSpPr>
+          <p:cNvPr id="11" name="Rounded Rectangle 10"/>
+          <p:cNvSpPr/>
+          <p:nvPr/>
+        </p:nvSpPr>
+        <p:spPr>
+          <a:xfrm>
+            <a:off x="6400800" y="2532888"/>
+            <a:ext cx="512064" cy="512064"/>
+          </a:xfrm>
+          <a:prstGeom prst="roundRect">
+            <a:avLst>
+              <a:gd name="adj" fmla="val 26000"/>
+            </a:avLst>
+          </a:prstGeom>
+          <a:solidFill>
+            <a:srgbClr val="EE0000"/>
+          </a:solidFill>
+          <a:ln>
+            <a:noFill/>
+          </a:ln>
+          <a:effectLst/>
+        </p:spPr>
+        <p:style>
+          <a:lnRef idx="1">
+            <a:schemeClr val="accent1"/>
+          </a:lnRef>
+          <a:fillRef idx="3">
+            <a:schemeClr val="accent1"/>
+          </a:fillRef>
+          <a:effectRef idx="2">
+            <a:schemeClr val="accent1"/>
+          </a:effectRef>
+          <a:fontRef idx="minor">
+            <a:schemeClr val="lt1"/>
+          </a:fontRef>
+        </p:style>
+        <p:txBody>
+          <a:bodyPr rtlCol="0" anchor="ctr"/>
+          <a:lstStyle/>
+          <a:p>
+            <a:pPr algn="ctr"/>
+          </a:p>
+        </p:txBody>
+      </p:sp>
       <p:pic>
         <p:nvPicPr>
-          <p:cNvPr id="10" name="Picture 9" descr="check_steel.png"/>
+          <p:cNvPr id="12" name="Picture 11" descr="check_white.png"/>
           <p:cNvPicPr>
             <a:picLocks noChangeAspect="1"/>
           </p:cNvPicPr>
@@ -8872,8 +10434,8 @@
         </p:blipFill>
         <p:spPr>
           <a:xfrm>
-            <a:off x="987552" y="3145536"/>
-            <a:ext cx="237744" cy="237744"/>
+            <a:off x="6523695" y="2655783"/>
+            <a:ext cx="266273" cy="266273"/>
           </a:xfrm>
           <a:prstGeom prst="rect">
             <a:avLst/>
@@ -8882,14 +10444,14 @@
       </p:pic>
       <p:sp>
         <p:nvSpPr>
-          <p:cNvPr id="11" name="TextBox 10"/>
+          <p:cNvPr id="13" name="TextBox 12"/>
           <p:cNvSpPr txBox="1"/>
           <p:nvPr/>
         </p:nvSpPr>
         <p:spPr>
           <a:xfrm>
-            <a:off x="1353312" y="2999232"/>
-            <a:ext cx="5029200" cy="530352"/>
+            <a:off x="7040880" y="2395728"/>
+            <a:ext cx="4206240" cy="786384"/>
           </a:xfrm>
           <a:prstGeom prst="rect">
             <a:avLst/>
@@ -8914,7 +10476,7 @@
               </a:spcAft>
             </a:pPr>
             <a:r>
-              <a:rPr sz="1200" b="0">
+              <a:rPr sz="1150" b="0">
                 <a:solidFill>
                   <a:srgbClr val="1A1A1A"/>
                 </a:solidFill>
@@ -8927,18 +10489,18 @@
       </p:sp>
       <p:sp>
         <p:nvSpPr>
-          <p:cNvPr id="12" name="Rounded Rectangle 11"/>
+          <p:cNvPr id="14" name="Rounded Rectangle 13"/>
           <p:cNvSpPr/>
           <p:nvPr/>
         </p:nvSpPr>
         <p:spPr>
           <a:xfrm>
-            <a:off x="841248" y="3602736"/>
-            <a:ext cx="5715000" cy="530352"/>
+            <a:off x="841248" y="3328416"/>
+            <a:ext cx="5138928" cy="786384"/>
           </a:xfrm>
           <a:prstGeom prst="roundRect">
             <a:avLst>
-              <a:gd name="adj" fmla="val 6000"/>
+              <a:gd name="adj" fmla="val 7000"/>
             </a:avLst>
           </a:prstGeom>
           <a:solidFill>
@@ -8973,9 +10535,55 @@
           </a:p>
         </p:txBody>
       </p:sp>
+      <p:sp>
+        <p:nvSpPr>
+          <p:cNvPr id="15" name="Rounded Rectangle 14"/>
+          <p:cNvSpPr/>
+          <p:nvPr/>
+        </p:nvSpPr>
+        <p:spPr>
+          <a:xfrm>
+            <a:off x="987552" y="3465576"/>
+            <a:ext cx="512064" cy="512064"/>
+          </a:xfrm>
+          <a:prstGeom prst="roundRect">
+            <a:avLst>
+              <a:gd name="adj" fmla="val 26000"/>
+            </a:avLst>
+          </a:prstGeom>
+          <a:solidFill>
+            <a:srgbClr val="EE0000"/>
+          </a:solidFill>
+          <a:ln>
+            <a:noFill/>
+          </a:ln>
+          <a:effectLst/>
+        </p:spPr>
+        <p:style>
+          <a:lnRef idx="1">
+            <a:schemeClr val="accent1"/>
+          </a:lnRef>
+          <a:fillRef idx="3">
+            <a:schemeClr val="accent1"/>
+          </a:fillRef>
+          <a:effectRef idx="2">
+            <a:schemeClr val="accent1"/>
+          </a:effectRef>
+          <a:fontRef idx="minor">
+            <a:schemeClr val="lt1"/>
+          </a:fontRef>
+        </p:style>
+        <p:txBody>
+          <a:bodyPr rtlCol="0" anchor="ctr"/>
+          <a:lstStyle/>
+          <a:p>
+            <a:pPr algn="ctr"/>
+          </a:p>
+        </p:txBody>
+      </p:sp>
       <p:pic>
         <p:nvPicPr>
-          <p:cNvPr id="13" name="Picture 12" descr="check_steel.png"/>
+          <p:cNvPr id="16" name="Picture 15" descr="check_white.png"/>
           <p:cNvPicPr>
             <a:picLocks noChangeAspect="1"/>
           </p:cNvPicPr>
@@ -8989,8 +10597,8 @@
         </p:blipFill>
         <p:spPr>
           <a:xfrm>
-            <a:off x="987552" y="3749040"/>
-            <a:ext cx="237744" cy="237744"/>
+            <a:off x="1110447" y="3588471"/>
+            <a:ext cx="266273" cy="266273"/>
           </a:xfrm>
           <a:prstGeom prst="rect">
             <a:avLst/>
@@ -8999,14 +10607,14 @@
       </p:pic>
       <p:sp>
         <p:nvSpPr>
-          <p:cNvPr id="14" name="TextBox 13"/>
+          <p:cNvPr id="17" name="TextBox 16"/>
           <p:cNvSpPr txBox="1"/>
           <p:nvPr/>
         </p:nvSpPr>
         <p:spPr>
           <a:xfrm>
-            <a:off x="1353312" y="3602736"/>
-            <a:ext cx="5029200" cy="530352"/>
+            <a:off x="1627632" y="3328416"/>
+            <a:ext cx="4206240" cy="786384"/>
           </a:xfrm>
           <a:prstGeom prst="rect">
             <a:avLst/>
@@ -9031,7 +10639,7 @@
               </a:spcAft>
             </a:pPr>
             <a:r>
-              <a:rPr sz="1200" b="0">
+              <a:rPr sz="1150" b="0">
                 <a:solidFill>
                   <a:srgbClr val="1A1A1A"/>
                 </a:solidFill>
@@ -9044,18 +10652,18 @@
       </p:sp>
       <p:sp>
         <p:nvSpPr>
-          <p:cNvPr id="15" name="Rounded Rectangle 14"/>
+          <p:cNvPr id="18" name="Rounded Rectangle 17"/>
           <p:cNvSpPr/>
           <p:nvPr/>
         </p:nvSpPr>
         <p:spPr>
           <a:xfrm>
-            <a:off x="841248" y="4206240"/>
-            <a:ext cx="5715000" cy="530352"/>
+            <a:off x="6254496" y="3328416"/>
+            <a:ext cx="5138928" cy="786384"/>
           </a:xfrm>
           <a:prstGeom prst="roundRect">
             <a:avLst>
-              <a:gd name="adj" fmla="val 6000"/>
+              <a:gd name="adj" fmla="val 7000"/>
             </a:avLst>
           </a:prstGeom>
           <a:solidFill>
@@ -9090,9 +10698,55 @@
           </a:p>
         </p:txBody>
       </p:sp>
+      <p:sp>
+        <p:nvSpPr>
+          <p:cNvPr id="19" name="Rounded Rectangle 18"/>
+          <p:cNvSpPr/>
+          <p:nvPr/>
+        </p:nvSpPr>
+        <p:spPr>
+          <a:xfrm>
+            <a:off x="6400800" y="3465576"/>
+            <a:ext cx="512064" cy="512064"/>
+          </a:xfrm>
+          <a:prstGeom prst="roundRect">
+            <a:avLst>
+              <a:gd name="adj" fmla="val 26000"/>
+            </a:avLst>
+          </a:prstGeom>
+          <a:solidFill>
+            <a:srgbClr val="EE0000"/>
+          </a:solidFill>
+          <a:ln>
+            <a:noFill/>
+          </a:ln>
+          <a:effectLst/>
+        </p:spPr>
+        <p:style>
+          <a:lnRef idx="1">
+            <a:schemeClr val="accent1"/>
+          </a:lnRef>
+          <a:fillRef idx="3">
+            <a:schemeClr val="accent1"/>
+          </a:fillRef>
+          <a:effectRef idx="2">
+            <a:schemeClr val="accent1"/>
+          </a:effectRef>
+          <a:fontRef idx="minor">
+            <a:schemeClr val="lt1"/>
+          </a:fontRef>
+        </p:style>
+        <p:txBody>
+          <a:bodyPr rtlCol="0" anchor="ctr"/>
+          <a:lstStyle/>
+          <a:p>
+            <a:pPr algn="ctr"/>
+          </a:p>
+        </p:txBody>
+      </p:sp>
       <p:pic>
         <p:nvPicPr>
-          <p:cNvPr id="16" name="Picture 15" descr="check_steel.png"/>
+          <p:cNvPr id="20" name="Picture 19" descr="check_white.png"/>
           <p:cNvPicPr>
             <a:picLocks noChangeAspect="1"/>
           </p:cNvPicPr>
@@ -9106,8 +10760,8 @@
         </p:blipFill>
         <p:spPr>
           <a:xfrm>
-            <a:off x="987552" y="4352544"/>
-            <a:ext cx="237744" cy="237744"/>
+            <a:off x="6523695" y="3588471"/>
+            <a:ext cx="266273" cy="266273"/>
           </a:xfrm>
           <a:prstGeom prst="rect">
             <a:avLst/>
@@ -9116,14 +10770,14 @@
       </p:pic>
       <p:sp>
         <p:nvSpPr>
-          <p:cNvPr id="17" name="TextBox 16"/>
+          <p:cNvPr id="21" name="TextBox 20"/>
           <p:cNvSpPr txBox="1"/>
           <p:nvPr/>
         </p:nvSpPr>
         <p:spPr>
           <a:xfrm>
-            <a:off x="1353312" y="4206240"/>
-            <a:ext cx="5029200" cy="530352"/>
+            <a:off x="7040880" y="3328416"/>
+            <a:ext cx="4206240" cy="786384"/>
           </a:xfrm>
           <a:prstGeom prst="rect">
             <a:avLst/>
@@ -9148,7 +10802,7 @@
               </a:spcAft>
             </a:pPr>
             <a:r>
-              <a:rPr sz="1200" b="0">
+              <a:rPr sz="1150" b="0">
                 <a:solidFill>
                   <a:srgbClr val="1A1A1A"/>
                 </a:solidFill>
@@ -9161,18 +10815,18 @@
       </p:sp>
       <p:sp>
         <p:nvSpPr>
-          <p:cNvPr id="18" name="Rounded Rectangle 17"/>
+          <p:cNvPr id="22" name="Rounded Rectangle 21"/>
           <p:cNvSpPr/>
           <p:nvPr/>
         </p:nvSpPr>
         <p:spPr>
           <a:xfrm>
-            <a:off x="841248" y="4809744"/>
-            <a:ext cx="5715000" cy="530352"/>
+            <a:off x="841248" y="4261104"/>
+            <a:ext cx="5138928" cy="786384"/>
           </a:xfrm>
           <a:prstGeom prst="roundRect">
             <a:avLst>
-              <a:gd name="adj" fmla="val 6000"/>
+              <a:gd name="adj" fmla="val 7000"/>
             </a:avLst>
           </a:prstGeom>
           <a:solidFill>
@@ -9207,9 +10861,55 @@
           </a:p>
         </p:txBody>
       </p:sp>
+      <p:sp>
+        <p:nvSpPr>
+          <p:cNvPr id="23" name="Rounded Rectangle 22"/>
+          <p:cNvSpPr/>
+          <p:nvPr/>
+        </p:nvSpPr>
+        <p:spPr>
+          <a:xfrm>
+            <a:off x="987552" y="4398264"/>
+            <a:ext cx="512064" cy="512064"/>
+          </a:xfrm>
+          <a:prstGeom prst="roundRect">
+            <a:avLst>
+              <a:gd name="adj" fmla="val 26000"/>
+            </a:avLst>
+          </a:prstGeom>
+          <a:solidFill>
+            <a:srgbClr val="EE0000"/>
+          </a:solidFill>
+          <a:ln>
+            <a:noFill/>
+          </a:ln>
+          <a:effectLst/>
+        </p:spPr>
+        <p:style>
+          <a:lnRef idx="1">
+            <a:schemeClr val="accent1"/>
+          </a:lnRef>
+          <a:fillRef idx="3">
+            <a:schemeClr val="accent1"/>
+          </a:fillRef>
+          <a:effectRef idx="2">
+            <a:schemeClr val="accent1"/>
+          </a:effectRef>
+          <a:fontRef idx="minor">
+            <a:schemeClr val="lt1"/>
+          </a:fontRef>
+        </p:style>
+        <p:txBody>
+          <a:bodyPr rtlCol="0" anchor="ctr"/>
+          <a:lstStyle/>
+          <a:p>
+            <a:pPr algn="ctr"/>
+          </a:p>
+        </p:txBody>
+      </p:sp>
       <p:pic>
         <p:nvPicPr>
-          <p:cNvPr id="19" name="Picture 18" descr="check_steel.png"/>
+          <p:cNvPr id="24" name="Picture 23" descr="check_white.png"/>
           <p:cNvPicPr>
             <a:picLocks noChangeAspect="1"/>
           </p:cNvPicPr>
@@ -9223,8 +10923,8 @@
         </p:blipFill>
         <p:spPr>
           <a:xfrm>
-            <a:off x="987552" y="4956048"/>
-            <a:ext cx="237744" cy="237744"/>
+            <a:off x="1110447" y="4521159"/>
+            <a:ext cx="266273" cy="266273"/>
           </a:xfrm>
           <a:prstGeom prst="rect">
             <a:avLst/>
@@ -9233,14 +10933,14 @@
       </p:pic>
       <p:sp>
         <p:nvSpPr>
-          <p:cNvPr id="20" name="TextBox 19"/>
+          <p:cNvPr id="25" name="TextBox 24"/>
           <p:cNvSpPr txBox="1"/>
           <p:nvPr/>
         </p:nvSpPr>
         <p:spPr>
           <a:xfrm>
-            <a:off x="1353312" y="4809744"/>
-            <a:ext cx="5029200" cy="530352"/>
+            <a:off x="1627632" y="4261104"/>
+            <a:ext cx="4206240" cy="786384"/>
           </a:xfrm>
           <a:prstGeom prst="rect">
             <a:avLst/>
@@ -9265,221 +10965,13 @@
               </a:spcAft>
             </a:pPr>
             <a:r>
-              <a:rPr sz="1200" b="0">
+              <a:rPr sz="1150" b="0">
                 <a:solidFill>
                   <a:srgbClr val="1A1A1A"/>
                 </a:solidFill>
                 <a:latin typeface="Red Hat Text"/>
               </a:rPr>
               <a:t>Read the AnalysisRun like an incident</a:t>
-            </a:r>
-          </a:p>
-        </p:txBody>
-      </p:sp>
-      <p:sp>
-        <p:nvSpPr>
-          <p:cNvPr id="21" name="Rounded Rectangle 20"/>
-          <p:cNvSpPr/>
-          <p:nvPr/>
-        </p:nvSpPr>
-        <p:spPr>
-          <a:xfrm>
-            <a:off x="6812280" y="2395728"/>
-            <a:ext cx="4538167" cy="2944368"/>
-          </a:xfrm>
-          <a:prstGeom prst="roundRect">
-            <a:avLst>
-              <a:gd name="adj" fmla="val 4000"/>
-            </a:avLst>
-          </a:prstGeom>
-          <a:solidFill>
-            <a:srgbClr val="FFFFFF"/>
-          </a:solidFill>
-          <a:ln w="15240">
-            <a:solidFill>
-              <a:srgbClr val="DDE1E6"/>
-            </a:solidFill>
-          </a:ln>
-          <a:effectLst/>
-        </p:spPr>
-        <p:style>
-          <a:lnRef idx="1">
-            <a:schemeClr val="accent1"/>
-          </a:lnRef>
-          <a:fillRef idx="3">
-            <a:schemeClr val="accent1"/>
-          </a:fillRef>
-          <a:effectRef idx="2">
-            <a:schemeClr val="accent1"/>
-          </a:effectRef>
-          <a:fontRef idx="minor">
-            <a:schemeClr val="lt1"/>
-          </a:fontRef>
-        </p:style>
-        <p:txBody>
-          <a:bodyPr rtlCol="0" anchor="ctr"/>
-          <a:lstStyle/>
-          <a:p>
-            <a:pPr algn="ctr"/>
-          </a:p>
-        </p:txBody>
-      </p:sp>
-      <p:sp>
-        <p:nvSpPr>
-          <p:cNvPr id="22" name="Rounded Rectangle 21"/>
-          <p:cNvSpPr/>
-          <p:nvPr/>
-        </p:nvSpPr>
-        <p:spPr>
-          <a:xfrm>
-            <a:off x="7013448" y="2596896"/>
-            <a:ext cx="1298448" cy="310896"/>
-          </a:xfrm>
-          <a:prstGeom prst="roundRect">
-            <a:avLst>
-              <a:gd name="adj" fmla="val 50000"/>
-            </a:avLst>
-          </a:prstGeom>
-          <a:solidFill>
-            <a:srgbClr val="FCECEC"/>
-          </a:solidFill>
-          <a:ln>
-            <a:noFill/>
-          </a:ln>
-          <a:effectLst/>
-        </p:spPr>
-        <p:style>
-          <a:lnRef idx="1">
-            <a:schemeClr val="accent1"/>
-          </a:lnRef>
-          <a:fillRef idx="3">
-            <a:schemeClr val="accent1"/>
-          </a:fillRef>
-          <a:effectRef idx="2">
-            <a:schemeClr val="accent1"/>
-          </a:effectRef>
-          <a:fontRef idx="minor">
-            <a:schemeClr val="lt1"/>
-          </a:fontRef>
-        </p:style>
-        <p:txBody>
-          <a:bodyPr rtlCol="0" anchor="ctr"/>
-          <a:lstStyle/>
-          <a:p>
-            <a:pPr algn="ctr"/>
-          </a:p>
-        </p:txBody>
-      </p:sp>
-      <p:sp>
-        <p:nvSpPr>
-          <p:cNvPr id="23" name="TextBox 22"/>
-          <p:cNvSpPr txBox="1"/>
-          <p:nvPr/>
-        </p:nvSpPr>
-        <p:spPr>
-          <a:xfrm>
-            <a:off x="7013448" y="2596896"/>
-            <a:ext cx="1298448" cy="310896"/>
-          </a:xfrm>
-          <a:prstGeom prst="rect">
-            <a:avLst/>
-          </a:prstGeom>
-          <a:noFill/>
-        </p:spPr>
-        <p:txBody>
-          <a:bodyPr wrap="none" anchor="ctr" lIns="0" rIns="0" tIns="0" bIns="0">
-            <a:spAutoFit/>
-          </a:bodyPr>
-          <a:lstStyle/>
-          <a:p>
-            <a:pPr algn="ctr">
-              <a:lnSpc>
-                <a:spcPct val="106000"/>
-              </a:lnSpc>
-              <a:spcBef>
-                <a:spcPts val="0"/>
-              </a:spcBef>
-              <a:spcAft>
-                <a:spcPts val="0"/>
-              </a:spcAft>
-            </a:pPr>
-            <a:r>
-              <a:rPr sz="850" b="1">
-                <a:solidFill>
-                  <a:srgbClr val="B80000"/>
-                </a:solidFill>
-                <a:latin typeface="Red Hat Display"/>
-              </a:rPr>
-              <a:t>MEDIA PASS</a:t>
-            </a:r>
-          </a:p>
-        </p:txBody>
-      </p:sp>
-      <p:pic>
-        <p:nvPicPr>
-          <p:cNvPr id="24" name="Picture 23" descr="eye_slate.png"/>
-          <p:cNvPicPr>
-            <a:picLocks noChangeAspect="1"/>
-          </p:cNvPicPr>
-          <p:nvPr/>
-        </p:nvPicPr>
-        <p:blipFill>
-          <a:blip r:embed="rId4"/>
-          <a:stretch>
-            <a:fillRect/>
-          </a:stretch>
-        </p:blipFill>
-        <p:spPr>
-          <a:xfrm>
-            <a:off x="8843619" y="3108960"/>
-            <a:ext cx="475488" cy="475488"/>
-          </a:xfrm>
-          <a:prstGeom prst="rect">
-            <a:avLst/>
-          </a:prstGeom>
-        </p:spPr>
-      </p:pic>
-      <p:sp>
-        <p:nvSpPr>
-          <p:cNvPr id="25" name="TextBox 24"/>
-          <p:cNvSpPr txBox="1"/>
-          <p:nvPr/>
-        </p:nvSpPr>
-        <p:spPr>
-          <a:xfrm>
-            <a:off x="7050024" y="3721608"/>
-            <a:ext cx="4062679" cy="1481328"/>
-          </a:xfrm>
-          <a:prstGeom prst="rect">
-            <a:avLst/>
-          </a:prstGeom>
-          <a:noFill/>
-        </p:spPr>
-        <p:txBody>
-          <a:bodyPr wrap="square" anchor="t" lIns="0" rIns="0" tIns="0" bIns="0">
-            <a:spAutoFit/>
-          </a:bodyPr>
-          <a:lstStyle/>
-          <a:p>
-            <a:pPr algn="l">
-              <a:lnSpc>
-                <a:spcPct val="120000"/>
-              </a:lnSpc>
-              <a:spcBef>
-                <a:spcPts val="0"/>
-              </a:spcBef>
-              <a:spcAft>
-                <a:spcPts val="0"/>
-              </a:spcAft>
-            </a:pPr>
-            <a:r>
-              <a:rPr sz="950" b="0">
-                <a:solidFill>
-                  <a:srgbClr val="8A9099"/>
-                </a:solidFill>
-                <a:latin typeface="Red Hat Text"/>
-              </a:rPr>
-              <a:t>A three-panel strip — canary at 50% (1 red, 2 blue pods) → analysis "FAILED" stamp → prod back to all-blue with a green "200" and a small "auto" clock over the rollback arrow.</a:t>
             </a:r>
           </a:p>
         </p:txBody>
@@ -9787,11 +11279,11 @@
         <p:spPr>
           <a:xfrm>
             <a:off x="841248" y="2395728"/>
-            <a:ext cx="5715000" cy="530352"/>
+            <a:ext cx="5138928" cy="786384"/>
           </a:xfrm>
           <a:prstGeom prst="roundRect">
             <a:avLst>
-              <a:gd name="adj" fmla="val 6000"/>
+              <a:gd name="adj" fmla="val 7000"/>
             </a:avLst>
           </a:prstGeom>
           <a:solidFill>
@@ -9826,9 +11318,55 @@
           </a:p>
         </p:txBody>
       </p:sp>
+      <p:sp>
+        <p:nvSpPr>
+          <p:cNvPr id="7" name="Rounded Rectangle 6"/>
+          <p:cNvSpPr/>
+          <p:nvPr/>
+        </p:nvSpPr>
+        <p:spPr>
+          <a:xfrm>
+            <a:off x="987552" y="2532888"/>
+            <a:ext cx="512064" cy="512064"/>
+          </a:xfrm>
+          <a:prstGeom prst="roundRect">
+            <a:avLst>
+              <a:gd name="adj" fmla="val 26000"/>
+            </a:avLst>
+          </a:prstGeom>
+          <a:solidFill>
+            <a:srgbClr val="EE0000"/>
+          </a:solidFill>
+          <a:ln>
+            <a:noFill/>
+          </a:ln>
+          <a:effectLst/>
+        </p:spPr>
+        <p:style>
+          <a:lnRef idx="1">
+            <a:schemeClr val="accent1"/>
+          </a:lnRef>
+          <a:fillRef idx="3">
+            <a:schemeClr val="accent1"/>
+          </a:fillRef>
+          <a:effectRef idx="2">
+            <a:schemeClr val="accent1"/>
+          </a:effectRef>
+          <a:fontRef idx="minor">
+            <a:schemeClr val="lt1"/>
+          </a:fontRef>
+        </p:style>
+        <p:txBody>
+          <a:bodyPr rtlCol="0" anchor="ctr"/>
+          <a:lstStyle/>
+          <a:p>
+            <a:pPr algn="ctr"/>
+          </a:p>
+        </p:txBody>
+      </p:sp>
       <p:pic>
         <p:nvPicPr>
-          <p:cNvPr id="7" name="Picture 6" descr="check_steel.png"/>
+          <p:cNvPr id="8" name="Picture 7" descr="check_white.png"/>
           <p:cNvPicPr>
             <a:picLocks noChangeAspect="1"/>
           </p:cNvPicPr>
@@ -9842,8 +11380,8 @@
         </p:blipFill>
         <p:spPr>
           <a:xfrm>
-            <a:off x="987552" y="2542032"/>
-            <a:ext cx="237744" cy="237744"/>
+            <a:off x="1110447" y="2655783"/>
+            <a:ext cx="266273" cy="266273"/>
           </a:xfrm>
           <a:prstGeom prst="rect">
             <a:avLst/>
@@ -9852,14 +11390,14 @@
       </p:pic>
       <p:sp>
         <p:nvSpPr>
-          <p:cNvPr id="8" name="TextBox 7"/>
+          <p:cNvPr id="9" name="TextBox 8"/>
           <p:cNvSpPr txBox="1"/>
           <p:nvPr/>
         </p:nvSpPr>
         <p:spPr>
           <a:xfrm>
-            <a:off x="1353312" y="2395728"/>
-            <a:ext cx="5029200" cy="530352"/>
+            <a:off x="1627632" y="2395728"/>
+            <a:ext cx="4206240" cy="786384"/>
           </a:xfrm>
           <a:prstGeom prst="rect">
             <a:avLst/>
@@ -9884,7 +11422,7 @@
               </a:spcAft>
             </a:pPr>
             <a:r>
-              <a:rPr sz="1200" b="0">
+              <a:rPr sz="1150" b="0">
                 <a:solidFill>
                   <a:srgbClr val="1A1A1A"/>
                 </a:solidFill>
@@ -9897,18 +11435,18 @@
       </p:sp>
       <p:sp>
         <p:nvSpPr>
-          <p:cNvPr id="9" name="Rounded Rectangle 8"/>
+          <p:cNvPr id="10" name="Rounded Rectangle 9"/>
           <p:cNvSpPr/>
           <p:nvPr/>
         </p:nvSpPr>
         <p:spPr>
           <a:xfrm>
-            <a:off x="841248" y="2999232"/>
-            <a:ext cx="5715000" cy="530352"/>
+            <a:off x="6254496" y="2395728"/>
+            <a:ext cx="5138928" cy="786384"/>
           </a:xfrm>
           <a:prstGeom prst="roundRect">
             <a:avLst>
-              <a:gd name="adj" fmla="val 6000"/>
+              <a:gd name="adj" fmla="val 7000"/>
             </a:avLst>
           </a:prstGeom>
           <a:solidFill>
@@ -9943,9 +11481,55 @@
           </a:p>
         </p:txBody>
       </p:sp>
+      <p:sp>
+        <p:nvSpPr>
+          <p:cNvPr id="11" name="Rounded Rectangle 10"/>
+          <p:cNvSpPr/>
+          <p:nvPr/>
+        </p:nvSpPr>
+        <p:spPr>
+          <a:xfrm>
+            <a:off x="6400800" y="2532888"/>
+            <a:ext cx="512064" cy="512064"/>
+          </a:xfrm>
+          <a:prstGeom prst="roundRect">
+            <a:avLst>
+              <a:gd name="adj" fmla="val 26000"/>
+            </a:avLst>
+          </a:prstGeom>
+          <a:solidFill>
+            <a:srgbClr val="EE0000"/>
+          </a:solidFill>
+          <a:ln>
+            <a:noFill/>
+          </a:ln>
+          <a:effectLst/>
+        </p:spPr>
+        <p:style>
+          <a:lnRef idx="1">
+            <a:schemeClr val="accent1"/>
+          </a:lnRef>
+          <a:fillRef idx="3">
+            <a:schemeClr val="accent1"/>
+          </a:fillRef>
+          <a:effectRef idx="2">
+            <a:schemeClr val="accent1"/>
+          </a:effectRef>
+          <a:fontRef idx="minor">
+            <a:schemeClr val="lt1"/>
+          </a:fontRef>
+        </p:style>
+        <p:txBody>
+          <a:bodyPr rtlCol="0" anchor="ctr"/>
+          <a:lstStyle/>
+          <a:p>
+            <a:pPr algn="ctr"/>
+          </a:p>
+        </p:txBody>
+      </p:sp>
       <p:pic>
         <p:nvPicPr>
-          <p:cNvPr id="10" name="Picture 9" descr="check_steel.png"/>
+          <p:cNvPr id="12" name="Picture 11" descr="check_white.png"/>
           <p:cNvPicPr>
             <a:picLocks noChangeAspect="1"/>
           </p:cNvPicPr>
@@ -9959,8 +11543,8 @@
         </p:blipFill>
         <p:spPr>
           <a:xfrm>
-            <a:off x="987552" y="3145536"/>
-            <a:ext cx="237744" cy="237744"/>
+            <a:off x="6523695" y="2655783"/>
+            <a:ext cx="266273" cy="266273"/>
           </a:xfrm>
           <a:prstGeom prst="rect">
             <a:avLst/>
@@ -9969,14 +11553,14 @@
       </p:pic>
       <p:sp>
         <p:nvSpPr>
-          <p:cNvPr id="11" name="TextBox 10"/>
+          <p:cNvPr id="13" name="TextBox 12"/>
           <p:cNvSpPr txBox="1"/>
           <p:nvPr/>
         </p:nvSpPr>
         <p:spPr>
           <a:xfrm>
-            <a:off x="1353312" y="2999232"/>
-            <a:ext cx="5029200" cy="530352"/>
+            <a:off x="7040880" y="2395728"/>
+            <a:ext cx="4206240" cy="786384"/>
           </a:xfrm>
           <a:prstGeom prst="rect">
             <a:avLst/>
@@ -10001,7 +11585,7 @@
               </a:spcAft>
             </a:pPr>
             <a:r>
-              <a:rPr sz="1200" b="0">
+              <a:rPr sz="1150" b="0">
                 <a:solidFill>
                   <a:srgbClr val="1A1A1A"/>
                 </a:solidFill>
@@ -10014,18 +11598,18 @@
       </p:sp>
       <p:sp>
         <p:nvSpPr>
-          <p:cNvPr id="12" name="Rounded Rectangle 11"/>
+          <p:cNvPr id="14" name="Rounded Rectangle 13"/>
           <p:cNvSpPr/>
           <p:nvPr/>
         </p:nvSpPr>
         <p:spPr>
           <a:xfrm>
-            <a:off x="841248" y="3602736"/>
-            <a:ext cx="5715000" cy="530352"/>
+            <a:off x="841248" y="3328416"/>
+            <a:ext cx="5138928" cy="786384"/>
           </a:xfrm>
           <a:prstGeom prst="roundRect">
             <a:avLst>
-              <a:gd name="adj" fmla="val 6000"/>
+              <a:gd name="adj" fmla="val 7000"/>
             </a:avLst>
           </a:prstGeom>
           <a:solidFill>
@@ -10060,9 +11644,55 @@
           </a:p>
         </p:txBody>
       </p:sp>
+      <p:sp>
+        <p:nvSpPr>
+          <p:cNvPr id="15" name="Rounded Rectangle 14"/>
+          <p:cNvSpPr/>
+          <p:nvPr/>
+        </p:nvSpPr>
+        <p:spPr>
+          <a:xfrm>
+            <a:off x="987552" y="3465576"/>
+            <a:ext cx="512064" cy="512064"/>
+          </a:xfrm>
+          <a:prstGeom prst="roundRect">
+            <a:avLst>
+              <a:gd name="adj" fmla="val 26000"/>
+            </a:avLst>
+          </a:prstGeom>
+          <a:solidFill>
+            <a:srgbClr val="EE0000"/>
+          </a:solidFill>
+          <a:ln>
+            <a:noFill/>
+          </a:ln>
+          <a:effectLst/>
+        </p:spPr>
+        <p:style>
+          <a:lnRef idx="1">
+            <a:schemeClr val="accent1"/>
+          </a:lnRef>
+          <a:fillRef idx="3">
+            <a:schemeClr val="accent1"/>
+          </a:fillRef>
+          <a:effectRef idx="2">
+            <a:schemeClr val="accent1"/>
+          </a:effectRef>
+          <a:fontRef idx="minor">
+            <a:schemeClr val="lt1"/>
+          </a:fontRef>
+        </p:style>
+        <p:txBody>
+          <a:bodyPr rtlCol="0" anchor="ctr"/>
+          <a:lstStyle/>
+          <a:p>
+            <a:pPr algn="ctr"/>
+          </a:p>
+        </p:txBody>
+      </p:sp>
       <p:pic>
         <p:nvPicPr>
-          <p:cNvPr id="13" name="Picture 12" descr="check_steel.png"/>
+          <p:cNvPr id="16" name="Picture 15" descr="check_white.png"/>
           <p:cNvPicPr>
             <a:picLocks noChangeAspect="1"/>
           </p:cNvPicPr>
@@ -10076,8 +11706,8 @@
         </p:blipFill>
         <p:spPr>
           <a:xfrm>
-            <a:off x="987552" y="3749040"/>
-            <a:ext cx="237744" cy="237744"/>
+            <a:off x="1110447" y="3588471"/>
+            <a:ext cx="266273" cy="266273"/>
           </a:xfrm>
           <a:prstGeom prst="rect">
             <a:avLst/>
@@ -10086,14 +11716,14 @@
       </p:pic>
       <p:sp>
         <p:nvSpPr>
-          <p:cNvPr id="14" name="TextBox 13"/>
+          <p:cNvPr id="17" name="TextBox 16"/>
           <p:cNvSpPr txBox="1"/>
           <p:nvPr/>
         </p:nvSpPr>
         <p:spPr>
           <a:xfrm>
-            <a:off x="1353312" y="3602736"/>
-            <a:ext cx="5029200" cy="530352"/>
+            <a:off x="1627632" y="3328416"/>
+            <a:ext cx="4206240" cy="786384"/>
           </a:xfrm>
           <a:prstGeom prst="rect">
             <a:avLst/>
@@ -10118,7 +11748,7 @@
               </a:spcAft>
             </a:pPr>
             <a:r>
-              <a:rPr sz="1200" b="0">
+              <a:rPr sz="1150" b="0">
                 <a:solidFill>
                   <a:srgbClr val="1A1A1A"/>
                 </a:solidFill>
@@ -10131,18 +11761,18 @@
       </p:sp>
       <p:sp>
         <p:nvSpPr>
-          <p:cNvPr id="15" name="Rounded Rectangle 14"/>
+          <p:cNvPr id="18" name="Rounded Rectangle 17"/>
           <p:cNvSpPr/>
           <p:nvPr/>
         </p:nvSpPr>
         <p:spPr>
           <a:xfrm>
-            <a:off x="841248" y="4206240"/>
-            <a:ext cx="5715000" cy="530352"/>
+            <a:off x="6254496" y="3328416"/>
+            <a:ext cx="5138928" cy="786384"/>
           </a:xfrm>
           <a:prstGeom prst="roundRect">
             <a:avLst>
-              <a:gd name="adj" fmla="val 6000"/>
+              <a:gd name="adj" fmla="val 7000"/>
             </a:avLst>
           </a:prstGeom>
           <a:solidFill>
@@ -10177,9 +11807,55 @@
           </a:p>
         </p:txBody>
       </p:sp>
+      <p:sp>
+        <p:nvSpPr>
+          <p:cNvPr id="19" name="Rounded Rectangle 18"/>
+          <p:cNvSpPr/>
+          <p:nvPr/>
+        </p:nvSpPr>
+        <p:spPr>
+          <a:xfrm>
+            <a:off x="6400800" y="3465576"/>
+            <a:ext cx="512064" cy="512064"/>
+          </a:xfrm>
+          <a:prstGeom prst="roundRect">
+            <a:avLst>
+              <a:gd name="adj" fmla="val 26000"/>
+            </a:avLst>
+          </a:prstGeom>
+          <a:solidFill>
+            <a:srgbClr val="EE0000"/>
+          </a:solidFill>
+          <a:ln>
+            <a:noFill/>
+          </a:ln>
+          <a:effectLst/>
+        </p:spPr>
+        <p:style>
+          <a:lnRef idx="1">
+            <a:schemeClr val="accent1"/>
+          </a:lnRef>
+          <a:fillRef idx="3">
+            <a:schemeClr val="accent1"/>
+          </a:fillRef>
+          <a:effectRef idx="2">
+            <a:schemeClr val="accent1"/>
+          </a:effectRef>
+          <a:fontRef idx="minor">
+            <a:schemeClr val="lt1"/>
+          </a:fontRef>
+        </p:style>
+        <p:txBody>
+          <a:bodyPr rtlCol="0" anchor="ctr"/>
+          <a:lstStyle/>
+          <a:p>
+            <a:pPr algn="ctr"/>
+          </a:p>
+        </p:txBody>
+      </p:sp>
       <p:pic>
         <p:nvPicPr>
-          <p:cNvPr id="16" name="Picture 15" descr="check_steel.png"/>
+          <p:cNvPr id="20" name="Picture 19" descr="check_white.png"/>
           <p:cNvPicPr>
             <a:picLocks noChangeAspect="1"/>
           </p:cNvPicPr>
@@ -10193,8 +11869,8 @@
         </p:blipFill>
         <p:spPr>
           <a:xfrm>
-            <a:off x="987552" y="4352544"/>
-            <a:ext cx="237744" cy="237744"/>
+            <a:off x="6523695" y="3588471"/>
+            <a:ext cx="266273" cy="266273"/>
           </a:xfrm>
           <a:prstGeom prst="rect">
             <a:avLst/>
@@ -10203,14 +11879,14 @@
       </p:pic>
       <p:sp>
         <p:nvSpPr>
-          <p:cNvPr id="17" name="TextBox 16"/>
+          <p:cNvPr id="21" name="TextBox 20"/>
           <p:cNvSpPr txBox="1"/>
           <p:nvPr/>
         </p:nvSpPr>
         <p:spPr>
           <a:xfrm>
-            <a:off x="1353312" y="4206240"/>
-            <a:ext cx="5029200" cy="530352"/>
+            <a:off x="7040880" y="3328416"/>
+            <a:ext cx="4206240" cy="786384"/>
           </a:xfrm>
           <a:prstGeom prst="rect">
             <a:avLst/>
@@ -10235,7 +11911,7 @@
               </a:spcAft>
             </a:pPr>
             <a:r>
-              <a:rPr sz="1200" b="0">
+              <a:rPr sz="1150" b="0">
                 <a:solidFill>
                   <a:srgbClr val="1A1A1A"/>
                 </a:solidFill>
@@ -10248,18 +11924,18 @@
       </p:sp>
       <p:sp>
         <p:nvSpPr>
-          <p:cNvPr id="18" name="Rounded Rectangle 17"/>
+          <p:cNvPr id="22" name="Rounded Rectangle 21"/>
           <p:cNvSpPr/>
           <p:nvPr/>
         </p:nvSpPr>
         <p:spPr>
           <a:xfrm>
-            <a:off x="841248" y="4809744"/>
-            <a:ext cx="5715000" cy="530352"/>
+            <a:off x="841248" y="4261104"/>
+            <a:ext cx="5138928" cy="786384"/>
           </a:xfrm>
           <a:prstGeom prst="roundRect">
             <a:avLst>
-              <a:gd name="adj" fmla="val 6000"/>
+              <a:gd name="adj" fmla="val 7000"/>
             </a:avLst>
           </a:prstGeom>
           <a:solidFill>
@@ -10294,9 +11970,55 @@
           </a:p>
         </p:txBody>
       </p:sp>
+      <p:sp>
+        <p:nvSpPr>
+          <p:cNvPr id="23" name="Rounded Rectangle 22"/>
+          <p:cNvSpPr/>
+          <p:nvPr/>
+        </p:nvSpPr>
+        <p:spPr>
+          <a:xfrm>
+            <a:off x="987552" y="4398264"/>
+            <a:ext cx="512064" cy="512064"/>
+          </a:xfrm>
+          <a:prstGeom prst="roundRect">
+            <a:avLst>
+              <a:gd name="adj" fmla="val 26000"/>
+            </a:avLst>
+          </a:prstGeom>
+          <a:solidFill>
+            <a:srgbClr val="EE0000"/>
+          </a:solidFill>
+          <a:ln>
+            <a:noFill/>
+          </a:ln>
+          <a:effectLst/>
+        </p:spPr>
+        <p:style>
+          <a:lnRef idx="1">
+            <a:schemeClr val="accent1"/>
+          </a:lnRef>
+          <a:fillRef idx="3">
+            <a:schemeClr val="accent1"/>
+          </a:fillRef>
+          <a:effectRef idx="2">
+            <a:schemeClr val="accent1"/>
+          </a:effectRef>
+          <a:fontRef idx="minor">
+            <a:schemeClr val="lt1"/>
+          </a:fontRef>
+        </p:style>
+        <p:txBody>
+          <a:bodyPr rtlCol="0" anchor="ctr"/>
+          <a:lstStyle/>
+          <a:p>
+            <a:pPr algn="ctr"/>
+          </a:p>
+        </p:txBody>
+      </p:sp>
       <p:pic>
         <p:nvPicPr>
-          <p:cNvPr id="19" name="Picture 18" descr="check_steel.png"/>
+          <p:cNvPr id="24" name="Picture 23" descr="check_white.png"/>
           <p:cNvPicPr>
             <a:picLocks noChangeAspect="1"/>
           </p:cNvPicPr>
@@ -10310,8 +12032,8 @@
         </p:blipFill>
         <p:spPr>
           <a:xfrm>
-            <a:off x="987552" y="4956048"/>
-            <a:ext cx="237744" cy="237744"/>
+            <a:off x="1110447" y="4521159"/>
+            <a:ext cx="266273" cy="266273"/>
           </a:xfrm>
           <a:prstGeom prst="rect">
             <a:avLst/>
@@ -10320,14 +12042,14 @@
       </p:pic>
       <p:sp>
         <p:nvSpPr>
-          <p:cNvPr id="20" name="TextBox 19"/>
+          <p:cNvPr id="25" name="TextBox 24"/>
           <p:cNvSpPr txBox="1"/>
           <p:nvPr/>
         </p:nvSpPr>
         <p:spPr>
           <a:xfrm>
-            <a:off x="1353312" y="4809744"/>
-            <a:ext cx="5029200" cy="530352"/>
+            <a:off x="1627632" y="4261104"/>
+            <a:ext cx="4206240" cy="786384"/>
           </a:xfrm>
           <a:prstGeom prst="rect">
             <a:avLst/>
@@ -10352,221 +12074,13 @@
               </a:spcAft>
             </a:pPr>
             <a:r>
-              <a:rPr sz="1200" b="0">
+              <a:rPr sz="1150" b="0">
                 <a:solidFill>
                   <a:srgbClr val="1A1A1A"/>
                 </a:solidFill>
                 <a:latin typeface="Red Hat Text"/>
               </a:rPr>
               <a:t>Mesh / serverless shift traffic other ways (other modules)</a:t>
-            </a:r>
-          </a:p>
-        </p:txBody>
-      </p:sp>
-      <p:sp>
-        <p:nvSpPr>
-          <p:cNvPr id="21" name="Rounded Rectangle 20"/>
-          <p:cNvSpPr/>
-          <p:nvPr/>
-        </p:nvSpPr>
-        <p:spPr>
-          <a:xfrm>
-            <a:off x="6812280" y="2395728"/>
-            <a:ext cx="4538167" cy="2944368"/>
-          </a:xfrm>
-          <a:prstGeom prst="roundRect">
-            <a:avLst>
-              <a:gd name="adj" fmla="val 4000"/>
-            </a:avLst>
-          </a:prstGeom>
-          <a:solidFill>
-            <a:srgbClr val="FFFFFF"/>
-          </a:solidFill>
-          <a:ln w="15240">
-            <a:solidFill>
-              <a:srgbClr val="DDE1E6"/>
-            </a:solidFill>
-          </a:ln>
-          <a:effectLst/>
-        </p:spPr>
-        <p:style>
-          <a:lnRef idx="1">
-            <a:schemeClr val="accent1"/>
-          </a:lnRef>
-          <a:fillRef idx="3">
-            <a:schemeClr val="accent1"/>
-          </a:fillRef>
-          <a:effectRef idx="2">
-            <a:schemeClr val="accent1"/>
-          </a:effectRef>
-          <a:fontRef idx="minor">
-            <a:schemeClr val="lt1"/>
-          </a:fontRef>
-        </p:style>
-        <p:txBody>
-          <a:bodyPr rtlCol="0" anchor="ctr"/>
-          <a:lstStyle/>
-          <a:p>
-            <a:pPr algn="ctr"/>
-          </a:p>
-        </p:txBody>
-      </p:sp>
-      <p:sp>
-        <p:nvSpPr>
-          <p:cNvPr id="22" name="Rounded Rectangle 21"/>
-          <p:cNvSpPr/>
-          <p:nvPr/>
-        </p:nvSpPr>
-        <p:spPr>
-          <a:xfrm>
-            <a:off x="7013448" y="2596896"/>
-            <a:ext cx="1298448" cy="310896"/>
-          </a:xfrm>
-          <a:prstGeom prst="roundRect">
-            <a:avLst>
-              <a:gd name="adj" fmla="val 50000"/>
-            </a:avLst>
-          </a:prstGeom>
-          <a:solidFill>
-            <a:srgbClr val="FCECEC"/>
-          </a:solidFill>
-          <a:ln>
-            <a:noFill/>
-          </a:ln>
-          <a:effectLst/>
-        </p:spPr>
-        <p:style>
-          <a:lnRef idx="1">
-            <a:schemeClr val="accent1"/>
-          </a:lnRef>
-          <a:fillRef idx="3">
-            <a:schemeClr val="accent1"/>
-          </a:fillRef>
-          <a:effectRef idx="2">
-            <a:schemeClr val="accent1"/>
-          </a:effectRef>
-          <a:fontRef idx="minor">
-            <a:schemeClr val="lt1"/>
-          </a:fontRef>
-        </p:style>
-        <p:txBody>
-          <a:bodyPr rtlCol="0" anchor="ctr"/>
-          <a:lstStyle/>
-          <a:p>
-            <a:pPr algn="ctr"/>
-          </a:p>
-        </p:txBody>
-      </p:sp>
-      <p:sp>
-        <p:nvSpPr>
-          <p:cNvPr id="23" name="TextBox 22"/>
-          <p:cNvSpPr txBox="1"/>
-          <p:nvPr/>
-        </p:nvSpPr>
-        <p:spPr>
-          <a:xfrm>
-            <a:off x="7013448" y="2596896"/>
-            <a:ext cx="1298448" cy="310896"/>
-          </a:xfrm>
-          <a:prstGeom prst="rect">
-            <a:avLst/>
-          </a:prstGeom>
-          <a:noFill/>
-        </p:spPr>
-        <p:txBody>
-          <a:bodyPr wrap="none" anchor="ctr" lIns="0" rIns="0" tIns="0" bIns="0">
-            <a:spAutoFit/>
-          </a:bodyPr>
-          <a:lstStyle/>
-          <a:p>
-            <a:pPr algn="ctr">
-              <a:lnSpc>
-                <a:spcPct val="106000"/>
-              </a:lnSpc>
-              <a:spcBef>
-                <a:spcPts val="0"/>
-              </a:spcBef>
-              <a:spcAft>
-                <a:spcPts val="0"/>
-              </a:spcAft>
-            </a:pPr>
-            <a:r>
-              <a:rPr sz="850" b="1">
-                <a:solidFill>
-                  <a:srgbClr val="B80000"/>
-                </a:solidFill>
-                <a:latin typeface="Red Hat Display"/>
-              </a:rPr>
-              <a:t>MEDIA PASS</a:t>
-            </a:r>
-          </a:p>
-        </p:txBody>
-      </p:sp>
-      <p:pic>
-        <p:nvPicPr>
-          <p:cNvPr id="24" name="Picture 23" descr="eye_slate.png"/>
-          <p:cNvPicPr>
-            <a:picLocks noChangeAspect="1"/>
-          </p:cNvPicPr>
-          <p:nvPr/>
-        </p:nvPicPr>
-        <p:blipFill>
-          <a:blip r:embed="rId4"/>
-          <a:stretch>
-            <a:fillRect/>
-          </a:stretch>
-        </p:blipFill>
-        <p:spPr>
-          <a:xfrm>
-            <a:off x="8843619" y="3108960"/>
-            <a:ext cx="475488" cy="475488"/>
-          </a:xfrm>
-          <a:prstGeom prst="rect">
-            <a:avLst/>
-          </a:prstGeom>
-        </p:spPr>
-      </p:pic>
-      <p:sp>
-        <p:nvSpPr>
-          <p:cNvPr id="25" name="TextBox 24"/>
-          <p:cNvSpPr txBox="1"/>
-          <p:nvPr/>
-        </p:nvSpPr>
-        <p:spPr>
-          <a:xfrm>
-            <a:off x="7050024" y="3721608"/>
-            <a:ext cx="4062679" cy="1481328"/>
-          </a:xfrm>
-          <a:prstGeom prst="rect">
-            <a:avLst/>
-          </a:prstGeom>
-          <a:noFill/>
-        </p:spPr>
-        <p:txBody>
-          <a:bodyPr wrap="square" anchor="t" lIns="0" rIns="0" tIns="0" bIns="0">
-            <a:spAutoFit/>
-          </a:bodyPr>
-          <a:lstStyle/>
-          <a:p>
-            <a:pPr algn="l">
-              <a:lnSpc>
-                <a:spcPct val="120000"/>
-              </a:lnSpc>
-              <a:spcBef>
-                <a:spcPts val="0"/>
-              </a:spcBef>
-              <a:spcAft>
-                <a:spcPts val="0"/>
-              </a:spcAft>
-            </a:pPr>
-            <a:r>
-              <a:rPr sz="950" b="0">
-                <a:solidFill>
-                  <a:srgbClr val="8A9099"/>
-                </a:solidFill>
-                <a:latin typeface="Red Hat Text"/>
-              </a:rPr>
-              <a:t>Two-column compare card (canary vs blue-green) with the decision-guide rows; a footnote strip pointing to Mesh and Serverless modules.</a:t>
             </a:r>
           </a:p>
         </p:txBody>
@@ -10874,11 +12388,11 @@
         <p:spPr>
           <a:xfrm>
             <a:off x="841248" y="2395728"/>
-            <a:ext cx="5715000" cy="530352"/>
+            <a:ext cx="5138928" cy="786384"/>
           </a:xfrm>
           <a:prstGeom prst="roundRect">
             <a:avLst>
-              <a:gd name="adj" fmla="val 6000"/>
+              <a:gd name="adj" fmla="val 7000"/>
             </a:avLst>
           </a:prstGeom>
           <a:solidFill>
@@ -10913,9 +12427,55 @@
           </a:p>
         </p:txBody>
       </p:sp>
+      <p:sp>
+        <p:nvSpPr>
+          <p:cNvPr id="7" name="Rounded Rectangle 6"/>
+          <p:cNvSpPr/>
+          <p:nvPr/>
+        </p:nvSpPr>
+        <p:spPr>
+          <a:xfrm>
+            <a:off x="987552" y="2532888"/>
+            <a:ext cx="512064" cy="512064"/>
+          </a:xfrm>
+          <a:prstGeom prst="roundRect">
+            <a:avLst>
+              <a:gd name="adj" fmla="val 26000"/>
+            </a:avLst>
+          </a:prstGeom>
+          <a:solidFill>
+            <a:srgbClr val="EE0000"/>
+          </a:solidFill>
+          <a:ln>
+            <a:noFill/>
+          </a:ln>
+          <a:effectLst/>
+        </p:spPr>
+        <p:style>
+          <a:lnRef idx="1">
+            <a:schemeClr val="accent1"/>
+          </a:lnRef>
+          <a:fillRef idx="3">
+            <a:schemeClr val="accent1"/>
+          </a:fillRef>
+          <a:effectRef idx="2">
+            <a:schemeClr val="accent1"/>
+          </a:effectRef>
+          <a:fontRef idx="minor">
+            <a:schemeClr val="lt1"/>
+          </a:fontRef>
+        </p:style>
+        <p:txBody>
+          <a:bodyPr rtlCol="0" anchor="ctr"/>
+          <a:lstStyle/>
+          <a:p>
+            <a:pPr algn="ctr"/>
+          </a:p>
+        </p:txBody>
+      </p:sp>
       <p:pic>
         <p:nvPicPr>
-          <p:cNvPr id="7" name="Picture 6" descr="check_steel.png"/>
+          <p:cNvPr id="8" name="Picture 7" descr="check_white.png"/>
           <p:cNvPicPr>
             <a:picLocks noChangeAspect="1"/>
           </p:cNvPicPr>
@@ -10929,8 +12489,8 @@
         </p:blipFill>
         <p:spPr>
           <a:xfrm>
-            <a:off x="987552" y="2542032"/>
-            <a:ext cx="237744" cy="237744"/>
+            <a:off x="1110447" y="2655783"/>
+            <a:ext cx="266273" cy="266273"/>
           </a:xfrm>
           <a:prstGeom prst="rect">
             <a:avLst/>
@@ -10939,14 +12499,14 @@
       </p:pic>
       <p:sp>
         <p:nvSpPr>
-          <p:cNvPr id="8" name="TextBox 7"/>
+          <p:cNvPr id="9" name="TextBox 8"/>
           <p:cNvSpPr txBox="1"/>
           <p:nvPr/>
         </p:nvSpPr>
         <p:spPr>
           <a:xfrm>
-            <a:off x="1353312" y="2395728"/>
-            <a:ext cx="5029200" cy="530352"/>
+            <a:off x="1627632" y="2395728"/>
+            <a:ext cx="4206240" cy="786384"/>
           </a:xfrm>
           <a:prstGeom prst="rect">
             <a:avLst/>
@@ -10971,7 +12531,7 @@
               </a:spcAft>
             </a:pPr>
             <a:r>
-              <a:rPr sz="1200" b="0">
+              <a:rPr sz="1150" b="0">
                 <a:solidFill>
                   <a:srgbClr val="1A1A1A"/>
                 </a:solidFill>
@@ -10984,18 +12544,18 @@
       </p:sp>
       <p:sp>
         <p:nvSpPr>
-          <p:cNvPr id="9" name="Rounded Rectangle 8"/>
+          <p:cNvPr id="10" name="Rounded Rectangle 9"/>
           <p:cNvSpPr/>
           <p:nvPr/>
         </p:nvSpPr>
         <p:spPr>
           <a:xfrm>
-            <a:off x="841248" y="2999232"/>
-            <a:ext cx="5715000" cy="530352"/>
+            <a:off x="6254496" y="2395728"/>
+            <a:ext cx="5138928" cy="786384"/>
           </a:xfrm>
           <a:prstGeom prst="roundRect">
             <a:avLst>
-              <a:gd name="adj" fmla="val 6000"/>
+              <a:gd name="adj" fmla="val 7000"/>
             </a:avLst>
           </a:prstGeom>
           <a:solidFill>
@@ -11030,9 +12590,55 @@
           </a:p>
         </p:txBody>
       </p:sp>
+      <p:sp>
+        <p:nvSpPr>
+          <p:cNvPr id="11" name="Rounded Rectangle 10"/>
+          <p:cNvSpPr/>
+          <p:nvPr/>
+        </p:nvSpPr>
+        <p:spPr>
+          <a:xfrm>
+            <a:off x="6400800" y="2532888"/>
+            <a:ext cx="512064" cy="512064"/>
+          </a:xfrm>
+          <a:prstGeom prst="roundRect">
+            <a:avLst>
+              <a:gd name="adj" fmla="val 26000"/>
+            </a:avLst>
+          </a:prstGeom>
+          <a:solidFill>
+            <a:srgbClr val="EE0000"/>
+          </a:solidFill>
+          <a:ln>
+            <a:noFill/>
+          </a:ln>
+          <a:effectLst/>
+        </p:spPr>
+        <p:style>
+          <a:lnRef idx="1">
+            <a:schemeClr val="accent1"/>
+          </a:lnRef>
+          <a:fillRef idx="3">
+            <a:schemeClr val="accent1"/>
+          </a:fillRef>
+          <a:effectRef idx="2">
+            <a:schemeClr val="accent1"/>
+          </a:effectRef>
+          <a:fontRef idx="minor">
+            <a:schemeClr val="lt1"/>
+          </a:fontRef>
+        </p:style>
+        <p:txBody>
+          <a:bodyPr rtlCol="0" anchor="ctr"/>
+          <a:lstStyle/>
+          <a:p>
+            <a:pPr algn="ctr"/>
+          </a:p>
+        </p:txBody>
+      </p:sp>
       <p:pic>
         <p:nvPicPr>
-          <p:cNvPr id="10" name="Picture 9" descr="check_steel.png"/>
+          <p:cNvPr id="12" name="Picture 11" descr="check_white.png"/>
           <p:cNvPicPr>
             <a:picLocks noChangeAspect="1"/>
           </p:cNvPicPr>
@@ -11046,8 +12652,8 @@
         </p:blipFill>
         <p:spPr>
           <a:xfrm>
-            <a:off x="987552" y="3145536"/>
-            <a:ext cx="237744" cy="237744"/>
+            <a:off x="6523695" y="2655783"/>
+            <a:ext cx="266273" cy="266273"/>
           </a:xfrm>
           <a:prstGeom prst="rect">
             <a:avLst/>
@@ -11056,14 +12662,14 @@
       </p:pic>
       <p:sp>
         <p:nvSpPr>
-          <p:cNvPr id="11" name="TextBox 10"/>
+          <p:cNvPr id="13" name="TextBox 12"/>
           <p:cNvSpPr txBox="1"/>
           <p:nvPr/>
         </p:nvSpPr>
         <p:spPr>
           <a:xfrm>
-            <a:off x="1353312" y="2999232"/>
-            <a:ext cx="5029200" cy="530352"/>
+            <a:off x="7040880" y="2395728"/>
+            <a:ext cx="4206240" cy="786384"/>
           </a:xfrm>
           <a:prstGeom prst="rect">
             <a:avLst/>
@@ -11088,7 +12694,7 @@
               </a:spcAft>
             </a:pPr>
             <a:r>
-              <a:rPr sz="1200" b="0">
+              <a:rPr sz="1150" b="0">
                 <a:solidFill>
                   <a:srgbClr val="1A1A1A"/>
                 </a:solidFill>
@@ -11101,18 +12707,18 @@
       </p:sp>
       <p:sp>
         <p:nvSpPr>
-          <p:cNvPr id="12" name="Rounded Rectangle 11"/>
+          <p:cNvPr id="14" name="Rounded Rectangle 13"/>
           <p:cNvSpPr/>
           <p:nvPr/>
         </p:nvSpPr>
         <p:spPr>
           <a:xfrm>
-            <a:off x="841248" y="3602736"/>
-            <a:ext cx="5715000" cy="530352"/>
+            <a:off x="841248" y="3328416"/>
+            <a:ext cx="5138928" cy="786384"/>
           </a:xfrm>
           <a:prstGeom prst="roundRect">
             <a:avLst>
-              <a:gd name="adj" fmla="val 6000"/>
+              <a:gd name="adj" fmla="val 7000"/>
             </a:avLst>
           </a:prstGeom>
           <a:solidFill>
@@ -11147,9 +12753,55 @@
           </a:p>
         </p:txBody>
       </p:sp>
+      <p:sp>
+        <p:nvSpPr>
+          <p:cNvPr id="15" name="Rounded Rectangle 14"/>
+          <p:cNvSpPr/>
+          <p:nvPr/>
+        </p:nvSpPr>
+        <p:spPr>
+          <a:xfrm>
+            <a:off x="987552" y="3465576"/>
+            <a:ext cx="512064" cy="512064"/>
+          </a:xfrm>
+          <a:prstGeom prst="roundRect">
+            <a:avLst>
+              <a:gd name="adj" fmla="val 26000"/>
+            </a:avLst>
+          </a:prstGeom>
+          <a:solidFill>
+            <a:srgbClr val="EE0000"/>
+          </a:solidFill>
+          <a:ln>
+            <a:noFill/>
+          </a:ln>
+          <a:effectLst/>
+        </p:spPr>
+        <p:style>
+          <a:lnRef idx="1">
+            <a:schemeClr val="accent1"/>
+          </a:lnRef>
+          <a:fillRef idx="3">
+            <a:schemeClr val="accent1"/>
+          </a:fillRef>
+          <a:effectRef idx="2">
+            <a:schemeClr val="accent1"/>
+          </a:effectRef>
+          <a:fontRef idx="minor">
+            <a:schemeClr val="lt1"/>
+          </a:fontRef>
+        </p:style>
+        <p:txBody>
+          <a:bodyPr rtlCol="0" anchor="ctr"/>
+          <a:lstStyle/>
+          <a:p>
+            <a:pPr algn="ctr"/>
+          </a:p>
+        </p:txBody>
+      </p:sp>
       <p:pic>
         <p:nvPicPr>
-          <p:cNvPr id="13" name="Picture 12" descr="check_steel.png"/>
+          <p:cNvPr id="16" name="Picture 15" descr="check_white.png"/>
           <p:cNvPicPr>
             <a:picLocks noChangeAspect="1"/>
           </p:cNvPicPr>
@@ -11163,8 +12815,8 @@
         </p:blipFill>
         <p:spPr>
           <a:xfrm>
-            <a:off x="987552" y="3749040"/>
-            <a:ext cx="237744" cy="237744"/>
+            <a:off x="1110447" y="3588471"/>
+            <a:ext cx="266273" cy="266273"/>
           </a:xfrm>
           <a:prstGeom prst="rect">
             <a:avLst/>
@@ -11173,14 +12825,14 @@
       </p:pic>
       <p:sp>
         <p:nvSpPr>
-          <p:cNvPr id="14" name="TextBox 13"/>
+          <p:cNvPr id="17" name="TextBox 16"/>
           <p:cNvSpPr txBox="1"/>
           <p:nvPr/>
         </p:nvSpPr>
         <p:spPr>
           <a:xfrm>
-            <a:off x="1353312" y="3602736"/>
-            <a:ext cx="5029200" cy="530352"/>
+            <a:off x="1627632" y="3328416"/>
+            <a:ext cx="4206240" cy="786384"/>
           </a:xfrm>
           <a:prstGeom prst="rect">
             <a:avLst/>
@@ -11205,7 +12857,7 @@
               </a:spcAft>
             </a:pPr>
             <a:r>
-              <a:rPr sz="1200" b="0">
+              <a:rPr sz="1150" b="0">
                 <a:solidFill>
                   <a:srgbClr val="1A1A1A"/>
                 </a:solidFill>
@@ -11218,18 +12870,18 @@
       </p:sp>
       <p:sp>
         <p:nvSpPr>
-          <p:cNvPr id="15" name="Rounded Rectangle 14"/>
+          <p:cNvPr id="18" name="Rounded Rectangle 17"/>
           <p:cNvSpPr/>
           <p:nvPr/>
         </p:nvSpPr>
         <p:spPr>
           <a:xfrm>
-            <a:off x="841248" y="4206240"/>
-            <a:ext cx="5715000" cy="530352"/>
+            <a:off x="6254496" y="3328416"/>
+            <a:ext cx="5138928" cy="786384"/>
           </a:xfrm>
           <a:prstGeom prst="roundRect">
             <a:avLst>
-              <a:gd name="adj" fmla="val 6000"/>
+              <a:gd name="adj" fmla="val 7000"/>
             </a:avLst>
           </a:prstGeom>
           <a:solidFill>
@@ -11264,9 +12916,55 @@
           </a:p>
         </p:txBody>
       </p:sp>
+      <p:sp>
+        <p:nvSpPr>
+          <p:cNvPr id="19" name="Rounded Rectangle 18"/>
+          <p:cNvSpPr/>
+          <p:nvPr/>
+        </p:nvSpPr>
+        <p:spPr>
+          <a:xfrm>
+            <a:off x="6400800" y="3465576"/>
+            <a:ext cx="512064" cy="512064"/>
+          </a:xfrm>
+          <a:prstGeom prst="roundRect">
+            <a:avLst>
+              <a:gd name="adj" fmla="val 26000"/>
+            </a:avLst>
+          </a:prstGeom>
+          <a:solidFill>
+            <a:srgbClr val="EE0000"/>
+          </a:solidFill>
+          <a:ln>
+            <a:noFill/>
+          </a:ln>
+          <a:effectLst/>
+        </p:spPr>
+        <p:style>
+          <a:lnRef idx="1">
+            <a:schemeClr val="accent1"/>
+          </a:lnRef>
+          <a:fillRef idx="3">
+            <a:schemeClr val="accent1"/>
+          </a:fillRef>
+          <a:effectRef idx="2">
+            <a:schemeClr val="accent1"/>
+          </a:effectRef>
+          <a:fontRef idx="minor">
+            <a:schemeClr val="lt1"/>
+          </a:fontRef>
+        </p:style>
+        <p:txBody>
+          <a:bodyPr rtlCol="0" anchor="ctr"/>
+          <a:lstStyle/>
+          <a:p>
+            <a:pPr algn="ctr"/>
+          </a:p>
+        </p:txBody>
+      </p:sp>
       <p:pic>
         <p:nvPicPr>
-          <p:cNvPr id="16" name="Picture 15" descr="check_steel.png"/>
+          <p:cNvPr id="20" name="Picture 19" descr="check_white.png"/>
           <p:cNvPicPr>
             <a:picLocks noChangeAspect="1"/>
           </p:cNvPicPr>
@@ -11280,8 +12978,8 @@
         </p:blipFill>
         <p:spPr>
           <a:xfrm>
-            <a:off x="987552" y="4352544"/>
-            <a:ext cx="237744" cy="237744"/>
+            <a:off x="6523695" y="3588471"/>
+            <a:ext cx="266273" cy="266273"/>
           </a:xfrm>
           <a:prstGeom prst="rect">
             <a:avLst/>
@@ -11290,14 +12988,14 @@
       </p:pic>
       <p:sp>
         <p:nvSpPr>
-          <p:cNvPr id="17" name="TextBox 16"/>
+          <p:cNvPr id="21" name="TextBox 20"/>
           <p:cNvSpPr txBox="1"/>
           <p:nvPr/>
         </p:nvSpPr>
         <p:spPr>
           <a:xfrm>
-            <a:off x="1353312" y="4206240"/>
-            <a:ext cx="5029200" cy="530352"/>
+            <a:off x="7040880" y="3328416"/>
+            <a:ext cx="4206240" cy="786384"/>
           </a:xfrm>
           <a:prstGeom prst="rect">
             <a:avLst/>
@@ -11322,7 +13020,7 @@
               </a:spcAft>
             </a:pPr>
             <a:r>
-              <a:rPr sz="1200" b="0">
+              <a:rPr sz="1150" b="0">
                 <a:solidFill>
                   <a:srgbClr val="1A1A1A"/>
                 </a:solidFill>
@@ -11335,18 +13033,18 @@
       </p:sp>
       <p:sp>
         <p:nvSpPr>
-          <p:cNvPr id="18" name="Rounded Rectangle 17"/>
+          <p:cNvPr id="22" name="Rounded Rectangle 21"/>
           <p:cNvSpPr/>
           <p:nvPr/>
         </p:nvSpPr>
         <p:spPr>
           <a:xfrm>
-            <a:off x="841248" y="4809744"/>
-            <a:ext cx="5715000" cy="530352"/>
+            <a:off x="841248" y="4261104"/>
+            <a:ext cx="5138928" cy="786384"/>
           </a:xfrm>
           <a:prstGeom prst="roundRect">
             <a:avLst>
-              <a:gd name="adj" fmla="val 6000"/>
+              <a:gd name="adj" fmla="val 7000"/>
             </a:avLst>
           </a:prstGeom>
           <a:solidFill>
@@ -11381,9 +13079,55 @@
           </a:p>
         </p:txBody>
       </p:sp>
+      <p:sp>
+        <p:nvSpPr>
+          <p:cNvPr id="23" name="Rounded Rectangle 22"/>
+          <p:cNvSpPr/>
+          <p:nvPr/>
+        </p:nvSpPr>
+        <p:spPr>
+          <a:xfrm>
+            <a:off x="987552" y="4398264"/>
+            <a:ext cx="512064" cy="512064"/>
+          </a:xfrm>
+          <a:prstGeom prst="roundRect">
+            <a:avLst>
+              <a:gd name="adj" fmla="val 26000"/>
+            </a:avLst>
+          </a:prstGeom>
+          <a:solidFill>
+            <a:srgbClr val="EE0000"/>
+          </a:solidFill>
+          <a:ln>
+            <a:noFill/>
+          </a:ln>
+          <a:effectLst/>
+        </p:spPr>
+        <p:style>
+          <a:lnRef idx="1">
+            <a:schemeClr val="accent1"/>
+          </a:lnRef>
+          <a:fillRef idx="3">
+            <a:schemeClr val="accent1"/>
+          </a:fillRef>
+          <a:effectRef idx="2">
+            <a:schemeClr val="accent1"/>
+          </a:effectRef>
+          <a:fontRef idx="minor">
+            <a:schemeClr val="lt1"/>
+          </a:fontRef>
+        </p:style>
+        <p:txBody>
+          <a:bodyPr rtlCol="0" anchor="ctr"/>
+          <a:lstStyle/>
+          <a:p>
+            <a:pPr algn="ctr"/>
+          </a:p>
+        </p:txBody>
+      </p:sp>
       <p:pic>
         <p:nvPicPr>
-          <p:cNvPr id="19" name="Picture 18" descr="check_steel.png"/>
+          <p:cNvPr id="24" name="Picture 23" descr="check_white.png"/>
           <p:cNvPicPr>
             <a:picLocks noChangeAspect="1"/>
           </p:cNvPicPr>
@@ -11397,8 +13141,8 @@
         </p:blipFill>
         <p:spPr>
           <a:xfrm>
-            <a:off x="987552" y="4956048"/>
-            <a:ext cx="237744" cy="237744"/>
+            <a:off x="1110447" y="4521159"/>
+            <a:ext cx="266273" cy="266273"/>
           </a:xfrm>
           <a:prstGeom prst="rect">
             <a:avLst/>
@@ -11407,14 +13151,14 @@
       </p:pic>
       <p:sp>
         <p:nvSpPr>
-          <p:cNvPr id="20" name="TextBox 19"/>
+          <p:cNvPr id="25" name="TextBox 24"/>
           <p:cNvSpPr txBox="1"/>
           <p:nvPr/>
         </p:nvSpPr>
         <p:spPr>
           <a:xfrm>
-            <a:off x="1353312" y="4809744"/>
-            <a:ext cx="5029200" cy="530352"/>
+            <a:off x="1627632" y="4261104"/>
+            <a:ext cx="4206240" cy="786384"/>
           </a:xfrm>
           <a:prstGeom prst="rect">
             <a:avLst/>
@@ -11439,7 +13183,7 @@
               </a:spcAft>
             </a:pPr>
             <a:r>
-              <a:rPr sz="1200" b="0">
+              <a:rPr sz="1150" b="0">
                 <a:solidFill>
                   <a:srgbClr val="1A1A1A"/>
                 </a:solidFill>
@@ -11450,16 +13194,310 @@
           </a:p>
         </p:txBody>
       </p:sp>
-      <p:sp>
-        <p:nvSpPr>
-          <p:cNvPr id="21" name="Rounded Rectangle 20"/>
+      <p:cxnSp>
+        <p:nvCxnSpPr>
+          <p:cNvPr id="26" name="Connector 25"/>
+          <p:cNvCxnSpPr/>
+          <p:nvPr/>
+        </p:nvCxnSpPr>
+        <p:spPr>
+          <a:xfrm>
+            <a:off x="841248" y="6437376"/>
+            <a:ext cx="10509199" cy="0"/>
+          </a:xfrm>
+          <a:prstGeom prst="bentConnector3">
+            <a:avLst/>
+          </a:prstGeom>
+          <a:ln w="12700">
+            <a:solidFill>
+              <a:srgbClr val="DDE1E6"/>
+            </a:solidFill>
+          </a:ln>
+          <a:effectLst/>
+        </p:spPr>
+        <p:style>
+          <a:lnRef idx="2">
+            <a:schemeClr val="accent1"/>
+          </a:lnRef>
+          <a:fillRef idx="0">
+            <a:schemeClr val="accent1"/>
+          </a:fillRef>
+          <a:effectRef idx="1">
+            <a:schemeClr val="accent1"/>
+          </a:effectRef>
+          <a:fontRef idx="minor">
+            <a:schemeClr val="tx1"/>
+          </a:fontRef>
+        </p:style>
+      </p:cxnSp>
+      <p:sp>
+        <p:nvSpPr>
+          <p:cNvPr id="27" name="TextBox 26"/>
+          <p:cNvSpPr txBox="1"/>
+          <p:nvPr/>
+        </p:nvSpPr>
+        <p:spPr>
+          <a:xfrm>
+            <a:off x="841248" y="6473952"/>
+            <a:ext cx="7315200" cy="274320"/>
+          </a:xfrm>
+          <a:prstGeom prst="rect">
+            <a:avLst/>
+          </a:prstGeom>
+          <a:noFill/>
+        </p:spPr>
+        <p:txBody>
+          <a:bodyPr wrap="square" anchor="t" lIns="0" rIns="0" tIns="0" bIns="0">
+            <a:spAutoFit/>
+          </a:bodyPr>
+          <a:lstStyle/>
+          <a:p>
+            <a:pPr algn="l">
+              <a:lnSpc>
+                <a:spcPct val="106000"/>
+              </a:lnSpc>
+              <a:spcBef>
+                <a:spcPts val="0"/>
+              </a:spcBef>
+              <a:spcAft>
+                <a:spcPts val="0"/>
+              </a:spcAft>
+            </a:pPr>
+            <a:r>
+              <a:rPr sz="950" b="0">
+                <a:solidFill>
+                  <a:srgbClr val="8A9099"/>
+                </a:solidFill>
+                <a:latin typeface="Red Hat Text"/>
+              </a:rPr>
+              <a:t>CONFIDENTIAL</a:t>
+            </a:r>
+          </a:p>
+        </p:txBody>
+      </p:sp>
+      <p:sp>
+        <p:nvSpPr>
+          <p:cNvPr id="28" name="TextBox 27"/>
+          <p:cNvSpPr txBox="1"/>
+          <p:nvPr/>
+        </p:nvSpPr>
+        <p:spPr>
+          <a:xfrm>
+            <a:off x="10801807" y="6473952"/>
+            <a:ext cx="548640" cy="274320"/>
+          </a:xfrm>
+          <a:prstGeom prst="rect">
+            <a:avLst/>
+          </a:prstGeom>
+          <a:noFill/>
+        </p:spPr>
+        <p:txBody>
+          <a:bodyPr wrap="square" anchor="t" lIns="0" rIns="0" tIns="0" bIns="0">
+            <a:spAutoFit/>
+          </a:bodyPr>
+          <a:lstStyle/>
+          <a:p>
+            <a:pPr algn="r">
+              <a:lnSpc>
+                <a:spcPct val="106000"/>
+              </a:lnSpc>
+              <a:spcBef>
+                <a:spcPts val="0"/>
+              </a:spcBef>
+              <a:spcAft>
+                <a:spcPts val="0"/>
+              </a:spcAft>
+            </a:pPr>
+            <a:r>
+              <a:rPr sz="950" b="0">
+                <a:solidFill>
+                  <a:srgbClr val="8A9099"/>
+                </a:solidFill>
+                <a:latin typeface="Red Hat Text"/>
+              </a:rPr>
+              <a:t>7</a:t>
+            </a:r>
+          </a:p>
+        </p:txBody>
+      </p:sp>
+    </p:spTree>
+  </p:cSld>
+  <p:clrMapOvr>
+    <a:masterClrMapping/>
+  </p:clrMapOvr>
+</p:sld>
+</file>
+
+<file path=ppt/slides/slide9.xml><?xml version="1.0" encoding="utf-8"?>
+<p:sld xmlns:a="http://schemas.openxmlformats.org/drawingml/2006/main" xmlns:p="http://schemas.openxmlformats.org/presentationml/2006/main" xmlns:r="http://schemas.openxmlformats.org/officeDocument/2006/relationships">
+  <p:cSld>
+    <p:spTree>
+      <p:nvGrpSpPr>
+        <p:cNvPr id="1" name=""/>
+        <p:cNvGrpSpPr/>
+        <p:nvPr/>
+      </p:nvGrpSpPr>
+      <p:grpSpPr/>
+      <p:pic>
+        <p:nvPicPr>
+          <p:cNvPr id="2" name="Picture 1" descr="redhat_logo.jpg"/>
+          <p:cNvPicPr>
+            <a:picLocks noChangeAspect="1"/>
+          </p:cNvPicPr>
+          <p:nvPr/>
+        </p:nvPicPr>
+        <p:blipFill>
+          <a:blip r:embed="rId2"/>
+          <a:stretch>
+            <a:fillRect/>
+          </a:stretch>
+        </p:blipFill>
+        <p:spPr>
+          <a:xfrm>
+            <a:off x="10326319" y="475488"/>
+            <a:ext cx="1024128" cy="242248"/>
+          </a:xfrm>
+          <a:prstGeom prst="rect">
+            <a:avLst/>
+          </a:prstGeom>
+        </p:spPr>
+      </p:pic>
+      <p:sp>
+        <p:nvSpPr>
+          <p:cNvPr id="3" name="TextBox 2"/>
+          <p:cNvSpPr txBox="1"/>
+          <p:nvPr/>
+        </p:nvSpPr>
+        <p:spPr>
+          <a:xfrm>
+            <a:off x="841248" y="548640"/>
+            <a:ext cx="8595360" cy="274320"/>
+          </a:xfrm>
+          <a:prstGeom prst="rect">
+            <a:avLst/>
+          </a:prstGeom>
+          <a:noFill/>
+        </p:spPr>
+        <p:txBody>
+          <a:bodyPr wrap="square" anchor="t" lIns="0" rIns="0" tIns="0" bIns="0">
+            <a:spAutoFit/>
+          </a:bodyPr>
+          <a:lstStyle/>
+          <a:p>
+            <a:pPr algn="l">
+              <a:lnSpc>
+                <a:spcPct val="106000"/>
+              </a:lnSpc>
+              <a:spcBef>
+                <a:spcPts val="0"/>
+              </a:spcBef>
+              <a:spcAft>
+                <a:spcPts val="0"/>
+              </a:spcAft>
+            </a:pPr>
+            <a:r>
+              <a:rPr sz="1250" b="1" spc="220">
+                <a:solidFill>
+                  <a:srgbClr val="EE0000"/>
+                </a:solidFill>
+                <a:latin typeface="Red Hat Display"/>
+              </a:rPr>
+              <a:t>M11 · GITOPS AT SCALE &amp; PROGRESSIVE DELIVERY</a:t>
+            </a:r>
+          </a:p>
+        </p:txBody>
+      </p:sp>
+      <p:sp>
+        <p:nvSpPr>
+          <p:cNvPr id="4" name="TextBox 3"/>
+          <p:cNvSpPr txBox="1"/>
+          <p:nvPr/>
+        </p:nvSpPr>
+        <p:spPr>
+          <a:xfrm>
+            <a:off x="841248" y="877824"/>
+            <a:ext cx="10515600" cy="548640"/>
+          </a:xfrm>
+          <a:prstGeom prst="rect">
+            <a:avLst/>
+          </a:prstGeom>
+          <a:noFill/>
+        </p:spPr>
+        <p:txBody>
+          <a:bodyPr wrap="none" anchor="t" lIns="0" rIns="0" tIns="0" bIns="0">
+            <a:spAutoFit/>
+          </a:bodyPr>
+          <a:lstStyle/>
+          <a:p>
+            <a:pPr algn="l">
+              <a:lnSpc>
+                <a:spcPct val="100000"/>
+              </a:lnSpc>
+              <a:spcBef>
+                <a:spcPts val="0"/>
+              </a:spcBef>
+              <a:spcAft>
+                <a:spcPts val="0"/>
+              </a:spcAft>
+            </a:pPr>
+            <a:r>
+              <a:rPr sz="2500" b="1">
+                <a:solidFill>
+                  <a:srgbClr val="1A1A1A"/>
+                </a:solidFill>
+                <a:latin typeface="Red Hat Display"/>
+              </a:rPr>
+              <a:t>Appset</a:t>
+            </a:r>
+          </a:p>
+        </p:txBody>
+      </p:sp>
+      <p:cxnSp>
+        <p:nvCxnSpPr>
+          <p:cNvPr id="5" name="Connector 4"/>
+          <p:cNvCxnSpPr/>
+          <p:nvPr/>
+        </p:nvCxnSpPr>
+        <p:spPr>
+          <a:xfrm>
+            <a:off x="841248" y="1554480"/>
+            <a:ext cx="1371600" cy="0"/>
+          </a:xfrm>
+          <a:prstGeom prst="bentConnector3">
+            <a:avLst/>
+          </a:prstGeom>
+          <a:ln w="31750">
+            <a:solidFill>
+              <a:srgbClr val="EE0000"/>
+            </a:solidFill>
+          </a:ln>
+          <a:effectLst/>
+        </p:spPr>
+        <p:style>
+          <a:lnRef idx="2">
+            <a:schemeClr val="accent1"/>
+          </a:lnRef>
+          <a:fillRef idx="0">
+            <a:schemeClr val="accent1"/>
+          </a:fillRef>
+          <a:effectRef idx="1">
+            <a:schemeClr val="accent1"/>
+          </a:effectRef>
+          <a:fontRef idx="minor">
+            <a:schemeClr val="tx1"/>
+          </a:fontRef>
+        </p:style>
+      </p:cxnSp>
+      <p:sp>
+        <p:nvSpPr>
+          <p:cNvPr id="6" name="Rounded Rectangle 5"/>
           <p:cNvSpPr/>
           <p:nvPr/>
         </p:nvSpPr>
         <p:spPr>
           <a:xfrm>
-            <a:off x="6812280" y="2395728"/>
-            <a:ext cx="4538167" cy="2944368"/>
+            <a:off x="841248" y="2331720"/>
+            <a:ext cx="10509199" cy="3794760"/>
           </a:xfrm>
           <a:prstGeom prst="roundRect">
             <a:avLst>
@@ -11498,169 +13536,33 @@
           </a:p>
         </p:txBody>
       </p:sp>
-      <p:sp>
-        <p:nvSpPr>
-          <p:cNvPr id="22" name="Rounded Rectangle 21"/>
-          <p:cNvSpPr/>
-          <p:nvPr/>
-        </p:nvSpPr>
-        <p:spPr>
-          <a:xfrm>
-            <a:off x="7013448" y="2596896"/>
-            <a:ext cx="1298448" cy="310896"/>
-          </a:xfrm>
-          <a:prstGeom prst="roundRect">
-            <a:avLst>
-              <a:gd name="adj" fmla="val 50000"/>
-            </a:avLst>
-          </a:prstGeom>
-          <a:solidFill>
-            <a:srgbClr val="FCECEC"/>
-          </a:solidFill>
-          <a:ln>
-            <a:noFill/>
-          </a:ln>
-          <a:effectLst/>
-        </p:spPr>
-        <p:style>
-          <a:lnRef idx="1">
-            <a:schemeClr val="accent1"/>
-          </a:lnRef>
-          <a:fillRef idx="3">
-            <a:schemeClr val="accent1"/>
-          </a:fillRef>
-          <a:effectRef idx="2">
-            <a:schemeClr val="accent1"/>
-          </a:effectRef>
-          <a:fontRef idx="minor">
-            <a:schemeClr val="lt1"/>
-          </a:fontRef>
-        </p:style>
-        <p:txBody>
-          <a:bodyPr rtlCol="0" anchor="ctr"/>
-          <a:lstStyle/>
-          <a:p>
-            <a:pPr algn="ctr"/>
-          </a:p>
-        </p:txBody>
-      </p:sp>
-      <p:sp>
-        <p:nvSpPr>
-          <p:cNvPr id="23" name="TextBox 22"/>
-          <p:cNvSpPr txBox="1"/>
-          <p:nvPr/>
-        </p:nvSpPr>
-        <p:spPr>
-          <a:xfrm>
-            <a:off x="7013448" y="2596896"/>
-            <a:ext cx="1298448" cy="310896"/>
-          </a:xfrm>
-          <a:prstGeom prst="rect">
-            <a:avLst/>
-          </a:prstGeom>
-          <a:noFill/>
-        </p:spPr>
-        <p:txBody>
-          <a:bodyPr wrap="none" anchor="ctr" lIns="0" rIns="0" tIns="0" bIns="0">
-            <a:spAutoFit/>
-          </a:bodyPr>
-          <a:lstStyle/>
-          <a:p>
-            <a:pPr algn="ctr">
-              <a:lnSpc>
-                <a:spcPct val="106000"/>
-              </a:lnSpc>
-              <a:spcBef>
-                <a:spcPts val="0"/>
-              </a:spcBef>
-              <a:spcAft>
-                <a:spcPts val="0"/>
-              </a:spcAft>
-            </a:pPr>
-            <a:r>
-              <a:rPr sz="850" b="1">
-                <a:solidFill>
-                  <a:srgbClr val="B80000"/>
-                </a:solidFill>
-                <a:latin typeface="Red Hat Display"/>
-              </a:rPr>
-              <a:t>MEDIA PASS</a:t>
-            </a:r>
-          </a:p>
-        </p:txBody>
-      </p:sp>
       <p:pic>
         <p:nvPicPr>
-          <p:cNvPr id="24" name="Picture 23" descr="eye_slate.png"/>
+          <p:cNvPr id="7" name="Picture 6" descr="01-appset.png"/>
           <p:cNvPicPr>
             <a:picLocks noChangeAspect="1"/>
           </p:cNvPicPr>
           <p:nvPr/>
         </p:nvPicPr>
         <p:blipFill>
-          <a:blip r:embed="rId4"/>
+          <a:blip r:embed="rId3"/>
           <a:stretch>
             <a:fillRect/>
           </a:stretch>
         </p:blipFill>
         <p:spPr>
           <a:xfrm>
-            <a:off x="8843619" y="3108960"/>
-            <a:ext cx="475488" cy="475488"/>
+            <a:off x="1042416" y="2877307"/>
+            <a:ext cx="10106863" cy="2703585"/>
           </a:xfrm>
           <a:prstGeom prst="rect">
             <a:avLst/>
           </a:prstGeom>
         </p:spPr>
       </p:pic>
-      <p:sp>
-        <p:nvSpPr>
-          <p:cNvPr id="25" name="TextBox 24"/>
-          <p:cNvSpPr txBox="1"/>
-          <p:nvPr/>
-        </p:nvSpPr>
-        <p:spPr>
-          <a:xfrm>
-            <a:off x="7050024" y="3721608"/>
-            <a:ext cx="4062679" cy="1481328"/>
-          </a:xfrm>
-          <a:prstGeom prst="rect">
-            <a:avLst/>
-          </a:prstGeom>
-          <a:noFill/>
-        </p:spPr>
-        <p:txBody>
-          <a:bodyPr wrap="square" anchor="t" lIns="0" rIns="0" tIns="0" bIns="0">
-            <a:spAutoFit/>
-          </a:bodyPr>
-          <a:lstStyle/>
-          <a:p>
-            <a:pPr algn="l">
-              <a:lnSpc>
-                <a:spcPct val="120000"/>
-              </a:lnSpc>
-              <a:spcBef>
-                <a:spcPts val="0"/>
-              </a:spcBef>
-              <a:spcAft>
-                <a:spcPts val="0"/>
-              </a:spcAft>
-            </a:pPr>
-            <a:r>
-              <a:rPr sz="950" b="0">
-                <a:solidFill>
-                  <a:srgbClr val="8A9099"/>
-                </a:solidFill>
-                <a:latin typeface="Red Hat Text"/>
-              </a:rPr>
-              <a:t>Two-column "reach for it / don't" card, with a small pointer to the Networking, Service Mesh, and Multi-Cluster modules.</a:t>
-            </a:r>
-          </a:p>
-        </p:txBody>
-      </p:sp>
       <p:cxnSp>
         <p:nvCxnSpPr>
-          <p:cNvPr id="26" name="Connector 25"/>
+          <p:cNvPr id="8" name="Connector 7"/>
           <p:cNvCxnSpPr/>
           <p:nvPr/>
         </p:nvCxnSpPr>
@@ -11696,7 +13598,7 @@
       </p:cxnSp>
       <p:sp>
         <p:nvSpPr>
-          <p:cNvPr id="27" name="TextBox 26"/>
+          <p:cNvPr id="9" name="TextBox 8"/>
           <p:cNvSpPr txBox="1"/>
           <p:nvPr/>
         </p:nvSpPr>
@@ -11741,7 +13643,7 @@
       </p:sp>
       <p:sp>
         <p:nvSpPr>
-          <p:cNvPr id="28" name="TextBox 27"/>
+          <p:cNvPr id="10" name="TextBox 9"/>
           <p:cNvSpPr txBox="1"/>
           <p:nvPr/>
         </p:nvSpPr>
@@ -11779,7 +13681,7 @@
                 </a:solidFill>
                 <a:latin typeface="Red Hat Text"/>
               </a:rPr>
-              <a:t>7</a:t>
+              <a:t>8</a:t>
             </a:r>
           </a:p>
         </p:txBody>
